--- a/ANA500_Micro-Project_JonathanEspedal.pptx
+++ b/ANA500_Micro-Project_JonathanEspedal.pptx
@@ -71,7 +71,7 @@
         <p:txBody>
           <a:bodyPr/>
           <a:p>
-            <a:fld id="{B80B8E1D-9B63-41A0-BC28-F153D6318221}" type="slidenum">
+            <a:fld id="{AE8669D4-D935-4754-8300-1D5C29B74CDC}" type="slidenum">
               <a:t>&lt;#&gt;</a:t>
             </a:fld>
           </a:p>
@@ -280,7 +280,7 @@
         <p:txBody>
           <a:bodyPr/>
           <a:p>
-            <a:fld id="{BEF8C0BB-93B7-4D7E-94E2-B9B7F5830580}" type="slidenum">
+            <a:fld id="{02CEC5A0-F4D3-4AB3-977F-174D4E435247}" type="slidenum">
               <a:t>&lt;#&gt;</a:t>
             </a:fld>
           </a:p>
@@ -575,7 +575,7 @@
         <p:txBody>
           <a:bodyPr/>
           <a:p>
-            <a:fld id="{19A853C6-958C-4CC1-A060-D4D858F56F94}" type="slidenum">
+            <a:fld id="{8404AFDC-F1CC-48C6-9418-8024CF8F7DD7}" type="slidenum">
               <a:t>&lt;#&gt;</a:t>
             </a:fld>
           </a:p>
@@ -956,7 +956,7 @@
         <p:txBody>
           <a:bodyPr/>
           <a:p>
-            <a:fld id="{E582C10E-3E8F-4397-BB09-1E1B6FB93D62}" type="slidenum">
+            <a:fld id="{54E17D1A-61DB-4409-B525-A3DB4D572FC4}" type="slidenum">
               <a:t>&lt;#&gt;</a:t>
             </a:fld>
           </a:p>
@@ -1039,7 +1039,7 @@
         <p:txBody>
           <a:bodyPr/>
           <a:p>
-            <a:fld id="{A5D2B5AA-1084-40B3-8F71-2DE4478F447D}" type="slidenum">
+            <a:fld id="{08FA9F6C-E47E-4281-A857-E00DDACBD85D}" type="slidenum">
               <a:t>&lt;#&gt;</a:t>
             </a:fld>
           </a:p>
@@ -1202,7 +1202,7 @@
         <p:txBody>
           <a:bodyPr/>
           <a:p>
-            <a:fld id="{33F4C431-BB6C-4762-9932-9836C10562A3}" type="slidenum">
+            <a:fld id="{FD72A5C8-1727-4E59-B8CA-50AED8D02381}" type="slidenum">
               <a:t>&lt;#&gt;</a:t>
             </a:fld>
           </a:p>
@@ -1368,7 +1368,7 @@
         <p:txBody>
           <a:bodyPr/>
           <a:p>
-            <a:fld id="{FF0BC9F1-9441-4424-B7C4-EA09908B6D41}" type="slidenum">
+            <a:fld id="{AC12E6FE-7880-429C-ACCC-613A58310235}" type="slidenum">
               <a:t>&lt;#&gt;</a:t>
             </a:fld>
           </a:p>
@@ -1577,7 +1577,7 @@
         <p:txBody>
           <a:bodyPr/>
           <a:p>
-            <a:fld id="{EA0EA838-8025-4418-9548-D4AA2CAAC7D3}" type="slidenum">
+            <a:fld id="{EA24A2C0-3B9B-463B-B33A-721C626556EF}" type="slidenum">
               <a:t>&lt;#&gt;</a:t>
             </a:fld>
           </a:p>
@@ -1700,7 +1700,7 @@
         <p:txBody>
           <a:bodyPr/>
           <a:p>
-            <a:fld id="{732E4934-6D06-4F76-823A-12DE565C55EE}" type="slidenum">
+            <a:fld id="{A0ABD655-C88E-4BA5-811F-93FAE7C144A8}" type="slidenum">
               <a:t>&lt;#&gt;</a:t>
             </a:fld>
           </a:p>
@@ -1821,7 +1821,7 @@
         <p:txBody>
           <a:bodyPr/>
           <a:p>
-            <a:fld id="{0E546975-7940-4260-9A1F-8FF6153B2DCE}" type="slidenum">
+            <a:fld id="{8005B95C-7EEE-423F-AF37-666025DC9478}" type="slidenum">
               <a:t>&lt;#&gt;</a:t>
             </a:fld>
           </a:p>
@@ -2073,7 +2073,7 @@
         <p:txBody>
           <a:bodyPr/>
           <a:p>
-            <a:fld id="{D9A10F68-E6E6-4817-9DD3-ED8702AD3144}" type="slidenum">
+            <a:fld id="{43F0948F-0541-4D15-8F73-D1ABB8F2ABD8}" type="slidenum">
               <a:t>&lt;#&gt;</a:t>
             </a:fld>
           </a:p>
@@ -2236,7 +2236,7 @@
         <p:txBody>
           <a:bodyPr/>
           <a:p>
-            <a:fld id="{30B271DB-3A43-4F69-ADD2-8961AAD6B456}" type="slidenum">
+            <a:fld id="{94BB7BF5-E70C-48F6-93D6-5738BFF56305}" type="slidenum">
               <a:t>&lt;#&gt;</a:t>
             </a:fld>
           </a:p>
@@ -2488,7 +2488,7 @@
         <p:txBody>
           <a:bodyPr/>
           <a:p>
-            <a:fld id="{BB981942-0BCC-4D72-9FB4-FC3F83209AE6}" type="slidenum">
+            <a:fld id="{BE73EAA0-78FE-4A45-BA45-770D4B969AEC}" type="slidenum">
               <a:t>&lt;#&gt;</a:t>
             </a:fld>
           </a:p>
@@ -2740,7 +2740,7 @@
         <p:txBody>
           <a:bodyPr/>
           <a:p>
-            <a:fld id="{8A10397A-39C2-4461-B488-21CEAC993DD3}" type="slidenum">
+            <a:fld id="{2921E4C0-4BD3-47B0-A972-F44AFCE51211}" type="slidenum">
               <a:t>&lt;#&gt;</a:t>
             </a:fld>
           </a:p>
@@ -2949,7 +2949,7 @@
         <p:txBody>
           <a:bodyPr/>
           <a:p>
-            <a:fld id="{B020583A-8ADA-49E3-AB01-800277BBB8DF}" type="slidenum">
+            <a:fld id="{6AE15C18-772D-436C-B490-171F7A15E324}" type="slidenum">
               <a:t>&lt;#&gt;</a:t>
             </a:fld>
           </a:p>
@@ -3244,7 +3244,7 @@
         <p:txBody>
           <a:bodyPr/>
           <a:p>
-            <a:fld id="{F50F4E0E-1439-453B-B1E8-6FBB07A0A31B}" type="slidenum">
+            <a:fld id="{BE89F735-389E-4B4C-AA56-083FA26C3B2D}" type="slidenum">
               <a:t>&lt;#&gt;</a:t>
             </a:fld>
           </a:p>
@@ -3625,7 +3625,7 @@
         <p:txBody>
           <a:bodyPr/>
           <a:p>
-            <a:fld id="{EB746B57-5AF7-43CE-A520-D0BAC8CD61E2}" type="slidenum">
+            <a:fld id="{36602ED5-BC95-44E0-AEFC-B87737F1A8F2}" type="slidenum">
               <a:t>&lt;#&gt;</a:t>
             </a:fld>
           </a:p>
@@ -3791,7 +3791,7 @@
         <p:txBody>
           <a:bodyPr/>
           <a:p>
-            <a:fld id="{B20F2A6F-B516-48FD-9A58-2FD10D516768}" type="slidenum">
+            <a:fld id="{3FE2AC8F-3EDF-4233-9171-BA54594E6D36}" type="slidenum">
               <a:t>&lt;#&gt;</a:t>
             </a:fld>
           </a:p>
@@ -4000,7 +4000,7 @@
         <p:txBody>
           <a:bodyPr/>
           <a:p>
-            <a:fld id="{F10E78F5-B456-45AF-8980-3CA2896C43A3}" type="slidenum">
+            <a:fld id="{7C68BCD1-2CBE-46E0-B5DF-3ADC32BE3139}" type="slidenum">
               <a:t>&lt;#&gt;</a:t>
             </a:fld>
           </a:p>
@@ -4123,7 +4123,7 @@
         <p:txBody>
           <a:bodyPr/>
           <a:p>
-            <a:fld id="{2F9FED63-883A-47F2-96DD-8F76C320DC9E}" type="slidenum">
+            <a:fld id="{711CE0D5-7259-4D0D-B382-C115E3483549}" type="slidenum">
               <a:t>&lt;#&gt;</a:t>
             </a:fld>
           </a:p>
@@ -4244,7 +4244,7 @@
         <p:txBody>
           <a:bodyPr/>
           <a:p>
-            <a:fld id="{D8F0201D-1E1D-45B8-A700-550111697F13}" type="slidenum">
+            <a:fld id="{26646311-50E4-49B7-A399-6DD41F18B230}" type="slidenum">
               <a:t>&lt;#&gt;</a:t>
             </a:fld>
           </a:p>
@@ -4496,7 +4496,7 @@
         <p:txBody>
           <a:bodyPr/>
           <a:p>
-            <a:fld id="{4F1011A4-E271-4445-926B-4892A7C71FD9}" type="slidenum">
+            <a:fld id="{73F73E1E-8E85-4F42-A760-48A1F716609B}" type="slidenum">
               <a:t>&lt;#&gt;</a:t>
             </a:fld>
           </a:p>
@@ -4748,7 +4748,7 @@
         <p:txBody>
           <a:bodyPr/>
           <a:p>
-            <a:fld id="{41D95C8A-94E5-474D-BFEB-2D6175DA285F}" type="slidenum">
+            <a:fld id="{F23629FD-63B2-4BF5-8921-8D7B67E9D486}" type="slidenum">
               <a:t>&lt;#&gt;</a:t>
             </a:fld>
           </a:p>
@@ -5000,7 +5000,7 @@
         <p:txBody>
           <a:bodyPr/>
           <a:p>
-            <a:fld id="{07892F4E-CA27-412C-9F35-9D44F44B6DD1}" type="slidenum">
+            <a:fld id="{A9A6E18D-B0F9-43A4-8494-5B87F9F086E4}" type="slidenum">
               <a:t>&lt;#&gt;</a:t>
             </a:fld>
           </a:p>
@@ -5068,8 +5068,8 @@
         </p:nvSpPr>
         <p:spPr>
           <a:xfrm>
-            <a:off x="838080" y="365040"/>
-            <a:ext cx="10514880" cy="1324800"/>
+            <a:off x="609480" y="273600"/>
+            <a:ext cx="10972080" cy="1144440"/>
           </a:xfrm>
           <a:prstGeom prst="rect">
             <a:avLst/>
@@ -5112,13 +5112,238 @@
             <a:spLocks noGrp="1"/>
           </p:cNvSpPr>
           <p:nvPr>
+            <p:ph type="body"/>
+          </p:nvPr>
+        </p:nvSpPr>
+        <p:spPr>
+          <a:xfrm>
+            <a:off x="609480" y="1604520"/>
+            <a:ext cx="10972080" cy="3976920"/>
+          </a:xfrm>
+          <a:prstGeom prst="rect">
+            <a:avLst/>
+          </a:prstGeom>
+          <a:noFill/>
+          <a:ln w="0">
+            <a:noFill/>
+          </a:ln>
+        </p:spPr>
+        <p:txBody>
+          <a:bodyPr lIns="0" rIns="0" tIns="0" bIns="0" anchor="t">
+            <a:normAutofit/>
+          </a:bodyPr>
+          <a:p>
+            <a:pPr marL="432000" indent="-324000">
+              <a:spcBef>
+                <a:spcPts val="1417"/>
+              </a:spcBef>
+              <a:buClr>
+                <a:srgbClr val="000000"/>
+              </a:buClr>
+              <a:buSzPct val="45000"/>
+              <a:buFont typeface="Wingdings" charset="2"/>
+              <a:buChar char=""/>
+            </a:pPr>
+            <a:r>
+              <a:rPr b="0" lang="en-US" sz="1800" spc="-1" strike="noStrike">
+                <a:solidFill>
+                  <a:srgbClr val="000000"/>
+                </a:solidFill>
+                <a:latin typeface="Arial"/>
+              </a:rPr>
+              <a:t>Click to edit the outline text format</a:t>
+            </a:r>
+            <a:endParaRPr b="0" lang="en-US" sz="1800" spc="-1" strike="noStrike">
+              <a:solidFill>
+                <a:srgbClr val="000000"/>
+              </a:solidFill>
+              <a:latin typeface="Arial"/>
+            </a:endParaRPr>
+          </a:p>
+          <a:p>
+            <a:pPr lvl="1" marL="864000" indent="-324000">
+              <a:spcBef>
+                <a:spcPts val="1134"/>
+              </a:spcBef>
+              <a:buClr>
+                <a:srgbClr val="000000"/>
+              </a:buClr>
+              <a:buSzPct val="75000"/>
+              <a:buFont typeface="Symbol" charset="2"/>
+              <a:buChar char=""/>
+            </a:pPr>
+            <a:r>
+              <a:rPr b="0" lang="en-US" sz="1800" spc="-1" strike="noStrike">
+                <a:solidFill>
+                  <a:srgbClr val="000000"/>
+                </a:solidFill>
+                <a:latin typeface="Arial"/>
+              </a:rPr>
+              <a:t>Second Outline Level</a:t>
+            </a:r>
+            <a:endParaRPr b="0" lang="en-US" sz="1800" spc="-1" strike="noStrike">
+              <a:solidFill>
+                <a:srgbClr val="000000"/>
+              </a:solidFill>
+              <a:latin typeface="Arial"/>
+            </a:endParaRPr>
+          </a:p>
+          <a:p>
+            <a:pPr lvl="2" marL="1296000" indent="-288000">
+              <a:spcBef>
+                <a:spcPts val="850"/>
+              </a:spcBef>
+              <a:buClr>
+                <a:srgbClr val="000000"/>
+              </a:buClr>
+              <a:buSzPct val="45000"/>
+              <a:buFont typeface="Wingdings" charset="2"/>
+              <a:buChar char=""/>
+            </a:pPr>
+            <a:r>
+              <a:rPr b="0" lang="en-US" sz="1800" spc="-1" strike="noStrike">
+                <a:solidFill>
+                  <a:srgbClr val="000000"/>
+                </a:solidFill>
+                <a:latin typeface="Arial"/>
+              </a:rPr>
+              <a:t>Third Outline Level</a:t>
+            </a:r>
+            <a:endParaRPr b="0" lang="en-US" sz="1800" spc="-1" strike="noStrike">
+              <a:solidFill>
+                <a:srgbClr val="000000"/>
+              </a:solidFill>
+              <a:latin typeface="Arial"/>
+            </a:endParaRPr>
+          </a:p>
+          <a:p>
+            <a:pPr lvl="3" marL="1728000" indent="-216000">
+              <a:spcBef>
+                <a:spcPts val="567"/>
+              </a:spcBef>
+              <a:buClr>
+                <a:srgbClr val="000000"/>
+              </a:buClr>
+              <a:buSzPct val="75000"/>
+              <a:buFont typeface="Symbol" charset="2"/>
+              <a:buChar char=""/>
+            </a:pPr>
+            <a:r>
+              <a:rPr b="0" lang="en-US" sz="1800" spc="-1" strike="noStrike">
+                <a:solidFill>
+                  <a:srgbClr val="000000"/>
+                </a:solidFill>
+                <a:latin typeface="Arial"/>
+              </a:rPr>
+              <a:t>Fourth Outline Level</a:t>
+            </a:r>
+            <a:endParaRPr b="0" lang="en-US" sz="1800" spc="-1" strike="noStrike">
+              <a:solidFill>
+                <a:srgbClr val="000000"/>
+              </a:solidFill>
+              <a:latin typeface="Arial"/>
+            </a:endParaRPr>
+          </a:p>
+          <a:p>
+            <a:pPr lvl="4" marL="2160000" indent="-216000">
+              <a:spcBef>
+                <a:spcPts val="283"/>
+              </a:spcBef>
+              <a:buClr>
+                <a:srgbClr val="000000"/>
+              </a:buClr>
+              <a:buSzPct val="45000"/>
+              <a:buFont typeface="Wingdings" charset="2"/>
+              <a:buChar char=""/>
+            </a:pPr>
+            <a:r>
+              <a:rPr b="0" lang="en-US" sz="1800" spc="-1" strike="noStrike">
+                <a:solidFill>
+                  <a:srgbClr val="000000"/>
+                </a:solidFill>
+                <a:latin typeface="Arial"/>
+              </a:rPr>
+              <a:t>Fifth Outline Level</a:t>
+            </a:r>
+            <a:endParaRPr b="0" lang="en-US" sz="1800" spc="-1" strike="noStrike">
+              <a:solidFill>
+                <a:srgbClr val="000000"/>
+              </a:solidFill>
+              <a:latin typeface="Arial"/>
+            </a:endParaRPr>
+          </a:p>
+          <a:p>
+            <a:pPr lvl="5" marL="2592000" indent="-216000">
+              <a:spcBef>
+                <a:spcPts val="283"/>
+              </a:spcBef>
+              <a:buClr>
+                <a:srgbClr val="000000"/>
+              </a:buClr>
+              <a:buSzPct val="45000"/>
+              <a:buFont typeface="Wingdings" charset="2"/>
+              <a:buChar char=""/>
+            </a:pPr>
+            <a:r>
+              <a:rPr b="0" lang="en-US" sz="1800" spc="-1" strike="noStrike">
+                <a:solidFill>
+                  <a:srgbClr val="000000"/>
+                </a:solidFill>
+                <a:latin typeface="Arial"/>
+              </a:rPr>
+              <a:t>Sixth Outline Level</a:t>
+            </a:r>
+            <a:endParaRPr b="0" lang="en-US" sz="1800" spc="-1" strike="noStrike">
+              <a:solidFill>
+                <a:srgbClr val="000000"/>
+              </a:solidFill>
+              <a:latin typeface="Arial"/>
+            </a:endParaRPr>
+          </a:p>
+          <a:p>
+            <a:pPr lvl="6" marL="3024000" indent="-216000">
+              <a:spcBef>
+                <a:spcPts val="283"/>
+              </a:spcBef>
+              <a:buClr>
+                <a:srgbClr val="000000"/>
+              </a:buClr>
+              <a:buSzPct val="45000"/>
+              <a:buFont typeface="Wingdings" charset="2"/>
+              <a:buChar char=""/>
+            </a:pPr>
+            <a:r>
+              <a:rPr b="0" lang="en-US" sz="1800" spc="-1" strike="noStrike">
+                <a:solidFill>
+                  <a:srgbClr val="000000"/>
+                </a:solidFill>
+                <a:latin typeface="Arial"/>
+              </a:rPr>
+              <a:t>Seventh Outline Level</a:t>
+            </a:r>
+            <a:endParaRPr b="0" lang="en-US" sz="1800" spc="-1" strike="noStrike">
+              <a:solidFill>
+                <a:srgbClr val="000000"/>
+              </a:solidFill>
+              <a:latin typeface="Arial"/>
+            </a:endParaRPr>
+          </a:p>
+        </p:txBody>
+      </p:sp>
+      <p:sp>
+        <p:nvSpPr>
+          <p:cNvPr id="2" name="PlaceHolder 3"/>
+          <p:cNvSpPr>
+            <a:spLocks noGrp="1"/>
+          </p:cNvSpPr>
+          <p:nvPr>
             <p:ph type="ftr" idx="1"/>
           </p:nvPr>
         </p:nvSpPr>
         <p:spPr>
           <a:xfrm>
             <a:off x="4038480" y="6356520"/>
-            <a:ext cx="4114080" cy="364320"/>
+            <a:ext cx="4113720" cy="363960"/>
           </a:xfrm>
           <a:prstGeom prst="rect">
             <a:avLst/>
@@ -5166,7 +5391,7 @@
                 </a:solidFill>
                 <a:latin typeface="Times New Roman"/>
               </a:rPr>
-              <a:t> </a:t>
+              <a:t>&lt;footer&gt;</a:t>
             </a:r>
             <a:endParaRPr b="0" lang="en-US" sz="1400" spc="-1" strike="noStrike">
               <a:solidFill>
@@ -5179,7 +5404,7 @@
       </p:sp>
       <p:sp>
         <p:nvSpPr>
-          <p:cNvPr id="2" name="PlaceHolder 3"/>
+          <p:cNvPr id="3" name="PlaceHolder 4"/>
           <p:cNvSpPr>
             <a:spLocks noGrp="1"/>
           </p:cNvSpPr>
@@ -5190,7 +5415,7 @@
         <p:spPr>
           <a:xfrm>
             <a:off x="8610480" y="6356520"/>
-            <a:ext cx="2742480" cy="364320"/>
+            <a:ext cx="2742120" cy="363960"/>
           </a:xfrm>
           <a:prstGeom prst="rect">
             <a:avLst/>
@@ -5231,14 +5456,14 @@
                 <a:tab algn="l" pos="0"/>
               </a:tabLst>
             </a:pPr>
-            <a:fld id="{28F16173-0AC0-4814-8B69-528E8CE4E4C0}" type="slidenum">
+            <a:fld id="{41ED8EA6-A494-417D-9E5E-FA1A91518DDA}" type="slidenum">
               <a:rPr b="0" lang="en-US" sz="1200" spc="-1" strike="noStrike">
                 <a:solidFill>
                   <a:srgbClr val="8b8b8b"/>
                 </a:solidFill>
                 <a:latin typeface="Calibri"/>
               </a:rPr>
-              <a:t>1</a:t>
+              <a:t>&lt;number&gt;</a:t>
             </a:fld>
             <a:endParaRPr b="0" lang="en-US" sz="1200" spc="-1" strike="noStrike">
               <a:solidFill>
@@ -5251,7 +5476,7 @@
       </p:sp>
       <p:sp>
         <p:nvSpPr>
-          <p:cNvPr id="3" name="PlaceHolder 4"/>
+          <p:cNvPr id="4" name="PlaceHolder 5"/>
           <p:cNvSpPr>
             <a:spLocks noGrp="1"/>
           </p:cNvSpPr>
@@ -5262,7 +5487,7 @@
         <p:spPr>
           <a:xfrm>
             <a:off x="838080" y="6356520"/>
-            <a:ext cx="2742480" cy="364320"/>
+            <a:ext cx="2742120" cy="363960"/>
           </a:xfrm>
           <a:prstGeom prst="rect">
             <a:avLst/>
@@ -5298,238 +5523,13 @@
                 </a:solidFill>
                 <a:latin typeface="Times New Roman"/>
               </a:rPr>
-              <a:t> </a:t>
+              <a:t>&lt;date/time&gt;</a:t>
             </a:r>
             <a:endParaRPr b="0" lang="en-US" sz="1400" spc="-1" strike="noStrike">
               <a:solidFill>
                 <a:srgbClr val="000000"/>
               </a:solidFill>
               <a:latin typeface="Times New Roman"/>
-            </a:endParaRPr>
-          </a:p>
-        </p:txBody>
-      </p:sp>
-      <p:sp>
-        <p:nvSpPr>
-          <p:cNvPr id="4" name="PlaceHolder 5"/>
-          <p:cNvSpPr>
-            <a:spLocks noGrp="1"/>
-          </p:cNvSpPr>
-          <p:nvPr>
-            <p:ph type="body"/>
-          </p:nvPr>
-        </p:nvSpPr>
-        <p:spPr>
-          <a:xfrm>
-            <a:off x="609480" y="1604520"/>
-            <a:ext cx="10972440" cy="3977280"/>
-          </a:xfrm>
-          <a:prstGeom prst="rect">
-            <a:avLst/>
-          </a:prstGeom>
-          <a:noFill/>
-          <a:ln w="0">
-            <a:noFill/>
-          </a:ln>
-        </p:spPr>
-        <p:txBody>
-          <a:bodyPr lIns="0" rIns="0" tIns="0" bIns="0" anchor="t">
-            <a:normAutofit/>
-          </a:bodyPr>
-          <a:p>
-            <a:pPr marL="432000" indent="-324000">
-              <a:spcBef>
-                <a:spcPts val="1417"/>
-              </a:spcBef>
-              <a:buClr>
-                <a:srgbClr val="000000"/>
-              </a:buClr>
-              <a:buSzPct val="45000"/>
-              <a:buFont typeface="Wingdings" charset="2"/>
-              <a:buChar char=""/>
-            </a:pPr>
-            <a:r>
-              <a:rPr b="0" lang="en-US" sz="3200" spc="-1" strike="noStrike">
-                <a:solidFill>
-                  <a:srgbClr val="000000"/>
-                </a:solidFill>
-                <a:latin typeface="Arial"/>
-              </a:rPr>
-              <a:t>Click to edit the outline text format</a:t>
-            </a:r>
-            <a:endParaRPr b="0" lang="en-US" sz="3200" spc="-1" strike="noStrike">
-              <a:solidFill>
-                <a:srgbClr val="000000"/>
-              </a:solidFill>
-              <a:latin typeface="Arial"/>
-            </a:endParaRPr>
-          </a:p>
-          <a:p>
-            <a:pPr lvl="1" marL="864000" indent="-324000">
-              <a:spcBef>
-                <a:spcPts val="1134"/>
-              </a:spcBef>
-              <a:buClr>
-                <a:srgbClr val="000000"/>
-              </a:buClr>
-              <a:buSzPct val="75000"/>
-              <a:buFont typeface="Symbol" charset="2"/>
-              <a:buChar char=""/>
-            </a:pPr>
-            <a:r>
-              <a:rPr b="0" lang="en-US" sz="2800" spc="-1" strike="noStrike">
-                <a:solidFill>
-                  <a:srgbClr val="000000"/>
-                </a:solidFill>
-                <a:latin typeface="Arial"/>
-              </a:rPr>
-              <a:t>Second Outline Level</a:t>
-            </a:r>
-            <a:endParaRPr b="0" lang="en-US" sz="2800" spc="-1" strike="noStrike">
-              <a:solidFill>
-                <a:srgbClr val="000000"/>
-              </a:solidFill>
-              <a:latin typeface="Arial"/>
-            </a:endParaRPr>
-          </a:p>
-          <a:p>
-            <a:pPr lvl="2" marL="1296000" indent="-288000">
-              <a:spcBef>
-                <a:spcPts val="850"/>
-              </a:spcBef>
-              <a:buClr>
-                <a:srgbClr val="000000"/>
-              </a:buClr>
-              <a:buSzPct val="45000"/>
-              <a:buFont typeface="Wingdings" charset="2"/>
-              <a:buChar char=""/>
-            </a:pPr>
-            <a:r>
-              <a:rPr b="0" lang="en-US" sz="2400" spc="-1" strike="noStrike">
-                <a:solidFill>
-                  <a:srgbClr val="000000"/>
-                </a:solidFill>
-                <a:latin typeface="Arial"/>
-              </a:rPr>
-              <a:t>Third Outline Level</a:t>
-            </a:r>
-            <a:endParaRPr b="0" lang="en-US" sz="2400" spc="-1" strike="noStrike">
-              <a:solidFill>
-                <a:srgbClr val="000000"/>
-              </a:solidFill>
-              <a:latin typeface="Arial"/>
-            </a:endParaRPr>
-          </a:p>
-          <a:p>
-            <a:pPr lvl="3" marL="1728000" indent="-216000">
-              <a:spcBef>
-                <a:spcPts val="567"/>
-              </a:spcBef>
-              <a:buClr>
-                <a:srgbClr val="000000"/>
-              </a:buClr>
-              <a:buSzPct val="75000"/>
-              <a:buFont typeface="Symbol" charset="2"/>
-              <a:buChar char=""/>
-            </a:pPr>
-            <a:r>
-              <a:rPr b="0" lang="en-US" sz="2000" spc="-1" strike="noStrike">
-                <a:solidFill>
-                  <a:srgbClr val="000000"/>
-                </a:solidFill>
-                <a:latin typeface="Arial"/>
-              </a:rPr>
-              <a:t>Fourth Outline Level</a:t>
-            </a:r>
-            <a:endParaRPr b="0" lang="en-US" sz="2000" spc="-1" strike="noStrike">
-              <a:solidFill>
-                <a:srgbClr val="000000"/>
-              </a:solidFill>
-              <a:latin typeface="Arial"/>
-            </a:endParaRPr>
-          </a:p>
-          <a:p>
-            <a:pPr lvl="4" marL="2160000" indent="-216000">
-              <a:spcBef>
-                <a:spcPts val="283"/>
-              </a:spcBef>
-              <a:buClr>
-                <a:srgbClr val="000000"/>
-              </a:buClr>
-              <a:buSzPct val="45000"/>
-              <a:buFont typeface="Wingdings" charset="2"/>
-              <a:buChar char=""/>
-            </a:pPr>
-            <a:r>
-              <a:rPr b="0" lang="en-US" sz="2000" spc="-1" strike="noStrike">
-                <a:solidFill>
-                  <a:srgbClr val="000000"/>
-                </a:solidFill>
-                <a:latin typeface="Arial"/>
-              </a:rPr>
-              <a:t>Fifth Outline Level</a:t>
-            </a:r>
-            <a:endParaRPr b="0" lang="en-US" sz="2000" spc="-1" strike="noStrike">
-              <a:solidFill>
-                <a:srgbClr val="000000"/>
-              </a:solidFill>
-              <a:latin typeface="Arial"/>
-            </a:endParaRPr>
-          </a:p>
-          <a:p>
-            <a:pPr lvl="5" marL="2592000" indent="-216000">
-              <a:spcBef>
-                <a:spcPts val="283"/>
-              </a:spcBef>
-              <a:buClr>
-                <a:srgbClr val="000000"/>
-              </a:buClr>
-              <a:buSzPct val="45000"/>
-              <a:buFont typeface="Wingdings" charset="2"/>
-              <a:buChar char=""/>
-            </a:pPr>
-            <a:r>
-              <a:rPr b="0" lang="en-US" sz="2000" spc="-1" strike="noStrike">
-                <a:solidFill>
-                  <a:srgbClr val="000000"/>
-                </a:solidFill>
-                <a:latin typeface="Arial"/>
-              </a:rPr>
-              <a:t>Sixth Outline Level</a:t>
-            </a:r>
-            <a:endParaRPr b="0" lang="en-US" sz="2000" spc="-1" strike="noStrike">
-              <a:solidFill>
-                <a:srgbClr val="000000"/>
-              </a:solidFill>
-              <a:latin typeface="Arial"/>
-            </a:endParaRPr>
-          </a:p>
-          <a:p>
-            <a:pPr lvl="6" marL="3024000" indent="-216000">
-              <a:spcBef>
-                <a:spcPts val="283"/>
-              </a:spcBef>
-              <a:buClr>
-                <a:srgbClr val="000000"/>
-              </a:buClr>
-              <a:buSzPct val="45000"/>
-              <a:buFont typeface="Wingdings" charset="2"/>
-              <a:buChar char=""/>
-            </a:pPr>
-            <a:r>
-              <a:rPr b="0" lang="en-US" sz="2000" spc="-1" strike="noStrike">
-                <a:solidFill>
-                  <a:srgbClr val="000000"/>
-                </a:solidFill>
-                <a:latin typeface="Arial"/>
-              </a:rPr>
-              <a:t>Seventh Outline Level</a:t>
-            </a:r>
-            <a:endParaRPr b="0" lang="en-US" sz="2000" spc="-1" strike="noStrike">
-              <a:solidFill>
-                <a:srgbClr val="000000"/>
-              </a:solidFill>
-              <a:latin typeface="Arial"/>
             </a:endParaRPr>
           </a:p>
         </p:txBody>
@@ -5591,7 +5591,7 @@
         <p:spPr>
           <a:xfrm>
             <a:off x="4038480" y="6356520"/>
-            <a:ext cx="4114080" cy="364320"/>
+            <a:ext cx="4113720" cy="363960"/>
           </a:xfrm>
           <a:prstGeom prst="rect">
             <a:avLst/>
@@ -5663,7 +5663,7 @@
         <p:spPr>
           <a:xfrm>
             <a:off x="8610480" y="6356520"/>
-            <a:ext cx="2742480" cy="364320"/>
+            <a:ext cx="2742120" cy="363960"/>
           </a:xfrm>
           <a:prstGeom prst="rect">
             <a:avLst/>
@@ -5704,7 +5704,7 @@
                 <a:tab algn="l" pos="0"/>
               </a:tabLst>
             </a:pPr>
-            <a:fld id="{DBE8C7D0-1E27-40DB-BBD0-14EC65A858B0}" type="slidenum">
+            <a:fld id="{B86050BC-6EE3-426B-84BB-87FA6F0ACC0F}" type="slidenum">
               <a:rPr b="0" lang="en-US" sz="1200" spc="-1" strike="noStrike">
                 <a:solidFill>
                   <a:srgbClr val="8b8b8b"/>
@@ -5735,7 +5735,7 @@
         <p:spPr>
           <a:xfrm>
             <a:off x="838080" y="6356520"/>
-            <a:ext cx="2742480" cy="364320"/>
+            <a:ext cx="2742120" cy="363960"/>
           </a:xfrm>
           <a:prstGeom prst="rect">
             <a:avLst/>
@@ -6106,7 +6106,7 @@
         <p:spPr>
           <a:xfrm>
             <a:off x="1523880" y="1122480"/>
-            <a:ext cx="9143280" cy="2386800"/>
+            <a:ext cx="9142920" cy="2386440"/>
           </a:xfrm>
           <a:prstGeom prst="rect">
             <a:avLst/>
@@ -6155,10 +6155,11 @@
               <a:rPr sz="4800"/>
             </a:br>
             <a:r>
-              <a:rPr b="0" lang="en-US" sz="4800" spc="-1" strike="noStrike">
+              <a:rPr b="0" lang="en-US" sz="4800" spc="-1" strike="noStrike" u="sng">
                 <a:solidFill>
-                  <a:srgbClr val="000000"/>
+                  <a:srgbClr val="0563c1"/>
                 </a:solidFill>
+                <a:uFillTx/>
                 <a:latin typeface="Calibri Light"/>
                 <a:hlinkClick r:id="rId1"/>
               </a:rPr>
@@ -6186,7 +6187,7 @@
         <p:spPr>
           <a:xfrm>
             <a:off x="1523880" y="3602160"/>
-            <a:ext cx="9143280" cy="1654920"/>
+            <a:ext cx="9142920" cy="1654560"/>
           </a:xfrm>
           <a:prstGeom prst="rect">
             <a:avLst/>
@@ -6249,7 +6250,7 @@
                 </a:solidFill>
                 <a:latin typeface="Calibri"/>
               </a:rPr>
-              <a:t>20 SEP 2026</a:t>
+              <a:t>25 SEP 2026</a:t>
             </a:r>
             <a:endParaRPr b="0" lang="en-US" sz="2400" spc="-1" strike="noStrike">
               <a:solidFill>
@@ -6323,7 +6324,7 @@
         <p:spPr>
           <a:xfrm>
             <a:off x="838080" y="365040"/>
-            <a:ext cx="10514880" cy="1324800"/>
+            <a:ext cx="10514520" cy="1324440"/>
           </a:xfrm>
           <a:prstGeom prst="rect">
             <a:avLst/>
@@ -6378,7 +6379,7 @@
         <p:spPr>
           <a:xfrm>
             <a:off x="838080" y="1825560"/>
-            <a:ext cx="10514880" cy="4350600"/>
+            <a:ext cx="10514520" cy="4350240"/>
           </a:xfrm>
           <a:prstGeom prst="rect">
             <a:avLst/>
@@ -6401,6 +6402,9 @@
                 <a:spcPts val="1001"/>
               </a:spcBef>
               <a:buNone/>
+              <a:tabLst>
+                <a:tab algn="l" pos="0"/>
+              </a:tabLst>
             </a:pPr>
             <a:r>
               <a:rPr b="0" lang="en-US" sz="1800" spc="-1" strike="noStrike">
@@ -6410,7 +6414,7 @@
                 <a:latin typeface="Times New Roman"/>
                 <a:ea typeface="Times New Roman"/>
               </a:rPr>
-              <a:t>Understanding how and when peak electricity demand occurs across different Moroccan regions is important for infrastructure planning, but existing analyses rarely compare high-resolution, city-level consumption data side by side.</a:t>
+              <a:t>This project analyzes high-resolution smart meter data from four Moroccan cities (Laâyoune, Boujdour, Foum Eloued, and Marrakech) to classify electricity load readings as peak-demand or normal-demand periods. Because Laâyoune, Boujdour, and Foum Eloued are metered in Amperes while Marrakech is metered in Kilowatts, load values will be converted to a common unit using a standard voltage assumption before peak-demand magnitude is compared across cities. The goal is to identify when, how often, and how intensely peak-demand periods occur in each region, to inform infrastructure and demand-response planning.</a:t>
             </a:r>
             <a:endParaRPr b="0" lang="en-US" sz="1800" spc="-1" strike="noStrike">
               <a:solidFill>
@@ -6464,7 +6468,7 @@
         <p:spPr>
           <a:xfrm>
             <a:off x="838080" y="365040"/>
-            <a:ext cx="10514880" cy="1324800"/>
+            <a:ext cx="10514520" cy="1324440"/>
           </a:xfrm>
           <a:prstGeom prst="rect">
             <a:avLst/>
@@ -6519,7 +6523,7 @@
         <p:spPr>
           <a:xfrm>
             <a:off x="838080" y="1825560"/>
-            <a:ext cx="10514880" cy="4350600"/>
+            <a:ext cx="10514520" cy="4350240"/>
           </a:xfrm>
           <a:prstGeom prst="rect">
             <a:avLst/>
@@ -6542,6 +6546,9 @@
                 <a:spcPts val="1001"/>
               </a:spcBef>
               <a:buNone/>
+              <a:tabLst>
+                <a:tab algn="l" pos="0"/>
+              </a:tabLst>
             </a:pPr>
             <a:r>
               <a:rPr b="0" lang="en-US" sz="1800" spc="-1" strike="noStrike">
@@ -6551,7 +6558,7 @@
                 <a:latin typeface="Times New Roman"/>
                 <a:ea typeface="Times New Roman"/>
               </a:rPr>
-              <a:t>Peak load timing and intensity will vary significantly between cities/zones (e.g., Marrakech vs. the Laâyoune-area cities), and this variation will correlate with time-of-year, suggesting different infrastructure or policy responses may be needed by region.</a:t>
+              <a:t>After converting all readings to a common unit (kW) and defining peak demand as load exceeding the 90th percentile of each city's own distribution, the timing, frequency, and relative intensity of peak-demand periods will differ significantly across cities/zones, and these differences will correlate with season and zone type (domestic vs. industrial) rather than occurring uniformly across regions.</a:t>
             </a:r>
             <a:endParaRPr b="0" lang="en-US" sz="1800" spc="-1" strike="noStrike">
               <a:solidFill>
@@ -6605,7 +6612,7 @@
         <p:spPr>
           <a:xfrm>
             <a:off x="838080" y="365040"/>
-            <a:ext cx="10514880" cy="1324800"/>
+            <a:ext cx="10514520" cy="1324440"/>
           </a:xfrm>
           <a:prstGeom prst="rect">
             <a:avLst/>
@@ -6660,7 +6667,7 @@
         <p:spPr>
           <a:xfrm>
             <a:off x="838080" y="1825560"/>
-            <a:ext cx="10514880" cy="4350600"/>
+            <a:ext cx="10514520" cy="4350240"/>
           </a:xfrm>
           <a:prstGeom prst="rect">
             <a:avLst/>
@@ -6683,6 +6690,9 @@
                 <a:spcPts val="1001"/>
               </a:spcBef>
               <a:buNone/>
+              <a:tabLst>
+                <a:tab algn="l" pos="0"/>
+              </a:tabLst>
             </a:pPr>
             <a:r>
               <a:rPr b="0" lang="en-US" sz="1800" spc="-1" strike="noStrike">
@@ -6710,6 +6720,9 @@
                 <a:spcPts val="1001"/>
               </a:spcBef>
               <a:buNone/>
+              <a:tabLst>
+                <a:tab algn="l" pos="0"/>
+              </a:tabLst>
             </a:pPr>
             <a:endParaRPr b="0" lang="en-US" sz="1800" spc="-1" strike="noStrike">
               <a:solidFill>
@@ -6727,6 +6740,9 @@
                 <a:spcPts val="1001"/>
               </a:spcBef>
               <a:buNone/>
+              <a:tabLst>
+                <a:tab algn="l" pos="0"/>
+              </a:tabLst>
             </a:pPr>
             <a:endParaRPr b="0" lang="en-US" sz="1800" spc="-1" strike="noStrike">
               <a:solidFill>
@@ -6744,6 +6760,9 @@
                 <a:spcPts val="1001"/>
               </a:spcBef>
               <a:buNone/>
+              <a:tabLst>
+                <a:tab algn="l" pos="0"/>
+              </a:tabLst>
             </a:pPr>
             <a:r>
               <a:rPr b="0" lang="en-US" sz="1800" spc="-1" strike="noStrike">
@@ -6763,7 +6782,7 @@
             </a:endParaRPr>
           </a:p>
           <a:p>
-            <a:pPr indent="0">
+            <a:pPr marL="228600" indent="0">
               <a:lnSpc>
                 <a:spcPct val="90000"/>
               </a:lnSpc>
@@ -6771,6 +6790,9 @@
                 <a:spcPts val="1001"/>
               </a:spcBef>
               <a:buNone/>
+              <a:tabLst>
+                <a:tab algn="l" pos="0"/>
+              </a:tabLst>
             </a:pPr>
             <a:r>
               <a:rPr b="0" lang="en-US" sz="1800" spc="-1" strike="noStrike">
@@ -6790,7 +6812,7 @@
             </a:endParaRPr>
           </a:p>
           <a:p>
-            <a:pPr indent="0">
+            <a:pPr marL="228600" indent="0">
               <a:lnSpc>
                 <a:spcPct val="90000"/>
               </a:lnSpc>
@@ -6853,8 +6875,8 @@
         </p:nvSpPr>
         <p:spPr>
           <a:xfrm>
-            <a:off x="838080" y="365040"/>
-            <a:ext cx="10514880" cy="1324800"/>
+            <a:off x="1080" y="0"/>
+            <a:ext cx="7999920" cy="914400"/>
           </a:xfrm>
           <a:prstGeom prst="rect">
             <a:avLst/>
@@ -6908,8 +6930,8 @@
         </p:nvSpPr>
         <p:spPr>
           <a:xfrm>
-            <a:off x="838080" y="1825560"/>
-            <a:ext cx="10514880" cy="4350600"/>
+            <a:off x="0" y="651600"/>
+            <a:ext cx="12115800" cy="6206400"/>
           </a:xfrm>
           <a:prstGeom prst="rect">
             <a:avLst/>
@@ -6924,18 +6946,14 @@
             <a:noAutofit/>
           </a:bodyPr>
           <a:p>
-            <a:pPr marL="228600" indent="-228600">
+            <a:pPr marL="228600" indent="0">
               <a:lnSpc>
                 <a:spcPct val="90000"/>
               </a:lnSpc>
               <a:spcBef>
                 <a:spcPts val="1001"/>
               </a:spcBef>
-              <a:buClr>
-                <a:srgbClr val="000000"/>
-              </a:buClr>
-              <a:buFont typeface="Arial"/>
-              <a:buChar char="•"/>
+              <a:buNone/>
             </a:pPr>
             <a:r>
               <a:rPr b="0" lang="en-US" sz="1800" spc="-1" strike="noStrike">
@@ -6955,18 +6973,14 @@
             </a:endParaRPr>
           </a:p>
           <a:p>
-            <a:pPr marL="228600" indent="-228600">
+            <a:pPr marL="228600" indent="0">
               <a:lnSpc>
                 <a:spcPct val="90000"/>
               </a:lnSpc>
               <a:spcBef>
                 <a:spcPts val="1001"/>
               </a:spcBef>
-              <a:buClr>
-                <a:srgbClr val="000000"/>
-              </a:buClr>
-              <a:buFont typeface="Arial"/>
-              <a:buChar char="•"/>
+              <a:buNone/>
             </a:pPr>
             <a:r>
               <a:rPr b="0" lang="en-US" sz="1800" spc="-1" strike="noStrike">
@@ -6986,18 +7000,14 @@
             </a:endParaRPr>
           </a:p>
           <a:p>
-            <a:pPr marL="228600" indent="-228600">
+            <a:pPr marL="228600" indent="0">
               <a:lnSpc>
                 <a:spcPct val="90000"/>
               </a:lnSpc>
               <a:spcBef>
                 <a:spcPts val="1001"/>
               </a:spcBef>
-              <a:buClr>
-                <a:srgbClr val="000000"/>
-              </a:buClr>
-              <a:buFont typeface="Symbol" charset="2"/>
-              <a:buChar char=""/>
+              <a:buNone/>
             </a:pPr>
             <a:r>
               <a:rPr b="0" lang="en-US" sz="1800" spc="-1" strike="noStrike">
@@ -7007,8 +7017,25 @@
                 <a:latin typeface="Times New Roman"/>
                 <a:ea typeface="Times New Roman"/>
               </a:rPr>
-              <a:t>Identified a units mismatch: </a:t>
-            </a:r>
+              <a:t>Identified a units mismatch: Laâyoune, Boujdour, and Foum Eloued are recorded in Amperes, while Marrakech is recorded in Kilowatts. This will be a known limitation for a direct cross-city magnitude comparison unless we do a unit conversion per row.</a:t>
+            </a:r>
+            <a:endParaRPr b="0" lang="en-US" sz="1800" spc="-1" strike="noStrike">
+              <a:solidFill>
+                <a:srgbClr val="000000"/>
+              </a:solidFill>
+              <a:latin typeface="Arial"/>
+            </a:endParaRPr>
+          </a:p>
+          <a:p>
+            <a:pPr indent="0">
+              <a:lnSpc>
+                <a:spcPct val="90000"/>
+              </a:lnSpc>
+              <a:spcBef>
+                <a:spcPts val="1001"/>
+              </a:spcBef>
+              <a:buNone/>
+            </a:pPr>
             <a:r>
               <a:rPr b="0" lang="en-US" sz="1800" spc="-1" strike="noStrike">
                 <a:solidFill>
@@ -7017,7 +7044,7 @@
                 <a:latin typeface="Times New Roman"/>
                 <a:ea typeface="Times New Roman"/>
               </a:rPr>
-              <a:t>Laâyoune, Boujdour, and Foum Eloued are recorded in Amperes, while Marrakech is recorded in Kilowatts. This will be a known limitation for a direct cross-city magnitude comparison unless we do a unit conversion per row.</a:t>
+              <a:t>Since Laâyoune, Boujdour, and Foum Eloued are metered in Amperes, converting to kW requires a voltage assumption (the    dataset doesn't include voltage directly, only the meter read, ie total consumption):</a:t>
             </a:r>
             <a:endParaRPr b="0" lang="en-US" sz="1800" spc="-1" strike="noStrike">
               <a:solidFill>
@@ -7027,18 +7054,129 @@
             </a:endParaRPr>
           </a:p>
           <a:p>
-            <a:pPr marL="228600" indent="-228600">
+            <a:pPr indent="0">
               <a:lnSpc>
                 <a:spcPct val="90000"/>
               </a:lnSpc>
               <a:spcBef>
                 <a:spcPts val="1001"/>
               </a:spcBef>
-              <a:buClr>
-                <a:srgbClr val="000000"/>
-              </a:buClr>
-              <a:buFont typeface="Symbol" charset="2"/>
-              <a:buChar char=""/>
+              <a:buNone/>
+            </a:pPr>
+            <a:endParaRPr b="0" lang="en-US" sz="1800" spc="-1" strike="noStrike">
+              <a:solidFill>
+                <a:srgbClr val="000000"/>
+              </a:solidFill>
+              <a:latin typeface="Arial"/>
+            </a:endParaRPr>
+          </a:p>
+          <a:p>
+            <a:pPr indent="0">
+              <a:lnSpc>
+                <a:spcPct val="90000"/>
+              </a:lnSpc>
+              <a:spcBef>
+                <a:spcPts val="1001"/>
+              </a:spcBef>
+              <a:buNone/>
+            </a:pPr>
+            <a:r>
+              <a:rPr b="0" lang="en-US" sz="1800" spc="-1" strike="noStrike">
+                <a:solidFill>
+                  <a:srgbClr val="000000"/>
+                </a:solidFill>
+                <a:latin typeface="Times New Roman"/>
+                <a:ea typeface="Times New Roman"/>
+              </a:rPr>
+              <a:t>Single-phase: kW = (V × I × PF) / 1000</a:t>
+            </a:r>
+            <a:endParaRPr b="0" lang="en-US" sz="1800" spc="-1" strike="noStrike">
+              <a:solidFill>
+                <a:srgbClr val="000000"/>
+              </a:solidFill>
+              <a:latin typeface="Arial"/>
+            </a:endParaRPr>
+          </a:p>
+          <a:p>
+            <a:pPr indent="0">
+              <a:lnSpc>
+                <a:spcPct val="90000"/>
+              </a:lnSpc>
+              <a:spcBef>
+                <a:spcPts val="1001"/>
+              </a:spcBef>
+              <a:buNone/>
+            </a:pPr>
+            <a:r>
+              <a:rPr b="0" lang="en-US" sz="1800" spc="-1" strike="noStrike">
+                <a:solidFill>
+                  <a:srgbClr val="000000"/>
+                </a:solidFill>
+                <a:latin typeface="Times New Roman"/>
+                <a:ea typeface="Times New Roman"/>
+              </a:rPr>
+              <a:t>Three-phase: kW = (√3 × V × I × PF) / 1000</a:t>
+            </a:r>
+            <a:endParaRPr b="0" lang="en-US" sz="1800" spc="-1" strike="noStrike">
+              <a:solidFill>
+                <a:srgbClr val="000000"/>
+              </a:solidFill>
+              <a:latin typeface="Arial"/>
+            </a:endParaRPr>
+          </a:p>
+          <a:p>
+            <a:pPr indent="0">
+              <a:lnSpc>
+                <a:spcPct val="90000"/>
+              </a:lnSpc>
+              <a:spcBef>
+                <a:spcPts val="1001"/>
+              </a:spcBef>
+              <a:buNone/>
+            </a:pPr>
+            <a:endParaRPr b="0" lang="en-US" sz="1800" spc="-1" strike="noStrike">
+              <a:solidFill>
+                <a:srgbClr val="000000"/>
+              </a:solidFill>
+              <a:latin typeface="Arial"/>
+            </a:endParaRPr>
+          </a:p>
+          <a:p>
+            <a:pPr indent="0">
+              <a:lnSpc>
+                <a:spcPct val="90000"/>
+              </a:lnSpc>
+              <a:spcBef>
+                <a:spcPts val="1001"/>
+              </a:spcBef>
+              <a:buNone/>
+            </a:pPr>
+            <a:r>
+              <a:rPr b="0" lang="en-US" sz="1800" spc="-1" strike="noStrike">
+                <a:solidFill>
+                  <a:srgbClr val="000000"/>
+                </a:solidFill>
+                <a:latin typeface="Times New Roman"/>
+                <a:ea typeface="Times New Roman"/>
+              </a:rPr>
+              <a:t>Morocco's standard domestic supply is 220V AC single-phase; industrial connections are commonly 380V AC three-phase. Since the dataset separates domestic and industrial profiles, we will apply the matching formula per zone type, and we will state our assumed voltage per zone explicitly as a limitation in our report.</a:t>
+            </a:r>
+            <a:endParaRPr b="0" lang="en-US" sz="1800" spc="-1" strike="noStrike">
+              <a:solidFill>
+                <a:srgbClr val="000000"/>
+              </a:solidFill>
+              <a:latin typeface="Arial"/>
+            </a:endParaRPr>
+          </a:p>
+          <a:p>
+            <a:pPr indent="0">
+              <a:lnSpc>
+                <a:spcPct val="90000"/>
+              </a:lnSpc>
+              <a:spcBef>
+                <a:spcPts val="1001"/>
+              </a:spcBef>
+              <a:buNone/>
             </a:pPr>
             <a:r>
               <a:rPr b="0" lang="en-US" sz="1800" spc="-1" strike="noStrike">
@@ -7122,7 +7260,7 @@
         <p:spPr>
           <a:xfrm>
             <a:off x="838080" y="365040"/>
-            <a:ext cx="10514880" cy="1324800"/>
+            <a:ext cx="10514520" cy="1324440"/>
           </a:xfrm>
           <a:prstGeom prst="rect">
             <a:avLst/>
@@ -7177,7 +7315,7 @@
         <p:spPr>
           <a:xfrm>
             <a:off x="838080" y="1825560"/>
-            <a:ext cx="10514880" cy="4350600"/>
+            <a:ext cx="10514520" cy="4350240"/>
           </a:xfrm>
           <a:prstGeom prst="rect">
             <a:avLst/>
@@ -7192,18 +7330,14 @@
             <a:noAutofit/>
           </a:bodyPr>
           <a:p>
-            <a:pPr marL="228600" indent="-228600">
+            <a:pPr indent="0">
               <a:lnSpc>
                 <a:spcPct val="90000"/>
               </a:lnSpc>
               <a:spcBef>
                 <a:spcPts val="1001"/>
               </a:spcBef>
-              <a:buClr>
-                <a:srgbClr val="000000"/>
-              </a:buClr>
-              <a:buFont typeface="Arial"/>
-              <a:buChar char="•"/>
+              <a:buNone/>
             </a:pPr>
             <a:r>
               <a:rPr b="0" lang="en-US" sz="1800" spc="-1" strike="noStrike">
@@ -7213,7 +7347,51 @@
                 <a:latin typeface="Times New Roman"/>
                 <a:ea typeface="Times New Roman"/>
               </a:rPr>
-              <a:t>&lt;select analytical technique, build models&gt;</a:t>
+              <a:t>Applied a 90th-percentile-per-zone threshold to convert continuous kW readings into binary Peak/Normal labels — a data-driven definition that avoids assuming a fixed kW cutoff across cities with very different scales (e.g., Laâyoune's 90th percentile is 145 kW vs. Marrakech's 1,635 kW)</a:t>
+            </a:r>
+            <a:endParaRPr b="0" lang="en-US" sz="1800" spc="-1" strike="noStrike">
+              <a:solidFill>
+                <a:srgbClr val="000000"/>
+              </a:solidFill>
+              <a:latin typeface="Arial"/>
+            </a:endParaRPr>
+          </a:p>
+          <a:p>
+            <a:pPr indent="0">
+              <a:lnSpc>
+                <a:spcPct val="90000"/>
+              </a:lnSpc>
+              <a:spcBef>
+                <a:spcPts val="1001"/>
+              </a:spcBef>
+              <a:buNone/>
+            </a:pPr>
+            <a:endParaRPr b="0" lang="en-US" sz="1800" spc="-1" strike="noStrike">
+              <a:solidFill>
+                <a:srgbClr val="000000"/>
+              </a:solidFill>
+              <a:latin typeface="Arial"/>
+            </a:endParaRPr>
+          </a:p>
+          <a:p>
+            <a:pPr indent="0">
+              <a:lnSpc>
+                <a:spcPct val="90000"/>
+              </a:lnSpc>
+              <a:spcBef>
+                <a:spcPts val="1001"/>
+              </a:spcBef>
+              <a:buNone/>
+            </a:pPr>
+            <a:r>
+              <a:rPr b="0" lang="en-US" sz="1800" spc="-1" strike="noStrike">
+                <a:solidFill>
+                  <a:srgbClr val="000000"/>
+                </a:solidFill>
+                <a:latin typeface="Times New Roman"/>
+                <a:ea typeface="Times New Roman"/>
+              </a:rPr>
+              <a:t>Used comparative visual EDA such as boxplots (distribution shape per zone), an hour-of-day heatmap (when peaks occur), a seasonal peak-rate heatmap (whether peaks cluster by time of year), and a zone-to-zone correlation matrix (whether zones move together) as the primary analytical techniques for this phase.</a:t>
             </a:r>
             <a:endParaRPr b="0" lang="en-US" sz="1800" spc="-1" strike="noStrike">
               <a:solidFill>
@@ -7287,7 +7465,7 @@
         <p:spPr>
           <a:xfrm>
             <a:off x="838080" y="365040"/>
-            <a:ext cx="10514880" cy="1324800"/>
+            <a:ext cx="10514520" cy="1324440"/>
           </a:xfrm>
           <a:prstGeom prst="rect">
             <a:avLst/>
@@ -7342,7 +7520,7 @@
         <p:spPr>
           <a:xfrm>
             <a:off x="838080" y="1825560"/>
-            <a:ext cx="10514880" cy="4350600"/>
+            <a:ext cx="10514520" cy="4350240"/>
           </a:xfrm>
           <a:prstGeom prst="rect">
             <a:avLst/>
@@ -7357,18 +7535,14 @@
             <a:noAutofit/>
           </a:bodyPr>
           <a:p>
-            <a:pPr marL="228600" indent="-228600">
+            <a:pPr indent="0">
               <a:lnSpc>
                 <a:spcPct val="90000"/>
               </a:lnSpc>
               <a:spcBef>
                 <a:spcPts val="1001"/>
               </a:spcBef>
-              <a:buClr>
-                <a:srgbClr val="000000"/>
-              </a:buClr>
-              <a:buFont typeface="Arial"/>
-              <a:buChar char="•"/>
+              <a:buNone/>
             </a:pPr>
             <a:r>
               <a:rPr b="0" lang="en-US" sz="1800" spc="-1" strike="noStrike">
@@ -7378,7 +7552,7 @@
                 <a:latin typeface="Times New Roman"/>
                 <a:ea typeface="Times New Roman"/>
               </a:rPr>
-              <a:t>&lt;communicate results&gt;</a:t>
+              <a:t>Marrakech's totals are far higher than the other three cities, but this likely reflects the fact the population of the cities are so vastly different. (See Figure 1)</a:t>
             </a:r>
             <a:endParaRPr b="0" lang="en-US" sz="1800" spc="-1" strike="noStrike">
               <a:solidFill>
@@ -7396,11 +7570,184 @@
                 <a:spcPts val="1001"/>
               </a:spcBef>
               <a:buNone/>
+            </a:pPr>
+            <a:r>
+              <a:rPr b="0" lang="en-US" sz="1800" spc="-1" strike="noStrike">
+                <a:solidFill>
+                  <a:srgbClr val="000000"/>
+                </a:solidFill>
+                <a:latin typeface="Times New Roman"/>
+                <a:ea typeface="Times New Roman"/>
+              </a:rPr>
+              <a:t>Laâyoune and Boujdour peak in the evening (6–11 PM), consistent with residential usage; Marrakech peaks during business hours (8 AM–6 PM) with near-zero activity from 11 PM–6 AM, consistent with commercial/institutional load rather than residential</a:t>
+            </a:r>
+            <a:endParaRPr b="0" lang="en-US" sz="1800" spc="-1" strike="noStrike">
+              <a:solidFill>
+                <a:srgbClr val="000000"/>
+              </a:solidFill>
+              <a:latin typeface="Arial"/>
+            </a:endParaRPr>
+          </a:p>
+          <a:p>
+            <a:pPr indent="0">
+              <a:lnSpc>
+                <a:spcPct val="90000"/>
+              </a:lnSpc>
+              <a:spcBef>
+                <a:spcPts val="1001"/>
+              </a:spcBef>
+              <a:buNone/>
+            </a:pPr>
+            <a:r>
+              <a:rPr b="0" lang="en-US" sz="1800" spc="-1" strike="noStrike">
+                <a:solidFill>
+                  <a:srgbClr val="000000"/>
+                </a:solidFill>
+                <a:latin typeface="Times New Roman"/>
+                <a:ea typeface="Times New Roman"/>
+              </a:rPr>
+              <a:t>Foum Eloued's zone 6 spikes to a 45.9% peak rate in summer (vs. ~2% the rest of the year); Marrakech's zone 1 also peaks in summer (25.8%), both plausibly cooling-driven, while most Laâyoune and other Foum Eloued zones instead peak in fall</a:t>
+            </a:r>
+            <a:endParaRPr b="0" lang="en-US" sz="1800" spc="-1" strike="noStrike">
+              <a:solidFill>
+                <a:srgbClr val="000000"/>
+              </a:solidFill>
+              <a:latin typeface="Arial"/>
+            </a:endParaRPr>
+          </a:p>
+          <a:p>
+            <a:pPr indent="0">
+              <a:lnSpc>
+                <a:spcPct val="90000"/>
+              </a:lnSpc>
+              <a:spcBef>
+                <a:spcPts val="1001"/>
+              </a:spcBef>
+              <a:buNone/>
+            </a:pPr>
+            <a:r>
+              <a:rPr b="0" lang="en-US" sz="1800" spc="-1" strike="noStrike">
+                <a:solidFill>
+                  <a:srgbClr val="000000"/>
+                </a:solidFill>
+                <a:latin typeface="Times New Roman"/>
+                <a:ea typeface="Times New Roman"/>
+              </a:rPr>
+              <a:t>Laâyoune's zones 2–5 correlate at 0.71–0.88 with each other, and Foum Eloued's zones 1–4 similarly cluster (0.72–0.86), while cross-city correlations stay mostly under 0.3, this supports the idea that each region behaves independently</a:t>
+            </a:r>
+            <a:endParaRPr b="0" lang="en-US" sz="1800" spc="-1" strike="noStrike">
+              <a:solidFill>
+                <a:srgbClr val="000000"/>
+              </a:solidFill>
+              <a:latin typeface="Arial"/>
+            </a:endParaRPr>
+          </a:p>
+          <a:p>
+            <a:pPr indent="0">
+              <a:lnSpc>
+                <a:spcPct val="90000"/>
+              </a:lnSpc>
+              <a:spcBef>
+                <a:spcPts val="1001"/>
+              </a:spcBef>
+              <a:buNone/>
+            </a:pPr>
+            <a:r>
+              <a:rPr b="0" lang="en-US" sz="1800" spc="-1" strike="noStrike">
+                <a:solidFill>
+                  <a:srgbClr val="000000"/>
+                </a:solidFill>
+                <a:latin typeface="Times New Roman"/>
+                <a:ea typeface="Times New Roman"/>
+              </a:rPr>
+              <a:t>Peak timing and seasonal patterns clearly vary by region, supporting the hypothesis statement; direct intensity comparisons across cities remain confounded by unit/aggregation differences and are noted as a limitation for future work</a:t>
+            </a:r>
+            <a:endParaRPr b="0" lang="en-US" sz="1800" spc="-1" strike="noStrike">
+              <a:solidFill>
+                <a:srgbClr val="000000"/>
+              </a:solidFill>
+              <a:latin typeface="Arial"/>
+            </a:endParaRPr>
+          </a:p>
+          <a:p>
+            <a:pPr indent="0">
+              <a:lnSpc>
+                <a:spcPct val="90000"/>
+              </a:lnSpc>
+              <a:spcBef>
+                <a:spcPts val="1001"/>
+              </a:spcBef>
+              <a:buNone/>
               <a:tabLst>
                 <a:tab algn="l" pos="0"/>
               </a:tabLst>
             </a:pPr>
             <a:endParaRPr b="0" lang="en-US" sz="2800" spc="-1" strike="noStrike">
+              <a:solidFill>
+                <a:srgbClr val="000000"/>
+              </a:solidFill>
+              <a:latin typeface="Arial"/>
+            </a:endParaRPr>
+          </a:p>
+        </p:txBody>
+      </p:sp>
+      <p:pic>
+        <p:nvPicPr>
+          <p:cNvPr id="96" name="" descr=""/>
+          <p:cNvPicPr/>
+          <p:nvPr/>
+        </p:nvPicPr>
+        <p:blipFill>
+          <a:blip r:embed="rId1"/>
+          <a:stretch/>
+        </p:blipFill>
+        <p:spPr>
+          <a:xfrm>
+            <a:off x="7652160" y="0"/>
+            <a:ext cx="4539960" cy="1510920"/>
+          </a:xfrm>
+          <a:prstGeom prst="rect">
+            <a:avLst/>
+          </a:prstGeom>
+          <a:ln w="0">
+            <a:noFill/>
+          </a:ln>
+        </p:spPr>
+      </p:pic>
+      <p:sp>
+        <p:nvSpPr>
+          <p:cNvPr id="97" name=""/>
+          <p:cNvSpPr txBox="1"/>
+          <p:nvPr/>
+        </p:nvSpPr>
+        <p:spPr>
+          <a:xfrm>
+            <a:off x="6755040" y="18720"/>
+            <a:ext cx="1017360" cy="346320"/>
+          </a:xfrm>
+          <a:prstGeom prst="rect">
+            <a:avLst/>
+          </a:prstGeom>
+          <a:noFill/>
+          <a:ln w="0">
+            <a:noFill/>
+          </a:ln>
+        </p:spPr>
+        <p:txBody>
+          <a:bodyPr lIns="90000" rIns="90000" tIns="45000" bIns="45000" anchor="t">
+            <a:noAutofit/>
+          </a:bodyPr>
+          <a:p>
+            <a:r>
+              <a:rPr b="0" i="1" lang="en-US" sz="1800" spc="-1" strike="noStrike">
+                <a:solidFill>
+                  <a:srgbClr val="000000"/>
+                </a:solidFill>
+                <a:latin typeface="Arial"/>
+              </a:rPr>
+              <a:t>Figure 1</a:t>
+            </a:r>
+            <a:endParaRPr b="0" lang="en-US" sz="1800" spc="-1" strike="noStrike">
               <a:solidFill>
                 <a:srgbClr val="000000"/>
               </a:solidFill>
@@ -7441,7 +7788,7 @@
       </p:grpSpPr>
       <p:sp>
         <p:nvSpPr>
-          <p:cNvPr id="96" name="PlaceHolder 1"/>
+          <p:cNvPr id="98" name="PlaceHolder 1"/>
           <p:cNvSpPr>
             <a:spLocks noGrp="1"/>
           </p:cNvSpPr>
@@ -7452,7 +7799,7 @@
         <p:spPr>
           <a:xfrm>
             <a:off x="838080" y="365040"/>
-            <a:ext cx="10514880" cy="1324800"/>
+            <a:ext cx="10514520" cy="1324440"/>
           </a:xfrm>
           <a:prstGeom prst="rect">
             <a:avLst/>
@@ -7496,7 +7843,7 @@
       </p:sp>
       <p:sp>
         <p:nvSpPr>
-          <p:cNvPr id="97" name="PlaceHolder 2"/>
+          <p:cNvPr id="99" name="PlaceHolder 2"/>
           <p:cNvSpPr>
             <a:spLocks noGrp="1"/>
           </p:cNvSpPr>
@@ -7507,7 +7854,7 @@
         <p:spPr>
           <a:xfrm>
             <a:off x="838080" y="1825560"/>
-            <a:ext cx="10514880" cy="4350600"/>
+            <a:ext cx="10514520" cy="4350240"/>
           </a:xfrm>
           <a:prstGeom prst="rect">
             <a:avLst/>
@@ -7522,18 +7869,14 @@
             <a:noAutofit/>
           </a:bodyPr>
           <a:p>
-            <a:pPr marL="228600" indent="-228600">
+            <a:pPr indent="0">
               <a:lnSpc>
                 <a:spcPct val="90000"/>
               </a:lnSpc>
               <a:spcBef>
                 <a:spcPts val="1001"/>
               </a:spcBef>
-              <a:buClr>
-                <a:srgbClr val="000000"/>
-              </a:buClr>
-              <a:buFont typeface="Arial"/>
-              <a:buChar char="•"/>
+              <a:buNone/>
             </a:pPr>
             <a:r>
               <a:rPr b="0" lang="en-US" sz="1800" spc="-1" strike="noStrike">
@@ -7543,7 +7886,7 @@
                 <a:latin typeface="Times New Roman"/>
                 <a:ea typeface="Times New Roman"/>
               </a:rPr>
-              <a:t>&lt;apply results, connect results with the chosen problem statement or business question&gt;</a:t>
+              <a:t>Micro-Project 3 will apply linear regression as a baseline model and Support Vector Regression (SVM) regression to predict continuous load values from time-based features (hour, season, zone). I may also apply an autoregressive integrated moving average (ARIMA) as that is also a popular choice for analyzing and forecasting time series data to compare to the SVM regression. Micro-Project 4 will apply RNN-based deep learning to model the sequential/time-series structure directly</a:t>
             </a:r>
             <a:endParaRPr b="0" lang="en-US" sz="1800" spc="-1" strike="noStrike">
               <a:solidFill>

--- a/ANA500_Micro-Project_JonathanEspedal.pptx
+++ b/ANA500_Micro-Project_JonathanEspedal.pptx
@@ -14,6 +14,8 @@
     <p:sldId id="261" r:id="rId9"/>
     <p:sldId id="262" r:id="rId10"/>
     <p:sldId id="263" r:id="rId11"/>
+    <p:sldId id="264" r:id="rId12"/>
+    <p:sldId id="265" r:id="rId13"/>
   </p:sldIdLst>
   <p:sldSz cx="12192000" cy="6858000"/>
   <p:notesSz cx="7772400" cy="10058400"/>
@@ -71,7 +73,7 @@
         <p:txBody>
           <a:bodyPr/>
           <a:p>
-            <a:fld id="{AE8669D4-D935-4754-8300-1D5C29B74CDC}" type="slidenum">
+            <a:fld id="{80E18ED1-97FE-45B5-9AC0-8356A53E7217}" type="slidenum">
               <a:t>&lt;#&gt;</a:t>
             </a:fld>
           </a:p>
@@ -280,7 +282,7 @@
         <p:txBody>
           <a:bodyPr/>
           <a:p>
-            <a:fld id="{02CEC5A0-F4D3-4AB3-977F-174D4E435247}" type="slidenum">
+            <a:fld id="{D0CCADE9-9755-416B-8878-1C041FDF8DB0}" type="slidenum">
               <a:t>&lt;#&gt;</a:t>
             </a:fld>
           </a:p>
@@ -575,7 +577,7 @@
         <p:txBody>
           <a:bodyPr/>
           <a:p>
-            <a:fld id="{8404AFDC-F1CC-48C6-9418-8024CF8F7DD7}" type="slidenum">
+            <a:fld id="{46F2ECD1-7515-43C9-9BB4-4D2004DB3C56}" type="slidenum">
               <a:t>&lt;#&gt;</a:t>
             </a:fld>
           </a:p>
@@ -956,7 +958,7 @@
         <p:txBody>
           <a:bodyPr/>
           <a:p>
-            <a:fld id="{54E17D1A-61DB-4409-B525-A3DB4D572FC4}" type="slidenum">
+            <a:fld id="{75931E5A-8A16-4E24-B589-009D512B8DBD}" type="slidenum">
               <a:t>&lt;#&gt;</a:t>
             </a:fld>
           </a:p>
@@ -1039,7 +1041,7 @@
         <p:txBody>
           <a:bodyPr/>
           <a:p>
-            <a:fld id="{08FA9F6C-E47E-4281-A857-E00DDACBD85D}" type="slidenum">
+            <a:fld id="{480282D0-02EA-4183-8AD3-FF886C80340E}" type="slidenum">
               <a:t>&lt;#&gt;</a:t>
             </a:fld>
           </a:p>
@@ -1202,7 +1204,7 @@
         <p:txBody>
           <a:bodyPr/>
           <a:p>
-            <a:fld id="{FD72A5C8-1727-4E59-B8CA-50AED8D02381}" type="slidenum">
+            <a:fld id="{35129AE2-D8C6-47E4-85BD-71B559DDE0CD}" type="slidenum">
               <a:t>&lt;#&gt;</a:t>
             </a:fld>
           </a:p>
@@ -1368,7 +1370,7 @@
         <p:txBody>
           <a:bodyPr/>
           <a:p>
-            <a:fld id="{AC12E6FE-7880-429C-ACCC-613A58310235}" type="slidenum">
+            <a:fld id="{96E69EA4-9C74-4CC1-A94F-2832086379AC}" type="slidenum">
               <a:t>&lt;#&gt;</a:t>
             </a:fld>
           </a:p>
@@ -1577,7 +1579,7 @@
         <p:txBody>
           <a:bodyPr/>
           <a:p>
-            <a:fld id="{EA24A2C0-3B9B-463B-B33A-721C626556EF}" type="slidenum">
+            <a:fld id="{48791F88-4078-42DA-8BDA-7F0794F7DB97}" type="slidenum">
               <a:t>&lt;#&gt;</a:t>
             </a:fld>
           </a:p>
@@ -1700,7 +1702,7 @@
         <p:txBody>
           <a:bodyPr/>
           <a:p>
-            <a:fld id="{A0ABD655-C88E-4BA5-811F-93FAE7C144A8}" type="slidenum">
+            <a:fld id="{F9A49AD5-DD21-4AA8-AADD-8FDB0E116CB6}" type="slidenum">
               <a:t>&lt;#&gt;</a:t>
             </a:fld>
           </a:p>
@@ -1821,7 +1823,7 @@
         <p:txBody>
           <a:bodyPr/>
           <a:p>
-            <a:fld id="{8005B95C-7EEE-423F-AF37-666025DC9478}" type="slidenum">
+            <a:fld id="{2530AE78-6900-425F-9826-68EEC782AB0F}" type="slidenum">
               <a:t>&lt;#&gt;</a:t>
             </a:fld>
           </a:p>
@@ -2073,7 +2075,7 @@
         <p:txBody>
           <a:bodyPr/>
           <a:p>
-            <a:fld id="{43F0948F-0541-4D15-8F73-D1ABB8F2ABD8}" type="slidenum">
+            <a:fld id="{05C1CDF0-D9D3-4677-8673-4EF6A74DD650}" type="slidenum">
               <a:t>&lt;#&gt;</a:t>
             </a:fld>
           </a:p>
@@ -2236,7 +2238,7 @@
         <p:txBody>
           <a:bodyPr/>
           <a:p>
-            <a:fld id="{94BB7BF5-E70C-48F6-93D6-5738BFF56305}" type="slidenum">
+            <a:fld id="{395656A9-BB21-472F-BCC9-546166CDA8DE}" type="slidenum">
               <a:t>&lt;#&gt;</a:t>
             </a:fld>
           </a:p>
@@ -2488,7 +2490,7 @@
         <p:txBody>
           <a:bodyPr/>
           <a:p>
-            <a:fld id="{BE73EAA0-78FE-4A45-BA45-770D4B969AEC}" type="slidenum">
+            <a:fld id="{4D0C16BD-4768-4111-B907-EF2E67F75EFE}" type="slidenum">
               <a:t>&lt;#&gt;</a:t>
             </a:fld>
           </a:p>
@@ -2740,7 +2742,7 @@
         <p:txBody>
           <a:bodyPr/>
           <a:p>
-            <a:fld id="{2921E4C0-4BD3-47B0-A972-F44AFCE51211}" type="slidenum">
+            <a:fld id="{61F842B2-A2D5-4A74-B534-562CF6D1BA97}" type="slidenum">
               <a:t>&lt;#&gt;</a:t>
             </a:fld>
           </a:p>
@@ -2949,7 +2951,7 @@
         <p:txBody>
           <a:bodyPr/>
           <a:p>
-            <a:fld id="{6AE15C18-772D-436C-B490-171F7A15E324}" type="slidenum">
+            <a:fld id="{792679CF-918D-4A9D-AE1B-B1E277AEDEC6}" type="slidenum">
               <a:t>&lt;#&gt;</a:t>
             </a:fld>
           </a:p>
@@ -3244,7 +3246,7 @@
         <p:txBody>
           <a:bodyPr/>
           <a:p>
-            <a:fld id="{BE89F735-389E-4B4C-AA56-083FA26C3B2D}" type="slidenum">
+            <a:fld id="{E5290F66-D155-4850-980C-8CD9CB08CB20}" type="slidenum">
               <a:t>&lt;#&gt;</a:t>
             </a:fld>
           </a:p>
@@ -3625,7 +3627,7 @@
         <p:txBody>
           <a:bodyPr/>
           <a:p>
-            <a:fld id="{36602ED5-BC95-44E0-AEFC-B87737F1A8F2}" type="slidenum">
+            <a:fld id="{12325492-6517-46C0-B470-929E4AF2BE10}" type="slidenum">
               <a:t>&lt;#&gt;</a:t>
             </a:fld>
           </a:p>
@@ -3791,7 +3793,7 @@
         <p:txBody>
           <a:bodyPr/>
           <a:p>
-            <a:fld id="{3FE2AC8F-3EDF-4233-9171-BA54594E6D36}" type="slidenum">
+            <a:fld id="{7263EB3E-B803-4344-807E-0E42CE0C62E4}" type="slidenum">
               <a:t>&lt;#&gt;</a:t>
             </a:fld>
           </a:p>
@@ -4000,7 +4002,7 @@
         <p:txBody>
           <a:bodyPr/>
           <a:p>
-            <a:fld id="{7C68BCD1-2CBE-46E0-B5DF-3ADC32BE3139}" type="slidenum">
+            <a:fld id="{308049AA-27E1-41D9-826A-9C9ACA2A5BBA}" type="slidenum">
               <a:t>&lt;#&gt;</a:t>
             </a:fld>
           </a:p>
@@ -4123,7 +4125,7 @@
         <p:txBody>
           <a:bodyPr/>
           <a:p>
-            <a:fld id="{711CE0D5-7259-4D0D-B382-C115E3483549}" type="slidenum">
+            <a:fld id="{CF5E417D-9010-4139-9C4A-6A1EA1F7A4CA}" type="slidenum">
               <a:t>&lt;#&gt;</a:t>
             </a:fld>
           </a:p>
@@ -4244,7 +4246,7 @@
         <p:txBody>
           <a:bodyPr/>
           <a:p>
-            <a:fld id="{26646311-50E4-49B7-A399-6DD41F18B230}" type="slidenum">
+            <a:fld id="{B743A469-216E-46F2-9042-2B01550D188C}" type="slidenum">
               <a:t>&lt;#&gt;</a:t>
             </a:fld>
           </a:p>
@@ -4496,7 +4498,7 @@
         <p:txBody>
           <a:bodyPr/>
           <a:p>
-            <a:fld id="{73F73E1E-8E85-4F42-A760-48A1F716609B}" type="slidenum">
+            <a:fld id="{D3729138-5B23-472F-BA6C-DB3732F2307E}" type="slidenum">
               <a:t>&lt;#&gt;</a:t>
             </a:fld>
           </a:p>
@@ -4748,7 +4750,7 @@
         <p:txBody>
           <a:bodyPr/>
           <a:p>
-            <a:fld id="{F23629FD-63B2-4BF5-8921-8D7B67E9D486}" type="slidenum">
+            <a:fld id="{0579A7F3-AA1A-4B29-9AC1-A7E8A8D4D251}" type="slidenum">
               <a:t>&lt;#&gt;</a:t>
             </a:fld>
           </a:p>
@@ -5000,7 +5002,7 @@
         <p:txBody>
           <a:bodyPr/>
           <a:p>
-            <a:fld id="{A9A6E18D-B0F9-43A4-8494-5B87F9F086E4}" type="slidenum">
+            <a:fld id="{1942990A-D0FC-4BAC-8FDC-F86E26119487}" type="slidenum">
               <a:t>&lt;#&gt;</a:t>
             </a:fld>
           </a:p>
@@ -5063,287 +5065,13 @@
             <a:spLocks noGrp="1"/>
           </p:cNvSpPr>
           <p:nvPr>
-            <p:ph type="title"/>
-          </p:nvPr>
-        </p:nvSpPr>
-        <p:spPr>
-          <a:xfrm>
-            <a:off x="609480" y="273600"/>
-            <a:ext cx="10972080" cy="1144440"/>
-          </a:xfrm>
-          <a:prstGeom prst="rect">
-            <a:avLst/>
-          </a:prstGeom>
-          <a:noFill/>
-          <a:ln w="0">
-            <a:noFill/>
-          </a:ln>
-        </p:spPr>
-        <p:txBody>
-          <a:bodyPr lIns="0" rIns="0" tIns="0" bIns="0" anchor="ctr">
-            <a:noAutofit/>
-          </a:bodyPr>
-          <a:p>
-            <a:pPr indent="0">
-              <a:buNone/>
-            </a:pPr>
-            <a:r>
-              <a:rPr b="0" lang="en-US" sz="1800" spc="-1" strike="noStrike">
-                <a:solidFill>
-                  <a:srgbClr val="000000"/>
-                </a:solidFill>
-                <a:latin typeface="Arial"/>
-              </a:rPr>
-              <a:t>Click to edit the title text format</a:t>
-            </a:r>
-            <a:endParaRPr b="0" lang="en-US" sz="1800" spc="-1" strike="noStrike">
-              <a:solidFill>
-                <a:srgbClr val="000000"/>
-              </a:solidFill>
-              <a:latin typeface="Arial"/>
-            </a:endParaRPr>
-          </a:p>
-        </p:txBody>
-      </p:sp>
-      <p:sp>
-        <p:nvSpPr>
-          <p:cNvPr id="1" name="PlaceHolder 2"/>
-          <p:cNvSpPr>
-            <a:spLocks noGrp="1"/>
-          </p:cNvSpPr>
-          <p:nvPr>
-            <p:ph type="body"/>
-          </p:nvPr>
-        </p:nvSpPr>
-        <p:spPr>
-          <a:xfrm>
-            <a:off x="609480" y="1604520"/>
-            <a:ext cx="10972080" cy="3976920"/>
-          </a:xfrm>
-          <a:prstGeom prst="rect">
-            <a:avLst/>
-          </a:prstGeom>
-          <a:noFill/>
-          <a:ln w="0">
-            <a:noFill/>
-          </a:ln>
-        </p:spPr>
-        <p:txBody>
-          <a:bodyPr lIns="0" rIns="0" tIns="0" bIns="0" anchor="t">
-            <a:normAutofit/>
-          </a:bodyPr>
-          <a:p>
-            <a:pPr marL="432000" indent="-324000">
-              <a:spcBef>
-                <a:spcPts val="1417"/>
-              </a:spcBef>
-              <a:buClr>
-                <a:srgbClr val="000000"/>
-              </a:buClr>
-              <a:buSzPct val="45000"/>
-              <a:buFont typeface="Wingdings" charset="2"/>
-              <a:buChar char=""/>
-            </a:pPr>
-            <a:r>
-              <a:rPr b="0" lang="en-US" sz="1800" spc="-1" strike="noStrike">
-                <a:solidFill>
-                  <a:srgbClr val="000000"/>
-                </a:solidFill>
-                <a:latin typeface="Arial"/>
-              </a:rPr>
-              <a:t>Click to edit the outline text format</a:t>
-            </a:r>
-            <a:endParaRPr b="0" lang="en-US" sz="1800" spc="-1" strike="noStrike">
-              <a:solidFill>
-                <a:srgbClr val="000000"/>
-              </a:solidFill>
-              <a:latin typeface="Arial"/>
-            </a:endParaRPr>
-          </a:p>
-          <a:p>
-            <a:pPr lvl="1" marL="864000" indent="-324000">
-              <a:spcBef>
-                <a:spcPts val="1134"/>
-              </a:spcBef>
-              <a:buClr>
-                <a:srgbClr val="000000"/>
-              </a:buClr>
-              <a:buSzPct val="75000"/>
-              <a:buFont typeface="Symbol" charset="2"/>
-              <a:buChar char=""/>
-            </a:pPr>
-            <a:r>
-              <a:rPr b="0" lang="en-US" sz="1800" spc="-1" strike="noStrike">
-                <a:solidFill>
-                  <a:srgbClr val="000000"/>
-                </a:solidFill>
-                <a:latin typeface="Arial"/>
-              </a:rPr>
-              <a:t>Second Outline Level</a:t>
-            </a:r>
-            <a:endParaRPr b="0" lang="en-US" sz="1800" spc="-1" strike="noStrike">
-              <a:solidFill>
-                <a:srgbClr val="000000"/>
-              </a:solidFill>
-              <a:latin typeface="Arial"/>
-            </a:endParaRPr>
-          </a:p>
-          <a:p>
-            <a:pPr lvl="2" marL="1296000" indent="-288000">
-              <a:spcBef>
-                <a:spcPts val="850"/>
-              </a:spcBef>
-              <a:buClr>
-                <a:srgbClr val="000000"/>
-              </a:buClr>
-              <a:buSzPct val="45000"/>
-              <a:buFont typeface="Wingdings" charset="2"/>
-              <a:buChar char=""/>
-            </a:pPr>
-            <a:r>
-              <a:rPr b="0" lang="en-US" sz="1800" spc="-1" strike="noStrike">
-                <a:solidFill>
-                  <a:srgbClr val="000000"/>
-                </a:solidFill>
-                <a:latin typeface="Arial"/>
-              </a:rPr>
-              <a:t>Third Outline Level</a:t>
-            </a:r>
-            <a:endParaRPr b="0" lang="en-US" sz="1800" spc="-1" strike="noStrike">
-              <a:solidFill>
-                <a:srgbClr val="000000"/>
-              </a:solidFill>
-              <a:latin typeface="Arial"/>
-            </a:endParaRPr>
-          </a:p>
-          <a:p>
-            <a:pPr lvl="3" marL="1728000" indent="-216000">
-              <a:spcBef>
-                <a:spcPts val="567"/>
-              </a:spcBef>
-              <a:buClr>
-                <a:srgbClr val="000000"/>
-              </a:buClr>
-              <a:buSzPct val="75000"/>
-              <a:buFont typeface="Symbol" charset="2"/>
-              <a:buChar char=""/>
-            </a:pPr>
-            <a:r>
-              <a:rPr b="0" lang="en-US" sz="1800" spc="-1" strike="noStrike">
-                <a:solidFill>
-                  <a:srgbClr val="000000"/>
-                </a:solidFill>
-                <a:latin typeface="Arial"/>
-              </a:rPr>
-              <a:t>Fourth Outline Level</a:t>
-            </a:r>
-            <a:endParaRPr b="0" lang="en-US" sz="1800" spc="-1" strike="noStrike">
-              <a:solidFill>
-                <a:srgbClr val="000000"/>
-              </a:solidFill>
-              <a:latin typeface="Arial"/>
-            </a:endParaRPr>
-          </a:p>
-          <a:p>
-            <a:pPr lvl="4" marL="2160000" indent="-216000">
-              <a:spcBef>
-                <a:spcPts val="283"/>
-              </a:spcBef>
-              <a:buClr>
-                <a:srgbClr val="000000"/>
-              </a:buClr>
-              <a:buSzPct val="45000"/>
-              <a:buFont typeface="Wingdings" charset="2"/>
-              <a:buChar char=""/>
-            </a:pPr>
-            <a:r>
-              <a:rPr b="0" lang="en-US" sz="1800" spc="-1" strike="noStrike">
-                <a:solidFill>
-                  <a:srgbClr val="000000"/>
-                </a:solidFill>
-                <a:latin typeface="Arial"/>
-              </a:rPr>
-              <a:t>Fifth Outline Level</a:t>
-            </a:r>
-            <a:endParaRPr b="0" lang="en-US" sz="1800" spc="-1" strike="noStrike">
-              <a:solidFill>
-                <a:srgbClr val="000000"/>
-              </a:solidFill>
-              <a:latin typeface="Arial"/>
-            </a:endParaRPr>
-          </a:p>
-          <a:p>
-            <a:pPr lvl="5" marL="2592000" indent="-216000">
-              <a:spcBef>
-                <a:spcPts val="283"/>
-              </a:spcBef>
-              <a:buClr>
-                <a:srgbClr val="000000"/>
-              </a:buClr>
-              <a:buSzPct val="45000"/>
-              <a:buFont typeface="Wingdings" charset="2"/>
-              <a:buChar char=""/>
-            </a:pPr>
-            <a:r>
-              <a:rPr b="0" lang="en-US" sz="1800" spc="-1" strike="noStrike">
-                <a:solidFill>
-                  <a:srgbClr val="000000"/>
-                </a:solidFill>
-                <a:latin typeface="Arial"/>
-              </a:rPr>
-              <a:t>Sixth Outline Level</a:t>
-            </a:r>
-            <a:endParaRPr b="0" lang="en-US" sz="1800" spc="-1" strike="noStrike">
-              <a:solidFill>
-                <a:srgbClr val="000000"/>
-              </a:solidFill>
-              <a:latin typeface="Arial"/>
-            </a:endParaRPr>
-          </a:p>
-          <a:p>
-            <a:pPr lvl="6" marL="3024000" indent="-216000">
-              <a:spcBef>
-                <a:spcPts val="283"/>
-              </a:spcBef>
-              <a:buClr>
-                <a:srgbClr val="000000"/>
-              </a:buClr>
-              <a:buSzPct val="45000"/>
-              <a:buFont typeface="Wingdings" charset="2"/>
-              <a:buChar char=""/>
-            </a:pPr>
-            <a:r>
-              <a:rPr b="0" lang="en-US" sz="1800" spc="-1" strike="noStrike">
-                <a:solidFill>
-                  <a:srgbClr val="000000"/>
-                </a:solidFill>
-                <a:latin typeface="Arial"/>
-              </a:rPr>
-              <a:t>Seventh Outline Level</a:t>
-            </a:r>
-            <a:endParaRPr b="0" lang="en-US" sz="1800" spc="-1" strike="noStrike">
-              <a:solidFill>
-                <a:srgbClr val="000000"/>
-              </a:solidFill>
-              <a:latin typeface="Arial"/>
-            </a:endParaRPr>
-          </a:p>
-        </p:txBody>
-      </p:sp>
-      <p:sp>
-        <p:nvSpPr>
-          <p:cNvPr id="2" name="PlaceHolder 3"/>
-          <p:cNvSpPr>
-            <a:spLocks noGrp="1"/>
-          </p:cNvSpPr>
-          <p:nvPr>
             <p:ph type="ftr" idx="1"/>
           </p:nvPr>
         </p:nvSpPr>
         <p:spPr>
           <a:xfrm>
             <a:off x="4038480" y="6356520"/>
-            <a:ext cx="4113720" cy="363960"/>
+            <a:ext cx="4113000" cy="363240"/>
           </a:xfrm>
           <a:prstGeom prst="rect">
             <a:avLst/>
@@ -5391,7 +5119,7 @@
                 </a:solidFill>
                 <a:latin typeface="Times New Roman"/>
               </a:rPr>
-              <a:t>&lt;footer&gt;</a:t>
+              <a:t> </a:t>
             </a:r>
             <a:endParaRPr b="0" lang="en-US" sz="1400" spc="-1" strike="noStrike">
               <a:solidFill>
@@ -5404,7 +5132,7 @@
       </p:sp>
       <p:sp>
         <p:nvSpPr>
-          <p:cNvPr id="3" name="PlaceHolder 4"/>
+          <p:cNvPr id="1" name="PlaceHolder 2"/>
           <p:cNvSpPr>
             <a:spLocks noGrp="1"/>
           </p:cNvSpPr>
@@ -5415,7 +5143,7 @@
         <p:spPr>
           <a:xfrm>
             <a:off x="8610480" y="6356520"/>
-            <a:ext cx="2742120" cy="363960"/>
+            <a:ext cx="2741400" cy="363240"/>
           </a:xfrm>
           <a:prstGeom prst="rect">
             <a:avLst/>
@@ -5456,14 +5184,14 @@
                 <a:tab algn="l" pos="0"/>
               </a:tabLst>
             </a:pPr>
-            <a:fld id="{41ED8EA6-A494-417D-9E5E-FA1A91518DDA}" type="slidenum">
+            <a:fld id="{17DC3E5E-32C2-45CB-B1B3-27A840FBE6BC}" type="slidenum">
               <a:rPr b="0" lang="en-US" sz="1200" spc="-1" strike="noStrike">
                 <a:solidFill>
                   <a:srgbClr val="8b8b8b"/>
                 </a:solidFill>
                 <a:latin typeface="Calibri"/>
               </a:rPr>
-              <a:t>&lt;number&gt;</a:t>
+              <a:t>9</a:t>
             </a:fld>
             <a:endParaRPr b="0" lang="en-US" sz="1200" spc="-1" strike="noStrike">
               <a:solidFill>
@@ -5476,7 +5204,7 @@
       </p:sp>
       <p:sp>
         <p:nvSpPr>
-          <p:cNvPr id="4" name="PlaceHolder 5"/>
+          <p:cNvPr id="2" name="PlaceHolder 3"/>
           <p:cNvSpPr>
             <a:spLocks noGrp="1"/>
           </p:cNvSpPr>
@@ -5487,7 +5215,7 @@
         <p:spPr>
           <a:xfrm>
             <a:off x="838080" y="6356520"/>
-            <a:ext cx="2742120" cy="363960"/>
+            <a:ext cx="2741400" cy="363240"/>
           </a:xfrm>
           <a:prstGeom prst="rect">
             <a:avLst/>
@@ -5523,13 +5251,287 @@
                 </a:solidFill>
                 <a:latin typeface="Times New Roman"/>
               </a:rPr>
-              <a:t>&lt;date/time&gt;</a:t>
+              <a:t> </a:t>
             </a:r>
             <a:endParaRPr b="0" lang="en-US" sz="1400" spc="-1" strike="noStrike">
               <a:solidFill>
                 <a:srgbClr val="000000"/>
               </a:solidFill>
               <a:latin typeface="Times New Roman"/>
+            </a:endParaRPr>
+          </a:p>
+        </p:txBody>
+      </p:sp>
+      <p:sp>
+        <p:nvSpPr>
+          <p:cNvPr id="3" name="PlaceHolder 4"/>
+          <p:cNvSpPr>
+            <a:spLocks noGrp="1"/>
+          </p:cNvSpPr>
+          <p:nvPr>
+            <p:ph type="title"/>
+          </p:nvPr>
+        </p:nvSpPr>
+        <p:spPr>
+          <a:xfrm>
+            <a:off x="609480" y="273600"/>
+            <a:ext cx="10972440" cy="1144800"/>
+          </a:xfrm>
+          <a:prstGeom prst="rect">
+            <a:avLst/>
+          </a:prstGeom>
+          <a:noFill/>
+          <a:ln w="0">
+            <a:noFill/>
+          </a:ln>
+        </p:spPr>
+        <p:txBody>
+          <a:bodyPr lIns="0" rIns="0" tIns="0" bIns="0" anchor="ctr">
+            <a:noAutofit/>
+          </a:bodyPr>
+          <a:p>
+            <a:pPr indent="0" algn="ctr">
+              <a:buNone/>
+            </a:pPr>
+            <a:r>
+              <a:rPr b="0" lang="en-US" sz="4400" spc="-1" strike="noStrike">
+                <a:solidFill>
+                  <a:srgbClr val="000000"/>
+                </a:solidFill>
+                <a:latin typeface="Arial"/>
+              </a:rPr>
+              <a:t>Click to edit the title text format</a:t>
+            </a:r>
+            <a:endParaRPr b="0" lang="en-US" sz="4400" spc="-1" strike="noStrike">
+              <a:solidFill>
+                <a:srgbClr val="000000"/>
+              </a:solidFill>
+              <a:latin typeface="Arial"/>
+            </a:endParaRPr>
+          </a:p>
+        </p:txBody>
+      </p:sp>
+      <p:sp>
+        <p:nvSpPr>
+          <p:cNvPr id="4" name="PlaceHolder 5"/>
+          <p:cNvSpPr>
+            <a:spLocks noGrp="1"/>
+          </p:cNvSpPr>
+          <p:nvPr>
+            <p:ph type="body"/>
+          </p:nvPr>
+        </p:nvSpPr>
+        <p:spPr>
+          <a:xfrm>
+            <a:off x="609480" y="1604520"/>
+            <a:ext cx="10972440" cy="3977280"/>
+          </a:xfrm>
+          <a:prstGeom prst="rect">
+            <a:avLst/>
+          </a:prstGeom>
+          <a:noFill/>
+          <a:ln w="0">
+            <a:noFill/>
+          </a:ln>
+        </p:spPr>
+        <p:txBody>
+          <a:bodyPr lIns="0" rIns="0" tIns="0" bIns="0" anchor="t">
+            <a:normAutofit/>
+          </a:bodyPr>
+          <a:p>
+            <a:pPr marL="432000" indent="-324000">
+              <a:spcBef>
+                <a:spcPts val="1417"/>
+              </a:spcBef>
+              <a:buClr>
+                <a:srgbClr val="000000"/>
+              </a:buClr>
+              <a:buSzPct val="45000"/>
+              <a:buFont typeface="Wingdings" charset="2"/>
+              <a:buChar char=""/>
+            </a:pPr>
+            <a:r>
+              <a:rPr b="0" lang="en-US" sz="3200" spc="-1" strike="noStrike">
+                <a:solidFill>
+                  <a:srgbClr val="000000"/>
+                </a:solidFill>
+                <a:latin typeface="Arial"/>
+              </a:rPr>
+              <a:t>Click to edit the outline text format</a:t>
+            </a:r>
+            <a:endParaRPr b="0" lang="en-US" sz="3200" spc="-1" strike="noStrike">
+              <a:solidFill>
+                <a:srgbClr val="000000"/>
+              </a:solidFill>
+              <a:latin typeface="Arial"/>
+            </a:endParaRPr>
+          </a:p>
+          <a:p>
+            <a:pPr lvl="1" marL="864000" indent="-324000">
+              <a:spcBef>
+                <a:spcPts val="1134"/>
+              </a:spcBef>
+              <a:buClr>
+                <a:srgbClr val="000000"/>
+              </a:buClr>
+              <a:buSzPct val="75000"/>
+              <a:buFont typeface="Symbol" charset="2"/>
+              <a:buChar char=""/>
+            </a:pPr>
+            <a:r>
+              <a:rPr b="0" lang="en-US" sz="2800" spc="-1" strike="noStrike">
+                <a:solidFill>
+                  <a:srgbClr val="000000"/>
+                </a:solidFill>
+                <a:latin typeface="Arial"/>
+              </a:rPr>
+              <a:t>Second Outline Level</a:t>
+            </a:r>
+            <a:endParaRPr b="0" lang="en-US" sz="2800" spc="-1" strike="noStrike">
+              <a:solidFill>
+                <a:srgbClr val="000000"/>
+              </a:solidFill>
+              <a:latin typeface="Arial"/>
+            </a:endParaRPr>
+          </a:p>
+          <a:p>
+            <a:pPr lvl="2" marL="1296000" indent="-288000">
+              <a:spcBef>
+                <a:spcPts val="850"/>
+              </a:spcBef>
+              <a:buClr>
+                <a:srgbClr val="000000"/>
+              </a:buClr>
+              <a:buSzPct val="45000"/>
+              <a:buFont typeface="Wingdings" charset="2"/>
+              <a:buChar char=""/>
+            </a:pPr>
+            <a:r>
+              <a:rPr b="0" lang="en-US" sz="2400" spc="-1" strike="noStrike">
+                <a:solidFill>
+                  <a:srgbClr val="000000"/>
+                </a:solidFill>
+                <a:latin typeface="Arial"/>
+              </a:rPr>
+              <a:t>Third Outline Level</a:t>
+            </a:r>
+            <a:endParaRPr b="0" lang="en-US" sz="2400" spc="-1" strike="noStrike">
+              <a:solidFill>
+                <a:srgbClr val="000000"/>
+              </a:solidFill>
+              <a:latin typeface="Arial"/>
+            </a:endParaRPr>
+          </a:p>
+          <a:p>
+            <a:pPr lvl="3" marL="1728000" indent="-216000">
+              <a:spcBef>
+                <a:spcPts val="567"/>
+              </a:spcBef>
+              <a:buClr>
+                <a:srgbClr val="000000"/>
+              </a:buClr>
+              <a:buSzPct val="75000"/>
+              <a:buFont typeface="Symbol" charset="2"/>
+              <a:buChar char=""/>
+            </a:pPr>
+            <a:r>
+              <a:rPr b="0" lang="en-US" sz="2000" spc="-1" strike="noStrike">
+                <a:solidFill>
+                  <a:srgbClr val="000000"/>
+                </a:solidFill>
+                <a:latin typeface="Arial"/>
+              </a:rPr>
+              <a:t>Fourth Outline Level</a:t>
+            </a:r>
+            <a:endParaRPr b="0" lang="en-US" sz="2000" spc="-1" strike="noStrike">
+              <a:solidFill>
+                <a:srgbClr val="000000"/>
+              </a:solidFill>
+              <a:latin typeface="Arial"/>
+            </a:endParaRPr>
+          </a:p>
+          <a:p>
+            <a:pPr lvl="4" marL="2160000" indent="-216000">
+              <a:spcBef>
+                <a:spcPts val="283"/>
+              </a:spcBef>
+              <a:buClr>
+                <a:srgbClr val="000000"/>
+              </a:buClr>
+              <a:buSzPct val="45000"/>
+              <a:buFont typeface="Wingdings" charset="2"/>
+              <a:buChar char=""/>
+            </a:pPr>
+            <a:r>
+              <a:rPr b="0" lang="en-US" sz="2000" spc="-1" strike="noStrike">
+                <a:solidFill>
+                  <a:srgbClr val="000000"/>
+                </a:solidFill>
+                <a:latin typeface="Arial"/>
+              </a:rPr>
+              <a:t>Fifth Outline Level</a:t>
+            </a:r>
+            <a:endParaRPr b="0" lang="en-US" sz="2000" spc="-1" strike="noStrike">
+              <a:solidFill>
+                <a:srgbClr val="000000"/>
+              </a:solidFill>
+              <a:latin typeface="Arial"/>
+            </a:endParaRPr>
+          </a:p>
+          <a:p>
+            <a:pPr lvl="5" marL="2592000" indent="-216000">
+              <a:spcBef>
+                <a:spcPts val="283"/>
+              </a:spcBef>
+              <a:buClr>
+                <a:srgbClr val="000000"/>
+              </a:buClr>
+              <a:buSzPct val="45000"/>
+              <a:buFont typeface="Wingdings" charset="2"/>
+              <a:buChar char=""/>
+            </a:pPr>
+            <a:r>
+              <a:rPr b="0" lang="en-US" sz="2000" spc="-1" strike="noStrike">
+                <a:solidFill>
+                  <a:srgbClr val="000000"/>
+                </a:solidFill>
+                <a:latin typeface="Arial"/>
+              </a:rPr>
+              <a:t>Sixth Outline Level</a:t>
+            </a:r>
+            <a:endParaRPr b="0" lang="en-US" sz="2000" spc="-1" strike="noStrike">
+              <a:solidFill>
+                <a:srgbClr val="000000"/>
+              </a:solidFill>
+              <a:latin typeface="Arial"/>
+            </a:endParaRPr>
+          </a:p>
+          <a:p>
+            <a:pPr lvl="6" marL="3024000" indent="-216000">
+              <a:spcBef>
+                <a:spcPts val="283"/>
+              </a:spcBef>
+              <a:buClr>
+                <a:srgbClr val="000000"/>
+              </a:buClr>
+              <a:buSzPct val="45000"/>
+              <a:buFont typeface="Wingdings" charset="2"/>
+              <a:buChar char=""/>
+            </a:pPr>
+            <a:r>
+              <a:rPr b="0" lang="en-US" sz="2000" spc="-1" strike="noStrike">
+                <a:solidFill>
+                  <a:srgbClr val="000000"/>
+                </a:solidFill>
+                <a:latin typeface="Arial"/>
+              </a:rPr>
+              <a:t>Seventh Outline Level</a:t>
+            </a:r>
+            <a:endParaRPr b="0" lang="en-US" sz="2000" spc="-1" strike="noStrike">
+              <a:solidFill>
+                <a:srgbClr val="000000"/>
+              </a:solidFill>
+              <a:latin typeface="Arial"/>
             </a:endParaRPr>
           </a:p>
         </p:txBody>
@@ -5591,7 +5593,7 @@
         <p:spPr>
           <a:xfrm>
             <a:off x="4038480" y="6356520"/>
-            <a:ext cx="4113720" cy="363960"/>
+            <a:ext cx="4113000" cy="363240"/>
           </a:xfrm>
           <a:prstGeom prst="rect">
             <a:avLst/>
@@ -5663,7 +5665,7 @@
         <p:spPr>
           <a:xfrm>
             <a:off x="8610480" y="6356520"/>
-            <a:ext cx="2742120" cy="363960"/>
+            <a:ext cx="2741400" cy="363240"/>
           </a:xfrm>
           <a:prstGeom prst="rect">
             <a:avLst/>
@@ -5704,7 +5706,7 @@
                 <a:tab algn="l" pos="0"/>
               </a:tabLst>
             </a:pPr>
-            <a:fld id="{B86050BC-6EE3-426B-84BB-87FA6F0ACC0F}" type="slidenum">
+            <a:fld id="{5D2AF725-540C-4642-B471-08C9F2D4D32B}" type="slidenum">
               <a:rPr b="0" lang="en-US" sz="1200" spc="-1" strike="noStrike">
                 <a:solidFill>
                   <a:srgbClr val="8b8b8b"/>
@@ -5735,7 +5737,7 @@
         <p:spPr>
           <a:xfrm>
             <a:off x="838080" y="6356520"/>
-            <a:ext cx="2742120" cy="363960"/>
+            <a:ext cx="2741400" cy="363240"/>
           </a:xfrm>
           <a:prstGeom prst="rect">
             <a:avLst/>
@@ -6106,7 +6108,7 @@
         <p:spPr>
           <a:xfrm>
             <a:off x="1523880" y="1122480"/>
-            <a:ext cx="9142920" cy="2386440"/>
+            <a:ext cx="9142200" cy="2385720"/>
           </a:xfrm>
           <a:prstGeom prst="rect">
             <a:avLst/>
@@ -6187,7 +6189,7 @@
         <p:spPr>
           <a:xfrm>
             <a:off x="1523880" y="3602160"/>
-            <a:ext cx="9142920" cy="1654560"/>
+            <a:ext cx="9142200" cy="1653840"/>
           </a:xfrm>
           <a:prstGeom prst="rect">
             <a:avLst/>
@@ -6250,7 +6252,7 @@
                 </a:solidFill>
                 <a:latin typeface="Calibri"/>
               </a:rPr>
-              <a:t>25 SEP 2026</a:t>
+              <a:t>04 OCT 2026</a:t>
             </a:r>
             <a:endParaRPr b="0" lang="en-US" sz="2400" spc="-1" strike="noStrike">
               <a:solidFill>
@@ -6273,6 +6275,150 @@
               </a:tabLst>
             </a:pPr>
             <a:endParaRPr b="0" lang="en-US" sz="2400" spc="-1" strike="noStrike">
+              <a:solidFill>
+                <a:srgbClr val="000000"/>
+              </a:solidFill>
+              <a:latin typeface="Arial"/>
+            </a:endParaRPr>
+          </a:p>
+        </p:txBody>
+      </p:sp>
+    </p:spTree>
+  </p:cSld>
+  <mc:AlternateContent>
+    <mc:Choice Requires="p14">
+      <p:transition spd="slow" p14:dur="2000"/>
+    </mc:Choice>
+    <mc:Fallback>
+      <p:transition spd="slow"/>
+    </mc:Fallback>
+  </mc:AlternateContent>
+</p:sld>
+</file>
+
+<file path=ppt/slides/slide10.xml><?xml version="1.0" encoding="utf-8"?>
+<p:sld xmlns:a="http://schemas.openxmlformats.org/drawingml/2006/main" xmlns:p="http://schemas.openxmlformats.org/presentationml/2006/main" xmlns:r="http://schemas.openxmlformats.org/officeDocument/2006/relationships" xmlns:p14="http://schemas.microsoft.com/office/powerpoint/2010/main" xmlns:p15="http://schemas.microsoft.com/office/powerpoint/2012/main" xmlns:mc="http://schemas.openxmlformats.org/markup-compatibility/2006">
+  <p:cSld>
+    <p:spTree>
+      <p:nvGrpSpPr>
+        <p:cNvPr id="1" name=""/>
+        <p:cNvGrpSpPr/>
+        <p:nvPr/>
+      </p:nvGrpSpPr>
+      <p:grpSpPr>
+        <a:xfrm>
+          <a:off x="0" y="0"/>
+          <a:ext cx="0" cy="0"/>
+          <a:chOff x="0" y="0"/>
+          <a:chExt cx="0" cy="0"/>
+        </a:xfrm>
+      </p:grpSpPr>
+      <p:sp>
+        <p:nvSpPr>
+          <p:cNvPr id="109" name="PlaceHolder 1"/>
+          <p:cNvSpPr>
+            <a:spLocks noGrp="1"/>
+          </p:cNvSpPr>
+          <p:nvPr>
+            <p:ph type="title"/>
+          </p:nvPr>
+        </p:nvSpPr>
+        <p:spPr>
+          <a:xfrm>
+            <a:off x="1440" y="0"/>
+            <a:ext cx="10513800" cy="685440"/>
+          </a:xfrm>
+          <a:prstGeom prst="rect">
+            <a:avLst/>
+          </a:prstGeom>
+          <a:noFill/>
+          <a:ln w="0">
+            <a:noFill/>
+          </a:ln>
+        </p:spPr>
+        <p:txBody>
+          <a:bodyPr lIns="90000" rIns="90000" tIns="45000" bIns="45000" anchor="ctr">
+            <a:noAutofit/>
+          </a:bodyPr>
+          <a:p>
+            <a:pPr indent="0">
+              <a:lnSpc>
+                <a:spcPct val="90000"/>
+              </a:lnSpc>
+              <a:buNone/>
+              <a:tabLst>
+                <a:tab algn="l" pos="0"/>
+              </a:tabLst>
+            </a:pPr>
+            <a:r>
+              <a:rPr b="0" lang="en-US" sz="4400" spc="-1" strike="noStrike">
+                <a:solidFill>
+                  <a:srgbClr val="000000"/>
+                </a:solidFill>
+                <a:latin typeface="Calibri Light"/>
+              </a:rPr>
+              <a:t>Act II – Recurrent Neural Networks</a:t>
+            </a:r>
+            <a:endParaRPr b="0" lang="en-US" sz="4400" spc="-1" strike="noStrike">
+              <a:solidFill>
+                <a:srgbClr val="000000"/>
+              </a:solidFill>
+              <a:latin typeface="Arial"/>
+            </a:endParaRPr>
+          </a:p>
+        </p:txBody>
+      </p:sp>
+      <p:sp>
+        <p:nvSpPr>
+          <p:cNvPr id="110" name="PlaceHolder 2"/>
+          <p:cNvSpPr>
+            <a:spLocks noGrp="1"/>
+          </p:cNvSpPr>
+          <p:nvPr>
+            <p:ph/>
+          </p:nvPr>
+        </p:nvSpPr>
+        <p:spPr>
+          <a:xfrm>
+            <a:off x="1440" y="679320"/>
+            <a:ext cx="10513800" cy="4349520"/>
+          </a:xfrm>
+          <a:prstGeom prst="rect">
+            <a:avLst/>
+          </a:prstGeom>
+          <a:noFill/>
+          <a:ln w="0">
+            <a:noFill/>
+          </a:ln>
+        </p:spPr>
+        <p:txBody>
+          <a:bodyPr lIns="90000" rIns="90000" tIns="45000" bIns="45000" anchor="t">
+            <a:noAutofit/>
+          </a:bodyPr>
+          <a:p>
+            <a:pPr indent="0">
+              <a:lnSpc>
+                <a:spcPct val="90000"/>
+              </a:lnSpc>
+              <a:spcBef>
+                <a:spcPts val="1001"/>
+              </a:spcBef>
+              <a:buNone/>
+              <a:tabLst>
+                <a:tab algn="l" pos="0"/>
+              </a:tabLst>
+            </a:pPr>
+            <a:r>
+              <a:rPr b="0" lang="en-US" sz="1800" spc="-1" strike="noStrike">
+                <a:solidFill>
+                  <a:srgbClr val="000000"/>
+                </a:solidFill>
+                <a:latin typeface="Times New Roman"/>
+                <a:ea typeface="Times New Roman"/>
+              </a:rPr>
+              <a:t>Micro-Project 4 will apply RNN-based deep learning to model the sequential/time-series structure directly.</a:t>
+            </a:r>
+            <a:endParaRPr b="0" lang="en-US" sz="1800" spc="-1" strike="noStrike">
               <a:solidFill>
                 <a:srgbClr val="000000"/>
               </a:solidFill>
@@ -6324,7 +6470,7 @@
         <p:spPr>
           <a:xfrm>
             <a:off x="838080" y="365040"/>
-            <a:ext cx="10514520" cy="1324440"/>
+            <a:ext cx="10513800" cy="1323720"/>
           </a:xfrm>
           <a:prstGeom prst="rect">
             <a:avLst/>
@@ -6379,7 +6525,7 @@
         <p:spPr>
           <a:xfrm>
             <a:off x="838080" y="1825560"/>
-            <a:ext cx="10514520" cy="4350240"/>
+            <a:ext cx="10513800" cy="4349520"/>
           </a:xfrm>
           <a:prstGeom prst="rect">
             <a:avLst/>
@@ -6468,7 +6614,7 @@
         <p:spPr>
           <a:xfrm>
             <a:off x="838080" y="365040"/>
-            <a:ext cx="10514520" cy="1324440"/>
+            <a:ext cx="10513800" cy="1323720"/>
           </a:xfrm>
           <a:prstGeom prst="rect">
             <a:avLst/>
@@ -6523,7 +6669,7 @@
         <p:spPr>
           <a:xfrm>
             <a:off x="838080" y="1825560"/>
-            <a:ext cx="10514520" cy="4350240"/>
+            <a:ext cx="10513800" cy="4349520"/>
           </a:xfrm>
           <a:prstGeom prst="rect">
             <a:avLst/>
@@ -6612,7 +6758,7 @@
         <p:spPr>
           <a:xfrm>
             <a:off x="838080" y="365040"/>
-            <a:ext cx="10514520" cy="1324440"/>
+            <a:ext cx="10513800" cy="1323720"/>
           </a:xfrm>
           <a:prstGeom prst="rect">
             <a:avLst/>
@@ -6667,7 +6813,7 @@
         <p:spPr>
           <a:xfrm>
             <a:off x="838080" y="1825560"/>
-            <a:ext cx="10514520" cy="4350240"/>
+            <a:ext cx="10513800" cy="4349520"/>
           </a:xfrm>
           <a:prstGeom prst="rect">
             <a:avLst/>
@@ -6876,7 +7022,7 @@
         <p:spPr>
           <a:xfrm>
             <a:off x="1080" y="0"/>
-            <a:ext cx="7999920" cy="914400"/>
+            <a:ext cx="7999200" cy="913680"/>
           </a:xfrm>
           <a:prstGeom prst="rect">
             <a:avLst/>
@@ -6931,7 +7077,7 @@
         <p:spPr>
           <a:xfrm>
             <a:off x="0" y="651600"/>
-            <a:ext cx="12115800" cy="6206400"/>
+            <a:ext cx="12115080" cy="6205680"/>
           </a:xfrm>
           <a:prstGeom prst="rect">
             <a:avLst/>
@@ -6954,6 +7100,9 @@
                 <a:spcPts val="1001"/>
               </a:spcBef>
               <a:buNone/>
+              <a:tabLst>
+                <a:tab algn="l" pos="0"/>
+              </a:tabLst>
             </a:pPr>
             <a:r>
               <a:rPr b="0" lang="en-US" sz="1800" spc="-1" strike="noStrike">
@@ -6981,6 +7130,9 @@
                 <a:spcPts val="1001"/>
               </a:spcBef>
               <a:buNone/>
+              <a:tabLst>
+                <a:tab algn="l" pos="0"/>
+              </a:tabLst>
             </a:pPr>
             <a:r>
               <a:rPr b="0" lang="en-US" sz="1800" spc="-1" strike="noStrike">
@@ -7008,6 +7160,9 @@
                 <a:spcPts val="1001"/>
               </a:spcBef>
               <a:buNone/>
+              <a:tabLst>
+                <a:tab algn="l" pos="0"/>
+              </a:tabLst>
             </a:pPr>
             <a:r>
               <a:rPr b="0" lang="en-US" sz="1800" spc="-1" strike="noStrike">
@@ -7027,7 +7182,7 @@
             </a:endParaRPr>
           </a:p>
           <a:p>
-            <a:pPr indent="0">
+            <a:pPr marL="228600" indent="0">
               <a:lnSpc>
                 <a:spcPct val="90000"/>
               </a:lnSpc>
@@ -7035,6 +7190,9 @@
                 <a:spcPts val="1001"/>
               </a:spcBef>
               <a:buNone/>
+              <a:tabLst>
+                <a:tab algn="l" pos="0"/>
+              </a:tabLst>
             </a:pPr>
             <a:r>
               <a:rPr b="0" lang="en-US" sz="1800" spc="-1" strike="noStrike">
@@ -7054,7 +7212,7 @@
             </a:endParaRPr>
           </a:p>
           <a:p>
-            <a:pPr indent="0">
+            <a:pPr marL="228600" indent="0">
               <a:lnSpc>
                 <a:spcPct val="90000"/>
               </a:lnSpc>
@@ -7062,6 +7220,9 @@
                 <a:spcPts val="1001"/>
               </a:spcBef>
               <a:buNone/>
+              <a:tabLst>
+                <a:tab algn="l" pos="0"/>
+              </a:tabLst>
             </a:pPr>
             <a:endParaRPr b="0" lang="en-US" sz="1800" spc="-1" strike="noStrike">
               <a:solidFill>
@@ -7071,7 +7232,7 @@
             </a:endParaRPr>
           </a:p>
           <a:p>
-            <a:pPr indent="0">
+            <a:pPr marL="228600" indent="0">
               <a:lnSpc>
                 <a:spcPct val="90000"/>
               </a:lnSpc>
@@ -7079,6 +7240,9 @@
                 <a:spcPts val="1001"/>
               </a:spcBef>
               <a:buNone/>
+              <a:tabLst>
+                <a:tab algn="l" pos="0"/>
+              </a:tabLst>
             </a:pPr>
             <a:r>
               <a:rPr b="0" lang="en-US" sz="1800" spc="-1" strike="noStrike">
@@ -7088,7 +7252,7 @@
                 <a:latin typeface="Times New Roman"/>
                 <a:ea typeface="Times New Roman"/>
               </a:rPr>
-              <a:t>Single-phase: kW = (V × I × PF) / 1000</a:t>
+              <a:t>Morocco's standard domestic supply is 220V AC single-phase; industrial connections are commonly 380V AC three-phase. Since the dataset does not separate domestic and industrial profiles, and we will state our assumed voltage explicitly as a limitation in our report to be 220V AC single-phase.</a:t>
             </a:r>
             <a:endParaRPr b="0" lang="en-US" sz="1800" spc="-1" strike="noStrike">
               <a:solidFill>
@@ -7098,7 +7262,7 @@
             </a:endParaRPr>
           </a:p>
           <a:p>
-            <a:pPr indent="0">
+            <a:pPr marL="228600" indent="0">
               <a:lnSpc>
                 <a:spcPct val="90000"/>
               </a:lnSpc>
@@ -7106,77 +7270,9 @@
                 <a:spcPts val="1001"/>
               </a:spcBef>
               <a:buNone/>
-            </a:pPr>
-            <a:r>
-              <a:rPr b="0" lang="en-US" sz="1800" spc="-1" strike="noStrike">
-                <a:solidFill>
-                  <a:srgbClr val="000000"/>
-                </a:solidFill>
-                <a:latin typeface="Times New Roman"/>
-                <a:ea typeface="Times New Roman"/>
-              </a:rPr>
-              <a:t>Three-phase: kW = (√3 × V × I × PF) / 1000</a:t>
-            </a:r>
-            <a:endParaRPr b="0" lang="en-US" sz="1800" spc="-1" strike="noStrike">
-              <a:solidFill>
-                <a:srgbClr val="000000"/>
-              </a:solidFill>
-              <a:latin typeface="Arial"/>
-            </a:endParaRPr>
-          </a:p>
-          <a:p>
-            <a:pPr indent="0">
-              <a:lnSpc>
-                <a:spcPct val="90000"/>
-              </a:lnSpc>
-              <a:spcBef>
-                <a:spcPts val="1001"/>
-              </a:spcBef>
-              <a:buNone/>
-            </a:pPr>
-            <a:endParaRPr b="0" lang="en-US" sz="1800" spc="-1" strike="noStrike">
-              <a:solidFill>
-                <a:srgbClr val="000000"/>
-              </a:solidFill>
-              <a:latin typeface="Arial"/>
-            </a:endParaRPr>
-          </a:p>
-          <a:p>
-            <a:pPr indent="0">
-              <a:lnSpc>
-                <a:spcPct val="90000"/>
-              </a:lnSpc>
-              <a:spcBef>
-                <a:spcPts val="1001"/>
-              </a:spcBef>
-              <a:buNone/>
-            </a:pPr>
-            <a:r>
-              <a:rPr b="0" lang="en-US" sz="1800" spc="-1" strike="noStrike">
-                <a:solidFill>
-                  <a:srgbClr val="000000"/>
-                </a:solidFill>
-                <a:latin typeface="Times New Roman"/>
-                <a:ea typeface="Times New Roman"/>
-              </a:rPr>
-              <a:t>Morocco's standard domestic supply is 220V AC single-phase; industrial connections are commonly 380V AC three-phase. Since the dataset separates domestic and industrial profiles, we will apply the matching formula per zone type, and we will state our assumed voltage per zone explicitly as a limitation in our report.</a:t>
-            </a:r>
-            <a:endParaRPr b="0" lang="en-US" sz="1800" spc="-1" strike="noStrike">
-              <a:solidFill>
-                <a:srgbClr val="000000"/>
-              </a:solidFill>
-              <a:latin typeface="Arial"/>
-            </a:endParaRPr>
-          </a:p>
-          <a:p>
-            <a:pPr indent="0">
-              <a:lnSpc>
-                <a:spcPct val="90000"/>
-              </a:lnSpc>
-              <a:spcBef>
-                <a:spcPts val="1001"/>
-              </a:spcBef>
-              <a:buNone/>
+              <a:tabLst>
+                <a:tab algn="l" pos="0"/>
+              </a:tabLst>
             </a:pPr>
             <a:r>
               <a:rPr b="0" lang="en-US" sz="1800" spc="-1" strike="noStrike">
@@ -7196,7 +7292,7 @@
             </a:endParaRPr>
           </a:p>
           <a:p>
-            <a:pPr indent="0">
+            <a:pPr marL="228600" indent="0">
               <a:lnSpc>
                 <a:spcPct val="90000"/>
               </a:lnSpc>
@@ -7260,7 +7356,7 @@
         <p:spPr>
           <a:xfrm>
             <a:off x="838080" y="365040"/>
-            <a:ext cx="10514520" cy="1324440"/>
+            <a:ext cx="10513800" cy="1323720"/>
           </a:xfrm>
           <a:prstGeom prst="rect">
             <a:avLst/>
@@ -7315,7 +7411,7 @@
         <p:spPr>
           <a:xfrm>
             <a:off x="838080" y="1825560"/>
-            <a:ext cx="10514520" cy="4350240"/>
+            <a:ext cx="10513800" cy="4349520"/>
           </a:xfrm>
           <a:prstGeom prst="rect">
             <a:avLst/>
@@ -7338,6 +7434,9 @@
                 <a:spcPts val="1001"/>
               </a:spcBef>
               <a:buNone/>
+              <a:tabLst>
+                <a:tab algn="l" pos="0"/>
+              </a:tabLst>
             </a:pPr>
             <a:r>
               <a:rPr b="0" lang="en-US" sz="1800" spc="-1" strike="noStrike">
@@ -7365,6 +7464,9 @@
                 <a:spcPts val="1001"/>
               </a:spcBef>
               <a:buNone/>
+              <a:tabLst>
+                <a:tab algn="l" pos="0"/>
+              </a:tabLst>
             </a:pPr>
             <a:endParaRPr b="0" lang="en-US" sz="1800" spc="-1" strike="noStrike">
               <a:solidFill>
@@ -7382,6 +7484,9 @@
                 <a:spcPts val="1001"/>
               </a:spcBef>
               <a:buNone/>
+              <a:tabLst>
+                <a:tab algn="l" pos="0"/>
+              </a:tabLst>
             </a:pPr>
             <a:r>
               <a:rPr b="0" lang="en-US" sz="1800" spc="-1" strike="noStrike">
@@ -7464,8 +7569,8 @@
         </p:nvSpPr>
         <p:spPr>
           <a:xfrm>
-            <a:off x="838080" y="365040"/>
-            <a:ext cx="10514520" cy="1324440"/>
+            <a:off x="1440" y="0"/>
+            <a:ext cx="10513800" cy="685440"/>
           </a:xfrm>
           <a:prstGeom prst="rect">
             <a:avLst/>
@@ -7519,8 +7624,8 @@
         </p:nvSpPr>
         <p:spPr>
           <a:xfrm>
-            <a:off x="838080" y="1825560"/>
-            <a:ext cx="10514520" cy="4350240"/>
+            <a:off x="0" y="679320"/>
+            <a:ext cx="5486040" cy="6178320"/>
           </a:xfrm>
           <a:prstGeom prst="rect">
             <a:avLst/>
@@ -7543,7 +7648,706 @@
                 <a:spcPts val="1001"/>
               </a:spcBef>
               <a:buNone/>
-            </a:pPr>
+              <a:tabLst>
+                <a:tab algn="l" pos="0"/>
+              </a:tabLst>
+            </a:pPr>
+            <a:r>
+              <a:rPr b="0" lang="en-US" sz="1600" spc="-1" strike="noStrike">
+                <a:solidFill>
+                  <a:srgbClr val="000000"/>
+                </a:solidFill>
+                <a:latin typeface="Arial"/>
+                <a:ea typeface="Times New Roman"/>
+              </a:rPr>
+              <a:t>Figure 1. Peak by hour distribution</a:t>
+            </a:r>
+            <a:endParaRPr b="0" lang="en-US" sz="1600" spc="-1" strike="noStrike">
+              <a:solidFill>
+                <a:srgbClr val="000000"/>
+              </a:solidFill>
+              <a:latin typeface="Arial"/>
+            </a:endParaRPr>
+          </a:p>
+          <a:p>
+            <a:pPr indent="0">
+              <a:lnSpc>
+                <a:spcPct val="90000"/>
+              </a:lnSpc>
+              <a:spcBef>
+                <a:spcPts val="1001"/>
+              </a:spcBef>
+              <a:buNone/>
+              <a:tabLst>
+                <a:tab algn="l" pos="0"/>
+              </a:tabLst>
+            </a:pPr>
+            <a:endParaRPr b="0" lang="en-US" sz="1600" spc="-1" strike="noStrike">
+              <a:solidFill>
+                <a:srgbClr val="000000"/>
+              </a:solidFill>
+              <a:latin typeface="Arial"/>
+            </a:endParaRPr>
+          </a:p>
+          <a:p>
+            <a:pPr indent="0">
+              <a:lnSpc>
+                <a:spcPct val="90000"/>
+              </a:lnSpc>
+              <a:spcBef>
+                <a:spcPts val="1001"/>
+              </a:spcBef>
+              <a:buNone/>
+              <a:tabLst>
+                <a:tab algn="l" pos="0"/>
+              </a:tabLst>
+            </a:pPr>
+            <a:endParaRPr b="0" lang="en-US" sz="1600" spc="-1" strike="noStrike">
+              <a:solidFill>
+                <a:srgbClr val="000000"/>
+              </a:solidFill>
+              <a:latin typeface="Arial"/>
+            </a:endParaRPr>
+          </a:p>
+          <a:p>
+            <a:pPr indent="0">
+              <a:lnSpc>
+                <a:spcPct val="90000"/>
+              </a:lnSpc>
+              <a:spcBef>
+                <a:spcPts val="1001"/>
+              </a:spcBef>
+              <a:buNone/>
+              <a:tabLst>
+                <a:tab algn="l" pos="0"/>
+              </a:tabLst>
+            </a:pPr>
+            <a:endParaRPr b="0" lang="en-US" sz="1600" spc="-1" strike="noStrike">
+              <a:solidFill>
+                <a:srgbClr val="000000"/>
+              </a:solidFill>
+              <a:latin typeface="Arial"/>
+            </a:endParaRPr>
+          </a:p>
+          <a:p>
+            <a:pPr indent="0">
+              <a:lnSpc>
+                <a:spcPct val="90000"/>
+              </a:lnSpc>
+              <a:spcBef>
+                <a:spcPts val="1001"/>
+              </a:spcBef>
+              <a:buNone/>
+              <a:tabLst>
+                <a:tab algn="l" pos="0"/>
+              </a:tabLst>
+            </a:pPr>
+            <a:endParaRPr b="0" lang="en-US" sz="1600" spc="-1" strike="noStrike">
+              <a:solidFill>
+                <a:srgbClr val="000000"/>
+              </a:solidFill>
+              <a:latin typeface="Arial"/>
+            </a:endParaRPr>
+          </a:p>
+          <a:p>
+            <a:pPr indent="0">
+              <a:lnSpc>
+                <a:spcPct val="90000"/>
+              </a:lnSpc>
+              <a:spcBef>
+                <a:spcPts val="1001"/>
+              </a:spcBef>
+              <a:buNone/>
+              <a:tabLst>
+                <a:tab algn="l" pos="0"/>
+              </a:tabLst>
+            </a:pPr>
+            <a:endParaRPr b="0" lang="en-US" sz="1600" spc="-1" strike="noStrike">
+              <a:solidFill>
+                <a:srgbClr val="000000"/>
+              </a:solidFill>
+              <a:latin typeface="Arial"/>
+            </a:endParaRPr>
+          </a:p>
+          <a:p>
+            <a:pPr indent="0">
+              <a:lnSpc>
+                <a:spcPct val="90000"/>
+              </a:lnSpc>
+              <a:spcBef>
+                <a:spcPts val="1001"/>
+              </a:spcBef>
+              <a:buNone/>
+              <a:tabLst>
+                <a:tab algn="l" pos="0"/>
+              </a:tabLst>
+            </a:pPr>
+            <a:endParaRPr b="0" lang="en-US" sz="1600" spc="-1" strike="noStrike">
+              <a:solidFill>
+                <a:srgbClr val="000000"/>
+              </a:solidFill>
+              <a:latin typeface="Arial"/>
+            </a:endParaRPr>
+          </a:p>
+          <a:p>
+            <a:pPr indent="0">
+              <a:lnSpc>
+                <a:spcPct val="90000"/>
+              </a:lnSpc>
+              <a:spcBef>
+                <a:spcPts val="1001"/>
+              </a:spcBef>
+              <a:buNone/>
+              <a:tabLst>
+                <a:tab algn="l" pos="0"/>
+              </a:tabLst>
+            </a:pPr>
+            <a:endParaRPr b="0" lang="en-US" sz="1600" spc="-1" strike="noStrike">
+              <a:solidFill>
+                <a:srgbClr val="000000"/>
+              </a:solidFill>
+              <a:latin typeface="Arial"/>
+            </a:endParaRPr>
+          </a:p>
+          <a:p>
+            <a:pPr indent="0">
+              <a:lnSpc>
+                <a:spcPct val="90000"/>
+              </a:lnSpc>
+              <a:spcBef>
+                <a:spcPts val="1001"/>
+              </a:spcBef>
+              <a:buNone/>
+              <a:tabLst>
+                <a:tab algn="l" pos="0"/>
+              </a:tabLst>
+            </a:pPr>
+            <a:endParaRPr b="0" lang="en-US" sz="1600" spc="-1" strike="noStrike">
+              <a:solidFill>
+                <a:srgbClr val="000000"/>
+              </a:solidFill>
+              <a:latin typeface="Arial"/>
+            </a:endParaRPr>
+          </a:p>
+          <a:p>
+            <a:pPr indent="0">
+              <a:lnSpc>
+                <a:spcPct val="90000"/>
+              </a:lnSpc>
+              <a:spcBef>
+                <a:spcPts val="1001"/>
+              </a:spcBef>
+              <a:buNone/>
+              <a:tabLst>
+                <a:tab algn="l" pos="0"/>
+              </a:tabLst>
+            </a:pPr>
+            <a:endParaRPr b="0" lang="en-US" sz="1600" spc="-1" strike="noStrike">
+              <a:solidFill>
+                <a:srgbClr val="000000"/>
+              </a:solidFill>
+              <a:latin typeface="Arial"/>
+            </a:endParaRPr>
+          </a:p>
+          <a:p>
+            <a:pPr indent="0">
+              <a:lnSpc>
+                <a:spcPct val="90000"/>
+              </a:lnSpc>
+              <a:spcBef>
+                <a:spcPts val="1001"/>
+              </a:spcBef>
+              <a:buNone/>
+              <a:tabLst>
+                <a:tab algn="l" pos="0"/>
+              </a:tabLst>
+            </a:pPr>
+            <a:r>
+              <a:rPr b="0" lang="en-US" sz="1600" spc="-1" strike="noStrike">
+                <a:solidFill>
+                  <a:srgbClr val="000000"/>
+                </a:solidFill>
+                <a:latin typeface="Arial"/>
+                <a:ea typeface="Times New Roman"/>
+              </a:rPr>
+              <a:t>Figure 2. Seasonal Peak Rate Heat Map</a:t>
+            </a:r>
+            <a:endParaRPr b="0" lang="en-US" sz="1600" spc="-1" strike="noStrike">
+              <a:solidFill>
+                <a:srgbClr val="000000"/>
+              </a:solidFill>
+              <a:latin typeface="Arial"/>
+            </a:endParaRPr>
+          </a:p>
+          <a:p>
+            <a:pPr indent="0">
+              <a:lnSpc>
+                <a:spcPct val="90000"/>
+              </a:lnSpc>
+              <a:spcBef>
+                <a:spcPts val="1001"/>
+              </a:spcBef>
+              <a:buNone/>
+              <a:tabLst>
+                <a:tab algn="l" pos="0"/>
+              </a:tabLst>
+            </a:pPr>
+            <a:endParaRPr b="0" lang="en-US" sz="1600" spc="-1" strike="noStrike">
+              <a:solidFill>
+                <a:srgbClr val="000000"/>
+              </a:solidFill>
+              <a:latin typeface="Arial"/>
+            </a:endParaRPr>
+          </a:p>
+        </p:txBody>
+      </p:sp>
+      <p:sp>
+        <p:nvSpPr>
+          <p:cNvPr id="96" name=""/>
+          <p:cNvSpPr/>
+          <p:nvPr/>
+        </p:nvSpPr>
+        <p:spPr>
+          <a:xfrm>
+            <a:off x="6755040" y="18720"/>
+            <a:ext cx="1016640" cy="345600"/>
+          </a:xfrm>
+          <a:prstGeom prst="rect">
+            <a:avLst/>
+          </a:prstGeom>
+          <a:noFill/>
+          <a:ln w="0">
+            <a:noFill/>
+          </a:ln>
+        </p:spPr>
+        <p:style>
+          <a:lnRef idx="0"/>
+          <a:fillRef idx="0"/>
+          <a:effectRef idx="0"/>
+          <a:fontRef idx="minor"/>
+        </p:style>
+        <p:txBody>
+          <a:bodyPr lIns="90000" rIns="90000" tIns="45000" bIns="45000" anchor="t">
+            <a:noAutofit/>
+          </a:bodyPr>
+          <a:p>
+            <a:pPr>
+              <a:lnSpc>
+                <a:spcPct val="100000"/>
+              </a:lnSpc>
+            </a:pPr>
+            <a:endParaRPr b="0" lang="en-US" sz="1800" spc="-1" strike="noStrike">
+              <a:solidFill>
+                <a:srgbClr val="000000"/>
+              </a:solidFill>
+              <a:latin typeface="Arial"/>
+              <a:ea typeface="DejaVu Sans"/>
+            </a:endParaRPr>
+          </a:p>
+        </p:txBody>
+      </p:sp>
+      <p:pic>
+        <p:nvPicPr>
+          <p:cNvPr id="97" name="" descr=""/>
+          <p:cNvPicPr/>
+          <p:nvPr/>
+        </p:nvPicPr>
+        <p:blipFill>
+          <a:blip r:embed="rId1"/>
+          <a:stretch/>
+        </p:blipFill>
+        <p:spPr>
+          <a:xfrm>
+            <a:off x="0" y="1060920"/>
+            <a:ext cx="5047560" cy="3053520"/>
+          </a:xfrm>
+          <a:prstGeom prst="rect">
+            <a:avLst/>
+          </a:prstGeom>
+          <a:ln w="0">
+            <a:noFill/>
+          </a:ln>
+        </p:spPr>
+      </p:pic>
+      <p:pic>
+        <p:nvPicPr>
+          <p:cNvPr id="98" name="" descr=""/>
+          <p:cNvPicPr/>
+          <p:nvPr/>
+        </p:nvPicPr>
+        <p:blipFill>
+          <a:blip r:embed="rId2"/>
+          <a:stretch/>
+        </p:blipFill>
+        <p:spPr>
+          <a:xfrm>
+            <a:off x="0" y="4572000"/>
+            <a:ext cx="5511240" cy="2177280"/>
+          </a:xfrm>
+          <a:prstGeom prst="rect">
+            <a:avLst/>
+          </a:prstGeom>
+          <a:ln w="0">
+            <a:noFill/>
+          </a:ln>
+        </p:spPr>
+      </p:pic>
+      <p:sp>
+        <p:nvSpPr>
+          <p:cNvPr id="99" name="PlaceHolder 7"/>
+          <p:cNvSpPr/>
+          <p:nvPr/>
+        </p:nvSpPr>
+        <p:spPr>
+          <a:xfrm>
+            <a:off x="5715000" y="679320"/>
+            <a:ext cx="5486040" cy="6178320"/>
+          </a:xfrm>
+          <a:prstGeom prst="rect">
+            <a:avLst/>
+          </a:prstGeom>
+          <a:noFill/>
+          <a:ln w="0">
+            <a:noFill/>
+          </a:ln>
+        </p:spPr>
+        <p:style>
+          <a:lnRef idx="0"/>
+          <a:fillRef idx="0"/>
+          <a:effectRef idx="0"/>
+          <a:fontRef idx="minor"/>
+        </p:style>
+        <p:txBody>
+          <a:bodyPr lIns="90000" rIns="90000" tIns="45000" bIns="45000" anchor="t">
+            <a:noAutofit/>
+          </a:bodyPr>
+          <a:p>
+            <a:pPr>
+              <a:lnSpc>
+                <a:spcPct val="90000"/>
+              </a:lnSpc>
+              <a:spcBef>
+                <a:spcPts val="1001"/>
+              </a:spcBef>
+              <a:tabLst>
+                <a:tab algn="l" pos="0"/>
+              </a:tabLst>
+            </a:pPr>
+            <a:r>
+              <a:rPr b="0" lang="en-US" sz="1600" spc="-1" strike="noStrike">
+                <a:solidFill>
+                  <a:srgbClr val="000000"/>
+                </a:solidFill>
+                <a:latin typeface="Arial"/>
+                <a:ea typeface="Times New Roman"/>
+              </a:rPr>
+              <a:t>Figure 3. Peak-Period Frequency by Hour, per Zone</a:t>
+            </a:r>
+            <a:endParaRPr b="0" lang="en-US" sz="1600" spc="-1" strike="noStrike">
+              <a:solidFill>
+                <a:srgbClr val="000000"/>
+              </a:solidFill>
+              <a:latin typeface="Arial"/>
+            </a:endParaRPr>
+          </a:p>
+          <a:p>
+            <a:pPr>
+              <a:lnSpc>
+                <a:spcPct val="90000"/>
+              </a:lnSpc>
+              <a:spcBef>
+                <a:spcPts val="1001"/>
+              </a:spcBef>
+              <a:tabLst>
+                <a:tab algn="l" pos="0"/>
+              </a:tabLst>
+            </a:pPr>
+            <a:endParaRPr b="0" lang="en-US" sz="1600" spc="-1" strike="noStrike">
+              <a:solidFill>
+                <a:srgbClr val="000000"/>
+              </a:solidFill>
+              <a:latin typeface="Arial"/>
+            </a:endParaRPr>
+          </a:p>
+          <a:p>
+            <a:pPr>
+              <a:lnSpc>
+                <a:spcPct val="90000"/>
+              </a:lnSpc>
+              <a:spcBef>
+                <a:spcPts val="1001"/>
+              </a:spcBef>
+              <a:tabLst>
+                <a:tab algn="l" pos="0"/>
+              </a:tabLst>
+            </a:pPr>
+            <a:endParaRPr b="0" lang="en-US" sz="1600" spc="-1" strike="noStrike">
+              <a:solidFill>
+                <a:srgbClr val="000000"/>
+              </a:solidFill>
+              <a:latin typeface="Arial"/>
+            </a:endParaRPr>
+          </a:p>
+          <a:p>
+            <a:pPr>
+              <a:lnSpc>
+                <a:spcPct val="90000"/>
+              </a:lnSpc>
+              <a:spcBef>
+                <a:spcPts val="1001"/>
+              </a:spcBef>
+              <a:tabLst>
+                <a:tab algn="l" pos="0"/>
+              </a:tabLst>
+            </a:pPr>
+            <a:endParaRPr b="0" lang="en-US" sz="1600" spc="-1" strike="noStrike">
+              <a:solidFill>
+                <a:srgbClr val="000000"/>
+              </a:solidFill>
+              <a:latin typeface="Arial"/>
+            </a:endParaRPr>
+          </a:p>
+          <a:p>
+            <a:pPr>
+              <a:lnSpc>
+                <a:spcPct val="90000"/>
+              </a:lnSpc>
+              <a:spcBef>
+                <a:spcPts val="1001"/>
+              </a:spcBef>
+              <a:tabLst>
+                <a:tab algn="l" pos="0"/>
+              </a:tabLst>
+            </a:pPr>
+            <a:endParaRPr b="0" lang="en-US" sz="1600" spc="-1" strike="noStrike">
+              <a:solidFill>
+                <a:srgbClr val="000000"/>
+              </a:solidFill>
+              <a:latin typeface="Arial"/>
+            </a:endParaRPr>
+          </a:p>
+          <a:p>
+            <a:pPr>
+              <a:lnSpc>
+                <a:spcPct val="90000"/>
+              </a:lnSpc>
+              <a:spcBef>
+                <a:spcPts val="1001"/>
+              </a:spcBef>
+              <a:tabLst>
+                <a:tab algn="l" pos="0"/>
+              </a:tabLst>
+            </a:pPr>
+            <a:endParaRPr b="0" lang="en-US" sz="1600" spc="-1" strike="noStrike">
+              <a:solidFill>
+                <a:srgbClr val="000000"/>
+              </a:solidFill>
+              <a:latin typeface="Arial"/>
+            </a:endParaRPr>
+          </a:p>
+          <a:p>
+            <a:pPr>
+              <a:lnSpc>
+                <a:spcPct val="90000"/>
+              </a:lnSpc>
+              <a:spcBef>
+                <a:spcPts val="1001"/>
+              </a:spcBef>
+              <a:tabLst>
+                <a:tab algn="l" pos="0"/>
+              </a:tabLst>
+            </a:pPr>
+            <a:endParaRPr b="0" lang="en-US" sz="1600" spc="-1" strike="noStrike">
+              <a:solidFill>
+                <a:srgbClr val="000000"/>
+              </a:solidFill>
+              <a:latin typeface="Arial"/>
+            </a:endParaRPr>
+          </a:p>
+          <a:p>
+            <a:pPr>
+              <a:lnSpc>
+                <a:spcPct val="90000"/>
+              </a:lnSpc>
+              <a:spcBef>
+                <a:spcPts val="1001"/>
+              </a:spcBef>
+              <a:tabLst>
+                <a:tab algn="l" pos="0"/>
+              </a:tabLst>
+            </a:pPr>
+            <a:endParaRPr b="0" lang="en-US" sz="1600" spc="-1" strike="noStrike">
+              <a:solidFill>
+                <a:srgbClr val="000000"/>
+              </a:solidFill>
+              <a:latin typeface="Arial"/>
+            </a:endParaRPr>
+          </a:p>
+          <a:p>
+            <a:pPr>
+              <a:lnSpc>
+                <a:spcPct val="90000"/>
+              </a:lnSpc>
+              <a:spcBef>
+                <a:spcPts val="1001"/>
+              </a:spcBef>
+              <a:tabLst>
+                <a:tab algn="l" pos="0"/>
+              </a:tabLst>
+            </a:pPr>
+            <a:endParaRPr b="0" lang="en-US" sz="1600" spc="-1" strike="noStrike">
+              <a:solidFill>
+                <a:srgbClr val="000000"/>
+              </a:solidFill>
+              <a:latin typeface="Arial"/>
+            </a:endParaRPr>
+          </a:p>
+          <a:p>
+            <a:pPr>
+              <a:lnSpc>
+                <a:spcPct val="90000"/>
+              </a:lnSpc>
+              <a:spcBef>
+                <a:spcPts val="1001"/>
+              </a:spcBef>
+              <a:tabLst>
+                <a:tab algn="l" pos="0"/>
+              </a:tabLst>
+            </a:pPr>
+            <a:endParaRPr b="0" lang="en-US" sz="1600" spc="-1" strike="noStrike">
+              <a:solidFill>
+                <a:srgbClr val="000000"/>
+              </a:solidFill>
+              <a:latin typeface="Arial"/>
+            </a:endParaRPr>
+          </a:p>
+          <a:p>
+            <a:pPr>
+              <a:lnSpc>
+                <a:spcPct val="90000"/>
+              </a:lnSpc>
+              <a:spcBef>
+                <a:spcPts val="1001"/>
+              </a:spcBef>
+              <a:tabLst>
+                <a:tab algn="l" pos="0"/>
+              </a:tabLst>
+            </a:pPr>
+            <a:endParaRPr b="0" lang="en-US" sz="1600" spc="-1" strike="noStrike">
+              <a:solidFill>
+                <a:srgbClr val="000000"/>
+              </a:solidFill>
+              <a:latin typeface="Arial"/>
+            </a:endParaRPr>
+          </a:p>
+          <a:p>
+            <a:pPr>
+              <a:lnSpc>
+                <a:spcPct val="90000"/>
+              </a:lnSpc>
+              <a:spcBef>
+                <a:spcPts val="1001"/>
+              </a:spcBef>
+              <a:tabLst>
+                <a:tab algn="l" pos="0"/>
+              </a:tabLst>
+            </a:pPr>
+            <a:endParaRPr b="0" lang="en-US" sz="1600" spc="-1" strike="noStrike">
+              <a:solidFill>
+                <a:srgbClr val="000000"/>
+              </a:solidFill>
+              <a:latin typeface="Arial"/>
+            </a:endParaRPr>
+          </a:p>
+          <a:p>
+            <a:pPr>
+              <a:lnSpc>
+                <a:spcPct val="90000"/>
+              </a:lnSpc>
+              <a:spcBef>
+                <a:spcPts val="1001"/>
+              </a:spcBef>
+              <a:tabLst>
+                <a:tab algn="l" pos="0"/>
+              </a:tabLst>
+            </a:pPr>
+            <a:endParaRPr b="0" lang="en-US" sz="1600" spc="-1" strike="noStrike">
+              <a:solidFill>
+                <a:srgbClr val="000000"/>
+              </a:solidFill>
+              <a:latin typeface="Arial"/>
+            </a:endParaRPr>
+          </a:p>
+        </p:txBody>
+      </p:sp>
+      <p:pic>
+        <p:nvPicPr>
+          <p:cNvPr id="100" name="" descr=""/>
+          <p:cNvPicPr/>
+          <p:nvPr/>
+        </p:nvPicPr>
+        <p:blipFill>
+          <a:blip r:embed="rId3"/>
+          <a:stretch/>
+        </p:blipFill>
+        <p:spPr>
+          <a:xfrm>
+            <a:off x="5613840" y="1118160"/>
+            <a:ext cx="5130000" cy="2767680"/>
+          </a:xfrm>
+          <a:prstGeom prst="rect">
+            <a:avLst/>
+          </a:prstGeom>
+          <a:ln w="0">
+            <a:noFill/>
+          </a:ln>
+        </p:spPr>
+      </p:pic>
+      <p:sp>
+        <p:nvSpPr>
+          <p:cNvPr id="101" name=""/>
+          <p:cNvSpPr txBox="1"/>
+          <p:nvPr/>
+        </p:nvSpPr>
+        <p:spPr>
+          <a:xfrm>
+            <a:off x="5257800" y="3886200"/>
+            <a:ext cx="6934320" cy="2847240"/>
+          </a:xfrm>
+          <a:prstGeom prst="rect">
+            <a:avLst/>
+          </a:prstGeom>
+          <a:noFill/>
+          <a:ln w="0">
+            <a:noFill/>
+          </a:ln>
+        </p:spPr>
+        <p:txBody>
+          <a:bodyPr lIns="90000" rIns="90000" tIns="45000" bIns="45000" anchor="t">
+            <a:noAutofit/>
+          </a:bodyPr>
+          <a:p>
+            <a:pPr>
+              <a:lnSpc>
+                <a:spcPct val="90000"/>
+              </a:lnSpc>
+              <a:spcBef>
+                <a:spcPts val="1001"/>
+              </a:spcBef>
+              <a:tabLst>
+                <a:tab algn="l" pos="0"/>
+              </a:tabLst>
+            </a:pPr>
+            <a:r>
+              <a:rPr b="1" lang="en-US" sz="1800" spc="-1" strike="noStrike">
+                <a:solidFill>
+                  <a:srgbClr val="000000"/>
+                </a:solidFill>
+                <a:latin typeface="Times New Roman"/>
+                <a:ea typeface="Times New Roman"/>
+              </a:rPr>
+              <a:t>Figure 1:</a:t>
+            </a:r>
             <a:r>
               <a:rPr b="0" lang="en-US" sz="1800" spc="-1" strike="noStrike">
                 <a:solidFill>
@@ -7552,7 +8356,7 @@
                 <a:latin typeface="Times New Roman"/>
                 <a:ea typeface="Times New Roman"/>
               </a:rPr>
-              <a:t>Marrakech's totals are far higher than the other three cities, but this likely reflects the fact the population of the cities are so vastly different. (See Figure 1)</a:t>
+              <a:t> Laâyoune and Boujdour peak in the evening (6–11 PM), consistent with residential usage; Marrakech peaks during business hours (8 AM–6 PM) with near-zero activity from 11 PM–6 AM, consistent with commercial/institutional load rather than residential</a:t>
             </a:r>
             <a:endParaRPr b="0" lang="en-US" sz="1800" spc="-1" strike="noStrike">
               <a:solidFill>
@@ -7562,14 +8366,16 @@
             </a:endParaRPr>
           </a:p>
           <a:p>
-            <a:pPr indent="0">
+            <a:pPr>
               <a:lnSpc>
                 <a:spcPct val="90000"/>
               </a:lnSpc>
               <a:spcBef>
                 <a:spcPts val="1001"/>
               </a:spcBef>
-              <a:buNone/>
+              <a:tabLst>
+                <a:tab algn="l" pos="0"/>
+              </a:tabLst>
             </a:pPr>
             <a:r>
               <a:rPr b="0" lang="en-US" sz="1800" spc="-1" strike="noStrike">
@@ -7579,7 +8385,7 @@
                 <a:latin typeface="Times New Roman"/>
                 <a:ea typeface="Times New Roman"/>
               </a:rPr>
-              <a:t>Laâyoune and Boujdour peak in the evening (6–11 PM), consistent with residential usage; Marrakech peaks during business hours (8 AM–6 PM) with near-zero activity from 11 PM–6 AM, consistent with commercial/institutional load rather than residential</a:t>
+              <a:t>Marrakech is a daytime bell curve peaking around 2-3 PM, with almost nothing from 10 PM to 6 AM. That fits office or commercial load, and probably afternoon cooling.</a:t>
             </a:r>
             <a:endParaRPr b="0" lang="en-US" sz="1800" spc="-1" strike="noStrike">
               <a:solidFill>
@@ -7589,15 +8395,27 @@
             </a:endParaRPr>
           </a:p>
           <a:p>
-            <a:pPr indent="0">
+            <a:pPr>
               <a:lnSpc>
                 <a:spcPct val="90000"/>
               </a:lnSpc>
               <a:spcBef>
                 <a:spcPts val="1001"/>
               </a:spcBef>
-              <a:buNone/>
-            </a:pPr>
+              <a:tabLst>
+                <a:tab algn="l" pos="0"/>
+              </a:tabLst>
+            </a:pPr>
+            <a:r>
+              <a:rPr b="1" lang="en-US" sz="1800" spc="-1" strike="noStrike">
+                <a:solidFill>
+                  <a:srgbClr val="000000"/>
+                </a:solidFill>
+                <a:latin typeface="Times New Roman"/>
+                <a:ea typeface="Times New Roman"/>
+              </a:rPr>
+              <a:t>Figure 2: </a:t>
+            </a:r>
             <a:r>
               <a:rPr b="0" lang="en-US" sz="1800" spc="-1" strike="noStrike">
                 <a:solidFill>
@@ -7606,146 +8424,7 @@
                 <a:latin typeface="Times New Roman"/>
                 <a:ea typeface="Times New Roman"/>
               </a:rPr>
-              <a:t>Foum Eloued's zone 6 spikes to a 45.9% peak rate in summer (vs. ~2% the rest of the year); Marrakech's zone 1 also peaks in summer (25.8%), both plausibly cooling-driven, while most Laâyoune and other Foum Eloued zones instead peak in fall</a:t>
-            </a:r>
-            <a:endParaRPr b="0" lang="en-US" sz="1800" spc="-1" strike="noStrike">
-              <a:solidFill>
-                <a:srgbClr val="000000"/>
-              </a:solidFill>
-              <a:latin typeface="Arial"/>
-            </a:endParaRPr>
-          </a:p>
-          <a:p>
-            <a:pPr indent="0">
-              <a:lnSpc>
-                <a:spcPct val="90000"/>
-              </a:lnSpc>
-              <a:spcBef>
-                <a:spcPts val="1001"/>
-              </a:spcBef>
-              <a:buNone/>
-            </a:pPr>
-            <a:r>
-              <a:rPr b="0" lang="en-US" sz="1800" spc="-1" strike="noStrike">
-                <a:solidFill>
-                  <a:srgbClr val="000000"/>
-                </a:solidFill>
-                <a:latin typeface="Times New Roman"/>
-                <a:ea typeface="Times New Roman"/>
-              </a:rPr>
-              <a:t>Laâyoune's zones 2–5 correlate at 0.71–0.88 with each other, and Foum Eloued's zones 1–4 similarly cluster (0.72–0.86), while cross-city correlations stay mostly under 0.3, this supports the idea that each region behaves independently</a:t>
-            </a:r>
-            <a:endParaRPr b="0" lang="en-US" sz="1800" spc="-1" strike="noStrike">
-              <a:solidFill>
-                <a:srgbClr val="000000"/>
-              </a:solidFill>
-              <a:latin typeface="Arial"/>
-            </a:endParaRPr>
-          </a:p>
-          <a:p>
-            <a:pPr indent="0">
-              <a:lnSpc>
-                <a:spcPct val="90000"/>
-              </a:lnSpc>
-              <a:spcBef>
-                <a:spcPts val="1001"/>
-              </a:spcBef>
-              <a:buNone/>
-            </a:pPr>
-            <a:r>
-              <a:rPr b="0" lang="en-US" sz="1800" spc="-1" strike="noStrike">
-                <a:solidFill>
-                  <a:srgbClr val="000000"/>
-                </a:solidFill>
-                <a:latin typeface="Times New Roman"/>
-                <a:ea typeface="Times New Roman"/>
-              </a:rPr>
-              <a:t>Peak timing and seasonal patterns clearly vary by region, supporting the hypothesis statement; direct intensity comparisons across cities remain confounded by unit/aggregation differences and are noted as a limitation for future work</a:t>
-            </a:r>
-            <a:endParaRPr b="0" lang="en-US" sz="1800" spc="-1" strike="noStrike">
-              <a:solidFill>
-                <a:srgbClr val="000000"/>
-              </a:solidFill>
-              <a:latin typeface="Arial"/>
-            </a:endParaRPr>
-          </a:p>
-          <a:p>
-            <a:pPr indent="0">
-              <a:lnSpc>
-                <a:spcPct val="90000"/>
-              </a:lnSpc>
-              <a:spcBef>
-                <a:spcPts val="1001"/>
-              </a:spcBef>
-              <a:buNone/>
-              <a:tabLst>
-                <a:tab algn="l" pos="0"/>
-              </a:tabLst>
-            </a:pPr>
-            <a:endParaRPr b="0" lang="en-US" sz="2800" spc="-1" strike="noStrike">
-              <a:solidFill>
-                <a:srgbClr val="000000"/>
-              </a:solidFill>
-              <a:latin typeface="Arial"/>
-            </a:endParaRPr>
-          </a:p>
-        </p:txBody>
-      </p:sp>
-      <p:pic>
-        <p:nvPicPr>
-          <p:cNvPr id="96" name="" descr=""/>
-          <p:cNvPicPr/>
-          <p:nvPr/>
-        </p:nvPicPr>
-        <p:blipFill>
-          <a:blip r:embed="rId1"/>
-          <a:stretch/>
-        </p:blipFill>
-        <p:spPr>
-          <a:xfrm>
-            <a:off x="7652160" y="0"/>
-            <a:ext cx="4539960" cy="1510920"/>
-          </a:xfrm>
-          <a:prstGeom prst="rect">
-            <a:avLst/>
-          </a:prstGeom>
-          <a:ln w="0">
-            <a:noFill/>
-          </a:ln>
-        </p:spPr>
-      </p:pic>
-      <p:sp>
-        <p:nvSpPr>
-          <p:cNvPr id="97" name=""/>
-          <p:cNvSpPr txBox="1"/>
-          <p:nvPr/>
-        </p:nvSpPr>
-        <p:spPr>
-          <a:xfrm>
-            <a:off x="6755040" y="18720"/>
-            <a:ext cx="1017360" cy="346320"/>
-          </a:xfrm>
-          <a:prstGeom prst="rect">
-            <a:avLst/>
-          </a:prstGeom>
-          <a:noFill/>
-          <a:ln w="0">
-            <a:noFill/>
-          </a:ln>
-        </p:spPr>
-        <p:txBody>
-          <a:bodyPr lIns="90000" rIns="90000" tIns="45000" bIns="45000" anchor="t">
-            <a:noAutofit/>
-          </a:bodyPr>
-          <a:p>
-            <a:r>
-              <a:rPr b="0" i="1" lang="en-US" sz="1800" spc="-1" strike="noStrike">
-                <a:solidFill>
-                  <a:srgbClr val="000000"/>
-                </a:solidFill>
-                <a:latin typeface="Arial"/>
-              </a:rPr>
-              <a:t>Figure 1</a:t>
+              <a:t>Laâyoune's zones 2–5 correlate at 0.71–0.88 with each other, and Foum Eloued's zones 1–4 similarly cluster (0.72–0.86), while cross-city correlations stay mostly under 0.3, this supports the idea that each region behaves independently.</a:t>
             </a:r>
             <a:endParaRPr b="0" lang="en-US" sz="1800" spc="-1" strike="noStrike">
               <a:solidFill>
@@ -7788,7 +8467,7 @@
       </p:grpSpPr>
       <p:sp>
         <p:nvSpPr>
-          <p:cNvPr id="98" name="PlaceHolder 1"/>
+          <p:cNvPr id="102" name="PlaceHolder 1"/>
           <p:cNvSpPr>
             <a:spLocks noGrp="1"/>
           </p:cNvSpPr>
@@ -7799,7 +8478,7 @@
         <p:spPr>
           <a:xfrm>
             <a:off x="838080" y="365040"/>
-            <a:ext cx="10514520" cy="1324440"/>
+            <a:ext cx="10513800" cy="1323720"/>
           </a:xfrm>
           <a:prstGeom prst="rect">
             <a:avLst/>
@@ -7830,7 +8509,7 @@
                 </a:solidFill>
                 <a:latin typeface="Calibri Light"/>
               </a:rPr>
-              <a:t>Act</a:t>
+              <a:t>Report</a:t>
             </a:r>
             <a:endParaRPr b="0" lang="en-US" sz="4400" spc="-1" strike="noStrike">
               <a:solidFill>
@@ -7843,7 +8522,7 @@
       </p:sp>
       <p:sp>
         <p:nvSpPr>
-          <p:cNvPr id="99" name="PlaceHolder 2"/>
+          <p:cNvPr id="103" name="PlaceHolder 2"/>
           <p:cNvSpPr>
             <a:spLocks noGrp="1"/>
           </p:cNvSpPr>
@@ -7854,7 +8533,7 @@
         <p:spPr>
           <a:xfrm>
             <a:off x="838080" y="1825560"/>
-            <a:ext cx="10514520" cy="4350240"/>
+            <a:ext cx="10513800" cy="4349520"/>
           </a:xfrm>
           <a:prstGeom prst="rect">
             <a:avLst/>
@@ -7877,6 +8556,9 @@
                 <a:spcPts val="1001"/>
               </a:spcBef>
               <a:buNone/>
+              <a:tabLst>
+                <a:tab algn="l" pos="0"/>
+              </a:tabLst>
             </a:pPr>
             <a:r>
               <a:rPr b="0" lang="en-US" sz="1800" spc="-1" strike="noStrike">
@@ -7886,7 +8568,7 @@
                 <a:latin typeface="Times New Roman"/>
                 <a:ea typeface="Times New Roman"/>
               </a:rPr>
-              <a:t>Micro-Project 3 will apply linear regression as a baseline model and Support Vector Regression (SVM) regression to predict continuous load values from time-based features (hour, season, zone). I may also apply an autoregressive integrated moving average (ARIMA) as that is also a popular choice for analyzing and forecasting time series data to compare to the SVM regression. Micro-Project 4 will apply RNN-based deep learning to model the sequential/time-series structure directly</a:t>
+              <a:t>Marrakech's totals are far higher than the other three cities, but this likely reflects the fact the population of the cities are so vastly different. (See Figure 4)</a:t>
             </a:r>
             <a:endParaRPr b="0" lang="en-US" sz="1800" spc="-1" strike="noStrike">
               <a:solidFill>
@@ -7895,8 +8577,642 @@
               <a:latin typeface="Arial"/>
             </a:endParaRPr>
           </a:p>
-        </p:txBody>
-      </p:sp>
+          <a:p>
+            <a:pPr indent="0">
+              <a:lnSpc>
+                <a:spcPct val="90000"/>
+              </a:lnSpc>
+              <a:spcBef>
+                <a:spcPts val="1001"/>
+              </a:spcBef>
+              <a:buNone/>
+              <a:tabLst>
+                <a:tab algn="l" pos="0"/>
+              </a:tabLst>
+            </a:pPr>
+            <a:endParaRPr b="0" lang="en-US" sz="1800" spc="-1" strike="noStrike">
+              <a:solidFill>
+                <a:srgbClr val="000000"/>
+              </a:solidFill>
+              <a:latin typeface="Arial"/>
+            </a:endParaRPr>
+          </a:p>
+          <a:p>
+            <a:pPr indent="0">
+              <a:lnSpc>
+                <a:spcPct val="90000"/>
+              </a:lnSpc>
+              <a:spcBef>
+                <a:spcPts val="1001"/>
+              </a:spcBef>
+              <a:buNone/>
+              <a:tabLst>
+                <a:tab algn="l" pos="0"/>
+              </a:tabLst>
+            </a:pPr>
+            <a:r>
+              <a:rPr b="0" lang="en-US" sz="1800" spc="-1" strike="noStrike">
+                <a:solidFill>
+                  <a:srgbClr val="000000"/>
+                </a:solidFill>
+                <a:latin typeface="Times New Roman"/>
+                <a:ea typeface="Times New Roman"/>
+              </a:rPr>
+              <a:t>Foum Eloued's zone 6 spikes to a 45.9% peak rate in summer (vs. ~2% the rest of the year); Marrakech's zone 1 also peaks in summer (25.8%), both plausibly cooling-driven, while most Laâyoune and other Foum Eloued zones instead peak in fall</a:t>
+            </a:r>
+            <a:endParaRPr b="0" lang="en-US" sz="1800" spc="-1" strike="noStrike">
+              <a:solidFill>
+                <a:srgbClr val="000000"/>
+              </a:solidFill>
+              <a:latin typeface="Arial"/>
+            </a:endParaRPr>
+          </a:p>
+          <a:p>
+            <a:pPr indent="0">
+              <a:lnSpc>
+                <a:spcPct val="90000"/>
+              </a:lnSpc>
+              <a:spcBef>
+                <a:spcPts val="1001"/>
+              </a:spcBef>
+              <a:buNone/>
+              <a:tabLst>
+                <a:tab algn="l" pos="0"/>
+              </a:tabLst>
+            </a:pPr>
+            <a:endParaRPr b="0" lang="en-US" sz="1800" spc="-1" strike="noStrike">
+              <a:solidFill>
+                <a:srgbClr val="000000"/>
+              </a:solidFill>
+              <a:latin typeface="Arial"/>
+            </a:endParaRPr>
+          </a:p>
+          <a:p>
+            <a:pPr indent="0">
+              <a:lnSpc>
+                <a:spcPct val="90000"/>
+              </a:lnSpc>
+              <a:spcBef>
+                <a:spcPts val="1001"/>
+              </a:spcBef>
+              <a:buNone/>
+              <a:tabLst>
+                <a:tab algn="l" pos="0"/>
+              </a:tabLst>
+            </a:pPr>
+            <a:r>
+              <a:rPr b="0" lang="en-US" sz="1800" spc="-1" strike="noStrike">
+                <a:solidFill>
+                  <a:srgbClr val="000000"/>
+                </a:solidFill>
+                <a:latin typeface="Times New Roman"/>
+                <a:ea typeface="Times New Roman"/>
+              </a:rPr>
+              <a:t>Peak timing and seasonal patterns clearly vary by region, supporting the hypothesis statement; direct intensity comparisons across cities remain confounded by unit/aggregation differences and are noted as a limitation for future work</a:t>
+            </a:r>
+            <a:endParaRPr b="0" lang="en-US" sz="1800" spc="-1" strike="noStrike">
+              <a:solidFill>
+                <a:srgbClr val="000000"/>
+              </a:solidFill>
+              <a:latin typeface="Arial"/>
+            </a:endParaRPr>
+          </a:p>
+          <a:p>
+            <a:pPr indent="0">
+              <a:lnSpc>
+                <a:spcPct val="90000"/>
+              </a:lnSpc>
+              <a:spcBef>
+                <a:spcPts val="1001"/>
+              </a:spcBef>
+              <a:buNone/>
+              <a:tabLst>
+                <a:tab algn="l" pos="0"/>
+              </a:tabLst>
+            </a:pPr>
+            <a:endParaRPr b="0" lang="en-US" sz="2800" spc="-1" strike="noStrike">
+              <a:solidFill>
+                <a:srgbClr val="000000"/>
+              </a:solidFill>
+              <a:latin typeface="Arial"/>
+            </a:endParaRPr>
+          </a:p>
+        </p:txBody>
+      </p:sp>
+      <p:pic>
+        <p:nvPicPr>
+          <p:cNvPr id="104" name="" descr=""/>
+          <p:cNvPicPr/>
+          <p:nvPr/>
+        </p:nvPicPr>
+        <p:blipFill>
+          <a:blip r:embed="rId1"/>
+          <a:stretch/>
+        </p:blipFill>
+        <p:spPr>
+          <a:xfrm>
+            <a:off x="7652160" y="0"/>
+            <a:ext cx="4539240" cy="1510200"/>
+          </a:xfrm>
+          <a:prstGeom prst="rect">
+            <a:avLst/>
+          </a:prstGeom>
+          <a:ln w="0">
+            <a:noFill/>
+          </a:ln>
+        </p:spPr>
+      </p:pic>
+      <p:sp>
+        <p:nvSpPr>
+          <p:cNvPr id="105" name=""/>
+          <p:cNvSpPr/>
+          <p:nvPr/>
+        </p:nvSpPr>
+        <p:spPr>
+          <a:xfrm>
+            <a:off x="6629400" y="18720"/>
+            <a:ext cx="1142280" cy="345600"/>
+          </a:xfrm>
+          <a:prstGeom prst="rect">
+            <a:avLst/>
+          </a:prstGeom>
+          <a:noFill/>
+          <a:ln w="0">
+            <a:noFill/>
+          </a:ln>
+        </p:spPr>
+        <p:style>
+          <a:lnRef idx="0"/>
+          <a:fillRef idx="0"/>
+          <a:effectRef idx="0"/>
+          <a:fontRef idx="minor"/>
+        </p:style>
+        <p:txBody>
+          <a:bodyPr lIns="90000" rIns="90000" tIns="45000" bIns="45000" anchor="t">
+            <a:noAutofit/>
+          </a:bodyPr>
+          <a:p>
+            <a:pPr>
+              <a:lnSpc>
+                <a:spcPct val="100000"/>
+              </a:lnSpc>
+            </a:pPr>
+            <a:r>
+              <a:rPr b="0" i="1" lang="en-US" sz="1800" spc="-1" strike="noStrike">
+                <a:solidFill>
+                  <a:srgbClr val="000000"/>
+                </a:solidFill>
+                <a:latin typeface="Arial"/>
+                <a:ea typeface="DejaVu Sans"/>
+              </a:rPr>
+              <a:t>Figure 4.</a:t>
+            </a:r>
+            <a:endParaRPr b="0" lang="en-US" sz="1800" spc="-1" strike="noStrike">
+              <a:solidFill>
+                <a:srgbClr val="000000"/>
+              </a:solidFill>
+              <a:latin typeface="Arial"/>
+            </a:endParaRPr>
+          </a:p>
+        </p:txBody>
+      </p:sp>
+    </p:spTree>
+  </p:cSld>
+  <mc:AlternateContent>
+    <mc:Choice Requires="p14">
+      <p:transition spd="slow" p14:dur="2000"/>
+    </mc:Choice>
+    <mc:Fallback>
+      <p:transition spd="slow"/>
+    </mc:Fallback>
+  </mc:AlternateContent>
+</p:sld>
+</file>
+
+<file path=ppt/slides/slide9.xml><?xml version="1.0" encoding="utf-8"?>
+<p:sld xmlns:a="http://schemas.openxmlformats.org/drawingml/2006/main" xmlns:p="http://schemas.openxmlformats.org/presentationml/2006/main" xmlns:r="http://schemas.openxmlformats.org/officeDocument/2006/relationships" xmlns:p14="http://schemas.microsoft.com/office/powerpoint/2010/main" xmlns:p15="http://schemas.microsoft.com/office/powerpoint/2012/main" xmlns:mc="http://schemas.openxmlformats.org/markup-compatibility/2006">
+  <p:cSld>
+    <p:spTree>
+      <p:nvGrpSpPr>
+        <p:cNvPr id="1" name=""/>
+        <p:cNvGrpSpPr/>
+        <p:nvPr/>
+      </p:nvGrpSpPr>
+      <p:grpSpPr>
+        <a:xfrm>
+          <a:off x="0" y="0"/>
+          <a:ext cx="0" cy="0"/>
+          <a:chOff x="0" y="0"/>
+          <a:chExt cx="0" cy="0"/>
+        </a:xfrm>
+      </p:grpSpPr>
+      <p:sp>
+        <p:nvSpPr>
+          <p:cNvPr id="106" name="PlaceHolder 1"/>
+          <p:cNvSpPr>
+            <a:spLocks noGrp="1"/>
+          </p:cNvSpPr>
+          <p:nvPr>
+            <p:ph type="title"/>
+          </p:nvPr>
+        </p:nvSpPr>
+        <p:spPr>
+          <a:xfrm>
+            <a:off x="0" y="0"/>
+            <a:ext cx="10513800" cy="685440"/>
+          </a:xfrm>
+          <a:prstGeom prst="rect">
+            <a:avLst/>
+          </a:prstGeom>
+          <a:noFill/>
+          <a:ln w="0">
+            <a:noFill/>
+          </a:ln>
+        </p:spPr>
+        <p:txBody>
+          <a:bodyPr lIns="90000" rIns="90000" tIns="45000" bIns="45000" anchor="ctr">
+            <a:noAutofit/>
+          </a:bodyPr>
+          <a:p>
+            <a:pPr indent="0">
+              <a:lnSpc>
+                <a:spcPct val="90000"/>
+              </a:lnSpc>
+              <a:buNone/>
+              <a:tabLst>
+                <a:tab algn="l" pos="0"/>
+              </a:tabLst>
+            </a:pPr>
+            <a:r>
+              <a:rPr b="0" lang="en-US" sz="4400" spc="-1" strike="noStrike">
+                <a:solidFill>
+                  <a:srgbClr val="000000"/>
+                </a:solidFill>
+                <a:latin typeface="Calibri Light"/>
+              </a:rPr>
+              <a:t>Act I – Regression and SVM</a:t>
+            </a:r>
+            <a:endParaRPr b="0" lang="en-US" sz="4400" spc="-1" strike="noStrike">
+              <a:solidFill>
+                <a:srgbClr val="000000"/>
+              </a:solidFill>
+              <a:latin typeface="Arial"/>
+            </a:endParaRPr>
+          </a:p>
+        </p:txBody>
+      </p:sp>
+      <p:sp>
+        <p:nvSpPr>
+          <p:cNvPr id="107" name="PlaceHolder 2"/>
+          <p:cNvSpPr>
+            <a:spLocks noGrp="1"/>
+          </p:cNvSpPr>
+          <p:nvPr>
+            <p:ph/>
+          </p:nvPr>
+        </p:nvSpPr>
+        <p:spPr>
+          <a:xfrm>
+            <a:off x="0" y="679320"/>
+            <a:ext cx="12191760" cy="6178320"/>
+          </a:xfrm>
+          <a:prstGeom prst="rect">
+            <a:avLst/>
+          </a:prstGeom>
+          <a:noFill/>
+          <a:ln w="0">
+            <a:noFill/>
+          </a:ln>
+        </p:spPr>
+        <p:txBody>
+          <a:bodyPr lIns="90000" rIns="90000" tIns="45000" bIns="45000" anchor="t">
+            <a:noAutofit/>
+          </a:bodyPr>
+          <a:p>
+            <a:pPr indent="0">
+              <a:lnSpc>
+                <a:spcPct val="90000"/>
+              </a:lnSpc>
+              <a:spcBef>
+                <a:spcPts val="1001"/>
+              </a:spcBef>
+              <a:buNone/>
+              <a:tabLst>
+                <a:tab algn="l" pos="0"/>
+              </a:tabLst>
+            </a:pPr>
+            <a:endParaRPr b="0" lang="en-US" sz="1800" spc="-1" strike="noStrike">
+              <a:solidFill>
+                <a:srgbClr val="000000"/>
+              </a:solidFill>
+              <a:latin typeface="Arial"/>
+            </a:endParaRPr>
+          </a:p>
+          <a:p>
+            <a:pPr indent="0">
+              <a:lnSpc>
+                <a:spcPct val="90000"/>
+              </a:lnSpc>
+              <a:spcBef>
+                <a:spcPts val="1001"/>
+              </a:spcBef>
+              <a:buNone/>
+              <a:tabLst>
+                <a:tab algn="l" pos="0"/>
+              </a:tabLst>
+            </a:pPr>
+            <a:endParaRPr b="0" lang="en-US" sz="1800" spc="-1" strike="noStrike">
+              <a:solidFill>
+                <a:srgbClr val="000000"/>
+              </a:solidFill>
+              <a:latin typeface="Arial"/>
+            </a:endParaRPr>
+          </a:p>
+          <a:p>
+            <a:pPr indent="0">
+              <a:lnSpc>
+                <a:spcPct val="90000"/>
+              </a:lnSpc>
+              <a:spcBef>
+                <a:spcPts val="1001"/>
+              </a:spcBef>
+              <a:buNone/>
+              <a:tabLst>
+                <a:tab algn="l" pos="0"/>
+              </a:tabLst>
+            </a:pPr>
+            <a:endParaRPr b="0" lang="en-US" sz="1800" spc="-1" strike="noStrike">
+              <a:solidFill>
+                <a:srgbClr val="000000"/>
+              </a:solidFill>
+              <a:latin typeface="Arial"/>
+            </a:endParaRPr>
+          </a:p>
+          <a:p>
+            <a:pPr indent="0">
+              <a:lnSpc>
+                <a:spcPct val="90000"/>
+              </a:lnSpc>
+              <a:spcBef>
+                <a:spcPts val="1001"/>
+              </a:spcBef>
+              <a:buNone/>
+              <a:tabLst>
+                <a:tab algn="l" pos="0"/>
+              </a:tabLst>
+            </a:pPr>
+            <a:endParaRPr b="0" lang="en-US" sz="1800" spc="-1" strike="noStrike">
+              <a:solidFill>
+                <a:srgbClr val="000000"/>
+              </a:solidFill>
+              <a:latin typeface="Arial"/>
+            </a:endParaRPr>
+          </a:p>
+          <a:p>
+            <a:pPr indent="0">
+              <a:lnSpc>
+                <a:spcPct val="90000"/>
+              </a:lnSpc>
+              <a:spcBef>
+                <a:spcPts val="1001"/>
+              </a:spcBef>
+              <a:buNone/>
+              <a:tabLst>
+                <a:tab algn="l" pos="0"/>
+              </a:tabLst>
+            </a:pPr>
+            <a:endParaRPr b="0" lang="en-US" sz="1800" spc="-1" strike="noStrike">
+              <a:solidFill>
+                <a:srgbClr val="000000"/>
+              </a:solidFill>
+              <a:latin typeface="Arial"/>
+            </a:endParaRPr>
+          </a:p>
+          <a:p>
+            <a:pPr indent="0">
+              <a:lnSpc>
+                <a:spcPct val="90000"/>
+              </a:lnSpc>
+              <a:spcBef>
+                <a:spcPts val="1001"/>
+              </a:spcBef>
+              <a:buNone/>
+              <a:tabLst>
+                <a:tab algn="l" pos="0"/>
+              </a:tabLst>
+            </a:pPr>
+            <a:endParaRPr b="0" lang="en-US" sz="1800" spc="-1" strike="noStrike">
+              <a:solidFill>
+                <a:srgbClr val="000000"/>
+              </a:solidFill>
+              <a:latin typeface="Arial"/>
+            </a:endParaRPr>
+          </a:p>
+          <a:p>
+            <a:pPr indent="0">
+              <a:lnSpc>
+                <a:spcPct val="90000"/>
+              </a:lnSpc>
+              <a:spcBef>
+                <a:spcPts val="1001"/>
+              </a:spcBef>
+              <a:buNone/>
+              <a:tabLst>
+                <a:tab algn="l" pos="0"/>
+              </a:tabLst>
+            </a:pPr>
+            <a:endParaRPr b="0" lang="en-US" sz="1800" spc="-1" strike="noStrike">
+              <a:solidFill>
+                <a:srgbClr val="000000"/>
+              </a:solidFill>
+              <a:latin typeface="Arial"/>
+            </a:endParaRPr>
+          </a:p>
+          <a:p>
+            <a:pPr indent="0">
+              <a:lnSpc>
+                <a:spcPct val="90000"/>
+              </a:lnSpc>
+              <a:spcBef>
+                <a:spcPts val="1001"/>
+              </a:spcBef>
+              <a:buNone/>
+              <a:tabLst>
+                <a:tab algn="l" pos="0"/>
+              </a:tabLst>
+            </a:pPr>
+            <a:endParaRPr b="0" lang="en-US" sz="1800" spc="-1" strike="noStrike">
+              <a:solidFill>
+                <a:srgbClr val="000000"/>
+              </a:solidFill>
+              <a:latin typeface="Arial"/>
+            </a:endParaRPr>
+          </a:p>
+          <a:p>
+            <a:pPr indent="0">
+              <a:lnSpc>
+                <a:spcPct val="90000"/>
+              </a:lnSpc>
+              <a:spcBef>
+                <a:spcPts val="1001"/>
+              </a:spcBef>
+              <a:buNone/>
+              <a:tabLst>
+                <a:tab algn="l" pos="0"/>
+              </a:tabLst>
+            </a:pPr>
+            <a:endParaRPr b="0" lang="en-US" sz="1800" spc="-1" strike="noStrike">
+              <a:solidFill>
+                <a:srgbClr val="000000"/>
+              </a:solidFill>
+              <a:latin typeface="Arial"/>
+            </a:endParaRPr>
+          </a:p>
+          <a:p>
+            <a:pPr indent="0">
+              <a:lnSpc>
+                <a:spcPct val="90000"/>
+              </a:lnSpc>
+              <a:spcBef>
+                <a:spcPts val="1001"/>
+              </a:spcBef>
+              <a:buNone/>
+              <a:tabLst>
+                <a:tab algn="l" pos="0"/>
+              </a:tabLst>
+            </a:pPr>
+            <a:endParaRPr b="0" lang="en-US" sz="1800" spc="-1" strike="noStrike">
+              <a:solidFill>
+                <a:srgbClr val="000000"/>
+              </a:solidFill>
+              <a:latin typeface="Arial"/>
+            </a:endParaRPr>
+          </a:p>
+          <a:p>
+            <a:pPr indent="0">
+              <a:lnSpc>
+                <a:spcPct val="90000"/>
+              </a:lnSpc>
+              <a:spcBef>
+                <a:spcPts val="1001"/>
+              </a:spcBef>
+              <a:buNone/>
+              <a:tabLst>
+                <a:tab algn="l" pos="0"/>
+              </a:tabLst>
+            </a:pPr>
+            <a:endParaRPr b="0" lang="en-US" sz="1800" spc="-1" strike="noStrike">
+              <a:solidFill>
+                <a:srgbClr val="000000"/>
+              </a:solidFill>
+              <a:latin typeface="Arial"/>
+            </a:endParaRPr>
+          </a:p>
+          <a:p>
+            <a:pPr indent="0">
+              <a:lnSpc>
+                <a:spcPct val="90000"/>
+              </a:lnSpc>
+              <a:spcBef>
+                <a:spcPts val="1001"/>
+              </a:spcBef>
+              <a:buNone/>
+              <a:tabLst>
+                <a:tab algn="l" pos="0"/>
+              </a:tabLst>
+            </a:pPr>
+            <a:r>
+              <a:rPr b="0" lang="en-US" sz="1800" spc="-1" strike="noStrike">
+                <a:solidFill>
+                  <a:srgbClr val="000000"/>
+                </a:solidFill>
+                <a:latin typeface="Times New Roman"/>
+                <a:ea typeface="Times New Roman"/>
+              </a:rPr>
+              <a:t>A linear decision boundary is a genuinely limited tool for this problem as we can see in our confusion matrices above. Peak behavior varies by city, by season, and by hour simultaneously — a three-way interaction a linear model struggles to represent even with a two-way interaction term added.</a:t>
+            </a:r>
+            <a:endParaRPr b="0" lang="en-US" sz="1800" spc="-1" strike="noStrike">
+              <a:solidFill>
+                <a:srgbClr val="000000"/>
+              </a:solidFill>
+              <a:latin typeface="Arial"/>
+            </a:endParaRPr>
+          </a:p>
+          <a:p>
+            <a:pPr indent="0">
+              <a:lnSpc>
+                <a:spcPct val="90000"/>
+              </a:lnSpc>
+              <a:spcBef>
+                <a:spcPts val="1001"/>
+              </a:spcBef>
+              <a:buNone/>
+              <a:tabLst>
+                <a:tab algn="l" pos="0"/>
+              </a:tabLst>
+            </a:pPr>
+            <a:endParaRPr b="0" lang="en-US" sz="1800" spc="-1" strike="noStrike">
+              <a:solidFill>
+                <a:srgbClr val="000000"/>
+              </a:solidFill>
+              <a:latin typeface="Arial"/>
+            </a:endParaRPr>
+          </a:p>
+          <a:p>
+            <a:pPr indent="0">
+              <a:lnSpc>
+                <a:spcPct val="90000"/>
+              </a:lnSpc>
+              <a:spcBef>
+                <a:spcPts val="1001"/>
+              </a:spcBef>
+              <a:buNone/>
+              <a:tabLst>
+                <a:tab algn="l" pos="0"/>
+              </a:tabLst>
+            </a:pPr>
+            <a:r>
+              <a:rPr b="0" lang="en-US" sz="1800" spc="-1" strike="noStrike">
+                <a:solidFill>
+                  <a:srgbClr val="000000"/>
+                </a:solidFill>
+                <a:latin typeface="Times New Roman"/>
+                <a:ea typeface="Times New Roman"/>
+              </a:rPr>
+              <a:t>A linear classifier captures some zone/hour structure but underperforms at identifying peak periods, motivating a sequence-aware deep learning approach to build off of in Act II.</a:t>
+            </a:r>
+            <a:endParaRPr b="0" lang="en-US" sz="1800" spc="-1" strike="noStrike">
+              <a:solidFill>
+                <a:srgbClr val="000000"/>
+              </a:solidFill>
+              <a:latin typeface="Arial"/>
+            </a:endParaRPr>
+          </a:p>
+        </p:txBody>
+      </p:sp>
+      <p:pic>
+        <p:nvPicPr>
+          <p:cNvPr id="108" name="" descr=""/>
+          <p:cNvPicPr/>
+          <p:nvPr/>
+        </p:nvPicPr>
+        <p:blipFill>
+          <a:blip r:embed="rId1"/>
+          <a:stretch/>
+        </p:blipFill>
+        <p:spPr>
+          <a:xfrm>
+            <a:off x="152280" y="628920"/>
+            <a:ext cx="12039480" cy="3714120"/>
+          </a:xfrm>
+          <a:prstGeom prst="rect">
+            <a:avLst/>
+          </a:prstGeom>
+          <a:ln w="0">
+            <a:noFill/>
+          </a:ln>
+        </p:spPr>
+      </p:pic>
     </p:spTree>
   </p:cSld>
   <mc:AlternateContent>

--- a/ANA500_Micro-Project_JonathanEspedal.pptx
+++ b/ANA500_Micro-Project_JonathanEspedal.pptx
@@ -16,6 +16,7 @@
     <p:sldId id="263" r:id="rId11"/>
     <p:sldId id="264" r:id="rId12"/>
     <p:sldId id="265" r:id="rId13"/>
+    <p:sldId id="266" r:id="rId14"/>
   </p:sldIdLst>
   <p:sldSz cx="12192000" cy="6858000"/>
   <p:notesSz cx="7772400" cy="10058400"/>
@@ -73,7 +74,7 @@
         <p:txBody>
           <a:bodyPr/>
           <a:p>
-            <a:fld id="{80E18ED1-97FE-45B5-9AC0-8356A53E7217}" type="slidenum">
+            <a:fld id="{D4150B97-EE68-4B9A-8F26-9591BDAC3F62}" type="slidenum">
               <a:t>&lt;#&gt;</a:t>
             </a:fld>
           </a:p>
@@ -282,7 +283,7 @@
         <p:txBody>
           <a:bodyPr/>
           <a:p>
-            <a:fld id="{D0CCADE9-9755-416B-8878-1C041FDF8DB0}" type="slidenum">
+            <a:fld id="{751A0392-9F6A-4D1D-BB66-C31AF4EB6B81}" type="slidenum">
               <a:t>&lt;#&gt;</a:t>
             </a:fld>
           </a:p>
@@ -577,7 +578,7 @@
         <p:txBody>
           <a:bodyPr/>
           <a:p>
-            <a:fld id="{46F2ECD1-7515-43C9-9BB4-4D2004DB3C56}" type="slidenum">
+            <a:fld id="{E6C7DBCD-D661-4954-A1D5-BE2493493918}" type="slidenum">
               <a:t>&lt;#&gt;</a:t>
             </a:fld>
           </a:p>
@@ -958,7 +959,7 @@
         <p:txBody>
           <a:bodyPr/>
           <a:p>
-            <a:fld id="{75931E5A-8A16-4E24-B589-009D512B8DBD}" type="slidenum">
+            <a:fld id="{0FA234BC-36C2-403B-87A8-2D48EA56959C}" type="slidenum">
               <a:t>&lt;#&gt;</a:t>
             </a:fld>
           </a:p>
@@ -1041,7 +1042,7 @@
         <p:txBody>
           <a:bodyPr/>
           <a:p>
-            <a:fld id="{480282D0-02EA-4183-8AD3-FF886C80340E}" type="slidenum">
+            <a:fld id="{95790051-78BC-4737-BB00-5F464FCB4D72}" type="slidenum">
               <a:t>&lt;#&gt;</a:t>
             </a:fld>
           </a:p>
@@ -1204,7 +1205,7 @@
         <p:txBody>
           <a:bodyPr/>
           <a:p>
-            <a:fld id="{35129AE2-D8C6-47E4-85BD-71B559DDE0CD}" type="slidenum">
+            <a:fld id="{B0F5F916-EECF-43D6-A25C-F9788CFA8042}" type="slidenum">
               <a:t>&lt;#&gt;</a:t>
             </a:fld>
           </a:p>
@@ -1370,7 +1371,7 @@
         <p:txBody>
           <a:bodyPr/>
           <a:p>
-            <a:fld id="{96E69EA4-9C74-4CC1-A94F-2832086379AC}" type="slidenum">
+            <a:fld id="{8F9BB31D-6D01-425F-9E28-13D9172AECD8}" type="slidenum">
               <a:t>&lt;#&gt;</a:t>
             </a:fld>
           </a:p>
@@ -1579,7 +1580,7 @@
         <p:txBody>
           <a:bodyPr/>
           <a:p>
-            <a:fld id="{48791F88-4078-42DA-8BDA-7F0794F7DB97}" type="slidenum">
+            <a:fld id="{DBAA5F5C-743F-4E82-93A2-4F3FC77669F5}" type="slidenum">
               <a:t>&lt;#&gt;</a:t>
             </a:fld>
           </a:p>
@@ -1702,7 +1703,7 @@
         <p:txBody>
           <a:bodyPr/>
           <a:p>
-            <a:fld id="{F9A49AD5-DD21-4AA8-AADD-8FDB0E116CB6}" type="slidenum">
+            <a:fld id="{AC5AAC68-36F3-4303-9F9E-7A9ADD8E6B6A}" type="slidenum">
               <a:t>&lt;#&gt;</a:t>
             </a:fld>
           </a:p>
@@ -1823,7 +1824,7 @@
         <p:txBody>
           <a:bodyPr/>
           <a:p>
-            <a:fld id="{2530AE78-6900-425F-9826-68EEC782AB0F}" type="slidenum">
+            <a:fld id="{CFECB586-9191-4BBE-B66D-75DA665FDE68}" type="slidenum">
               <a:t>&lt;#&gt;</a:t>
             </a:fld>
           </a:p>
@@ -2075,7 +2076,7 @@
         <p:txBody>
           <a:bodyPr/>
           <a:p>
-            <a:fld id="{05C1CDF0-D9D3-4677-8673-4EF6A74DD650}" type="slidenum">
+            <a:fld id="{9976388D-6CEE-43FD-B9A0-AF111AD2AA88}" type="slidenum">
               <a:t>&lt;#&gt;</a:t>
             </a:fld>
           </a:p>
@@ -2238,7 +2239,7 @@
         <p:txBody>
           <a:bodyPr/>
           <a:p>
-            <a:fld id="{395656A9-BB21-472F-BCC9-546166CDA8DE}" type="slidenum">
+            <a:fld id="{E0446815-B336-4A74-AD83-1D2757A441D8}" type="slidenum">
               <a:t>&lt;#&gt;</a:t>
             </a:fld>
           </a:p>
@@ -2490,7 +2491,7 @@
         <p:txBody>
           <a:bodyPr/>
           <a:p>
-            <a:fld id="{4D0C16BD-4768-4111-B907-EF2E67F75EFE}" type="slidenum">
+            <a:fld id="{1467971F-307F-4051-92A5-D8B13E6BC4EE}" type="slidenum">
               <a:t>&lt;#&gt;</a:t>
             </a:fld>
           </a:p>
@@ -2742,7 +2743,7 @@
         <p:txBody>
           <a:bodyPr/>
           <a:p>
-            <a:fld id="{61F842B2-A2D5-4A74-B534-562CF6D1BA97}" type="slidenum">
+            <a:fld id="{3853B669-6C64-400B-A9C7-884C07B72B01}" type="slidenum">
               <a:t>&lt;#&gt;</a:t>
             </a:fld>
           </a:p>
@@ -2951,7 +2952,7 @@
         <p:txBody>
           <a:bodyPr/>
           <a:p>
-            <a:fld id="{792679CF-918D-4A9D-AE1B-B1E277AEDEC6}" type="slidenum">
+            <a:fld id="{FBE52C76-F867-4A58-ABAC-34C082590C8E}" type="slidenum">
               <a:t>&lt;#&gt;</a:t>
             </a:fld>
           </a:p>
@@ -3246,7 +3247,7 @@
         <p:txBody>
           <a:bodyPr/>
           <a:p>
-            <a:fld id="{E5290F66-D155-4850-980C-8CD9CB08CB20}" type="slidenum">
+            <a:fld id="{7BDEBA81-0E0F-4497-A9BA-5DC2C4C57E5C}" type="slidenum">
               <a:t>&lt;#&gt;</a:t>
             </a:fld>
           </a:p>
@@ -3627,7 +3628,7 @@
         <p:txBody>
           <a:bodyPr/>
           <a:p>
-            <a:fld id="{12325492-6517-46C0-B470-929E4AF2BE10}" type="slidenum">
+            <a:fld id="{58848DC4-48FC-4F53-AEF3-43FBB8968B9B}" type="slidenum">
               <a:t>&lt;#&gt;</a:t>
             </a:fld>
           </a:p>
@@ -3793,7 +3794,7 @@
         <p:txBody>
           <a:bodyPr/>
           <a:p>
-            <a:fld id="{7263EB3E-B803-4344-807E-0E42CE0C62E4}" type="slidenum">
+            <a:fld id="{156B212D-B3D0-41FC-9F9F-3880A5B4AC64}" type="slidenum">
               <a:t>&lt;#&gt;</a:t>
             </a:fld>
           </a:p>
@@ -4002,7 +4003,7 @@
         <p:txBody>
           <a:bodyPr/>
           <a:p>
-            <a:fld id="{308049AA-27E1-41D9-826A-9C9ACA2A5BBA}" type="slidenum">
+            <a:fld id="{B6AC6576-8E7F-4A6D-A103-6650440E465B}" type="slidenum">
               <a:t>&lt;#&gt;</a:t>
             </a:fld>
           </a:p>
@@ -4125,7 +4126,7 @@
         <p:txBody>
           <a:bodyPr/>
           <a:p>
-            <a:fld id="{CF5E417D-9010-4139-9C4A-6A1EA1F7A4CA}" type="slidenum">
+            <a:fld id="{228F5EE6-FCC1-4C25-B623-CFA82AD7344A}" type="slidenum">
               <a:t>&lt;#&gt;</a:t>
             </a:fld>
           </a:p>
@@ -4246,7 +4247,7 @@
         <p:txBody>
           <a:bodyPr/>
           <a:p>
-            <a:fld id="{B743A469-216E-46F2-9042-2B01550D188C}" type="slidenum">
+            <a:fld id="{9249752F-64B8-493F-BBCB-A9EA29D9E6CF}" type="slidenum">
               <a:t>&lt;#&gt;</a:t>
             </a:fld>
           </a:p>
@@ -4498,7 +4499,7 @@
         <p:txBody>
           <a:bodyPr/>
           <a:p>
-            <a:fld id="{D3729138-5B23-472F-BA6C-DB3732F2307E}" type="slidenum">
+            <a:fld id="{3EF4E80C-949B-4A5D-AA1B-D86BBA15D285}" type="slidenum">
               <a:t>&lt;#&gt;</a:t>
             </a:fld>
           </a:p>
@@ -4750,7 +4751,7 @@
         <p:txBody>
           <a:bodyPr/>
           <a:p>
-            <a:fld id="{0579A7F3-AA1A-4B29-9AC1-A7E8A8D4D251}" type="slidenum">
+            <a:fld id="{294F4F74-A4DA-46F1-AF0B-3E9F16C4C1BC}" type="slidenum">
               <a:t>&lt;#&gt;</a:t>
             </a:fld>
           </a:p>
@@ -5002,7 +5003,7 @@
         <p:txBody>
           <a:bodyPr/>
           <a:p>
-            <a:fld id="{1942990A-D0FC-4BAC-8FDC-F86E26119487}" type="slidenum">
+            <a:fld id="{7DC06E31-19D3-44C5-8504-CC9C34B70C34}" type="slidenum">
               <a:t>&lt;#&gt;</a:t>
             </a:fld>
           </a:p>
@@ -5071,7 +5072,7 @@
         <p:spPr>
           <a:xfrm>
             <a:off x="4038480" y="6356520"/>
-            <a:ext cx="4113000" cy="363240"/>
+            <a:ext cx="4112280" cy="362520"/>
           </a:xfrm>
           <a:prstGeom prst="rect">
             <a:avLst/>
@@ -5143,7 +5144,7 @@
         <p:spPr>
           <a:xfrm>
             <a:off x="8610480" y="6356520"/>
-            <a:ext cx="2741400" cy="363240"/>
+            <a:ext cx="2740680" cy="362520"/>
           </a:xfrm>
           <a:prstGeom prst="rect">
             <a:avLst/>
@@ -5184,14 +5185,14 @@
                 <a:tab algn="l" pos="0"/>
               </a:tabLst>
             </a:pPr>
-            <a:fld id="{17DC3E5E-32C2-45CB-B1B3-27A840FBE6BC}" type="slidenum">
+            <a:fld id="{45019C6B-ADD3-4EDB-8A1D-A8B09D753752}" type="slidenum">
               <a:rPr b="0" lang="en-US" sz="1200" spc="-1" strike="noStrike">
                 <a:solidFill>
                   <a:srgbClr val="8b8b8b"/>
                 </a:solidFill>
                 <a:latin typeface="Calibri"/>
               </a:rPr>
-              <a:t>9</a:t>
+              <a:t>11</a:t>
             </a:fld>
             <a:endParaRPr b="0" lang="en-US" sz="1200" spc="-1" strike="noStrike">
               <a:solidFill>
@@ -5215,7 +5216,7 @@
         <p:spPr>
           <a:xfrm>
             <a:off x="838080" y="6356520"/>
-            <a:ext cx="2741400" cy="363240"/>
+            <a:ext cx="2740680" cy="362520"/>
           </a:xfrm>
           <a:prstGeom prst="rect">
             <a:avLst/>
@@ -5593,7 +5594,7 @@
         <p:spPr>
           <a:xfrm>
             <a:off x="4038480" y="6356520"/>
-            <a:ext cx="4113000" cy="363240"/>
+            <a:ext cx="4112280" cy="362520"/>
           </a:xfrm>
           <a:prstGeom prst="rect">
             <a:avLst/>
@@ -5665,7 +5666,7 @@
         <p:spPr>
           <a:xfrm>
             <a:off x="8610480" y="6356520"/>
-            <a:ext cx="2741400" cy="363240"/>
+            <a:ext cx="2740680" cy="362520"/>
           </a:xfrm>
           <a:prstGeom prst="rect">
             <a:avLst/>
@@ -5706,7 +5707,7 @@
                 <a:tab algn="l" pos="0"/>
               </a:tabLst>
             </a:pPr>
-            <a:fld id="{5D2AF725-540C-4642-B471-08C9F2D4D32B}" type="slidenum">
+            <a:fld id="{B1D035ED-2316-443E-A3A0-18F84F8C91D0}" type="slidenum">
               <a:rPr b="0" lang="en-US" sz="1200" spc="-1" strike="noStrike">
                 <a:solidFill>
                   <a:srgbClr val="8b8b8b"/>
@@ -5737,7 +5738,7 @@
         <p:spPr>
           <a:xfrm>
             <a:off x="838080" y="6356520"/>
-            <a:ext cx="2741400" cy="363240"/>
+            <a:ext cx="2740680" cy="362520"/>
           </a:xfrm>
           <a:prstGeom prst="rect">
             <a:avLst/>
@@ -6108,7 +6109,7 @@
         <p:spPr>
           <a:xfrm>
             <a:off x="1523880" y="1122480"/>
-            <a:ext cx="9142200" cy="2385720"/>
+            <a:ext cx="9141480" cy="2385000"/>
           </a:xfrm>
           <a:prstGeom prst="rect">
             <a:avLst/>
@@ -6189,7 +6190,7 @@
         <p:spPr>
           <a:xfrm>
             <a:off x="1523880" y="3602160"/>
-            <a:ext cx="9142200" cy="1653840"/>
+            <a:ext cx="9141480" cy="1653120"/>
           </a:xfrm>
           <a:prstGeom prst="rect">
             <a:avLst/>
@@ -6326,7 +6327,7 @@
         <p:spPr>
           <a:xfrm>
             <a:off x="1440" y="0"/>
-            <a:ext cx="10513800" cy="685440"/>
+            <a:ext cx="10513080" cy="684720"/>
           </a:xfrm>
           <a:prstGeom prst="rect">
             <a:avLst/>
@@ -6381,7 +6382,7 @@
         <p:spPr>
           <a:xfrm>
             <a:off x="1440" y="679320"/>
-            <a:ext cx="10513800" cy="4349520"/>
+            <a:ext cx="12190320" cy="6178320"/>
           </a:xfrm>
           <a:prstGeom prst="rect">
             <a:avLst/>
@@ -6396,27 +6397,28 @@
             <a:noAutofit/>
           </a:bodyPr>
           <a:p>
-            <a:pPr indent="0">
-              <a:lnSpc>
-                <a:spcPct val="90000"/>
-              </a:lnSpc>
-              <a:spcBef>
-                <a:spcPts val="1001"/>
-              </a:spcBef>
-              <a:buNone/>
-              <a:tabLst>
-                <a:tab algn="l" pos="0"/>
-              </a:tabLst>
+            <a:pPr marL="432000" indent="-324000">
+              <a:lnSpc>
+                <a:spcPct val="100000"/>
+              </a:lnSpc>
+              <a:spcBef>
+                <a:spcPts val="1417"/>
+              </a:spcBef>
+              <a:buClr>
+                <a:srgbClr val="000000"/>
+              </a:buClr>
+              <a:buSzPct val="45000"/>
+              <a:buFont typeface="Wingdings" charset="2"/>
+              <a:buChar char=""/>
             </a:pPr>
             <a:r>
               <a:rPr b="0" lang="en-US" sz="1800" spc="-1" strike="noStrike">
                 <a:solidFill>
                   <a:srgbClr val="000000"/>
                 </a:solidFill>
-                <a:latin typeface="Times New Roman"/>
-                <a:ea typeface="Times New Roman"/>
+                <a:latin typeface="Arial"/>
               </a:rPr>
-              <a:t>Micro-Project 4 will apply RNN-based deep learning to model the sequential/time-series structure directly.</a:t>
+              <a:t>Fixed percentile thresholds went stale in zone2_Boujdour. -49.9% shift.</a:t>
             </a:r>
             <a:endParaRPr b="0" lang="en-US" sz="1800" spc="-1" strike="noStrike">
               <a:solidFill>
@@ -6425,8 +6427,827 @@
               <a:latin typeface="Arial"/>
             </a:endParaRPr>
           </a:p>
-        </p:txBody>
-      </p:sp>
+          <a:p>
+            <a:pPr indent="0">
+              <a:lnSpc>
+                <a:spcPct val="100000"/>
+              </a:lnSpc>
+              <a:spcBef>
+                <a:spcPts val="1417"/>
+              </a:spcBef>
+              <a:buNone/>
+            </a:pPr>
+            <a:r>
+              <a:rPr b="0" lang="en-US" sz="1800" spc="-1" strike="noStrike">
+                <a:solidFill>
+                  <a:srgbClr val="000000"/>
+                </a:solidFill>
+                <a:latin typeface="Arial"/>
+              </a:rPr>
+              <a:t>Decisions made for the model pipeline and validation: chronological split instead of </a:t>
+            </a:r>
+            <a:endParaRPr b="0" lang="en-US" sz="1800" spc="-1" strike="noStrike">
+              <a:solidFill>
+                <a:srgbClr val="000000"/>
+              </a:solidFill>
+              <a:latin typeface="Arial"/>
+            </a:endParaRPr>
+          </a:p>
+          <a:p>
+            <a:pPr indent="0">
+              <a:lnSpc>
+                <a:spcPct val="100000"/>
+              </a:lnSpc>
+              <a:spcBef>
+                <a:spcPts val="1417"/>
+              </a:spcBef>
+              <a:buNone/>
+            </a:pPr>
+            <a:r>
+              <a:rPr b="0" lang="en-US" sz="1800" spc="-1" strike="noStrike">
+                <a:solidFill>
+                  <a:srgbClr val="000000"/>
+                </a:solidFill>
+                <a:latin typeface="Arial"/>
+              </a:rPr>
+              <a:t>random, Training-only thresholds (avoids leakage), 3-hour horizon (30 minutes makes</a:t>
+            </a:r>
+            <a:endParaRPr b="0" lang="en-US" sz="1800" spc="-1" strike="noStrike">
+              <a:solidFill>
+                <a:srgbClr val="000000"/>
+              </a:solidFill>
+              <a:latin typeface="Arial"/>
+            </a:endParaRPr>
+          </a:p>
+          <a:p>
+            <a:pPr indent="0">
+              <a:lnSpc>
+                <a:spcPct val="100000"/>
+              </a:lnSpc>
+              <a:spcBef>
+                <a:spcPts val="1417"/>
+              </a:spcBef>
+              <a:buNone/>
+            </a:pPr>
+            <a:r>
+              <a:rPr b="0" lang="en-US" sz="1800" spc="-1" strike="noStrike">
+                <a:solidFill>
+                  <a:srgbClr val="000000"/>
+                </a:solidFill>
+                <a:latin typeface="Arial"/>
+              </a:rPr>
+              <a:t>Persistence too strong), PR-AUC and F1 instead of accuracy.</a:t>
+            </a:r>
+            <a:endParaRPr b="0" lang="en-US" sz="1800" spc="-1" strike="noStrike">
+              <a:solidFill>
+                <a:srgbClr val="000000"/>
+              </a:solidFill>
+              <a:latin typeface="Arial"/>
+            </a:endParaRPr>
+          </a:p>
+          <a:p>
+            <a:pPr indent="0">
+              <a:lnSpc>
+                <a:spcPct val="100000"/>
+              </a:lnSpc>
+              <a:spcBef>
+                <a:spcPts val="1417"/>
+              </a:spcBef>
+              <a:buNone/>
+            </a:pPr>
+            <a:endParaRPr b="0" lang="en-US" sz="1800" spc="-1" strike="noStrike">
+              <a:solidFill>
+                <a:srgbClr val="000000"/>
+              </a:solidFill>
+              <a:latin typeface="Arial"/>
+            </a:endParaRPr>
+          </a:p>
+          <a:p>
+            <a:pPr indent="0">
+              <a:lnSpc>
+                <a:spcPct val="100000"/>
+              </a:lnSpc>
+              <a:spcBef>
+                <a:spcPts val="1417"/>
+              </a:spcBef>
+              <a:buNone/>
+            </a:pPr>
+            <a:r>
+              <a:rPr b="0" lang="en-US" sz="1800" spc="-1" strike="noStrike">
+                <a:solidFill>
+                  <a:srgbClr val="000000"/>
+                </a:solidFill>
+                <a:latin typeface="Arial"/>
+              </a:rPr>
+              <a:t>There are limitations in this, as we saw in “Prepare” Marrakech data spans only a</a:t>
+            </a:r>
+            <a:endParaRPr b="0" lang="en-US" sz="1800" spc="-1" strike="noStrike">
+              <a:solidFill>
+                <a:srgbClr val="000000"/>
+              </a:solidFill>
+              <a:latin typeface="Arial"/>
+            </a:endParaRPr>
+          </a:p>
+          <a:p>
+            <a:pPr indent="0">
+              <a:lnSpc>
+                <a:spcPct val="100000"/>
+              </a:lnSpc>
+              <a:spcBef>
+                <a:spcPts val="1417"/>
+              </a:spcBef>
+              <a:buNone/>
+            </a:pPr>
+            <a:r>
+              <a:rPr b="0" lang="en-US" sz="1800" spc="-1" strike="noStrike">
+                <a:solidFill>
+                  <a:srgbClr val="000000"/>
+                </a:solidFill>
+                <a:latin typeface="Arial"/>
+              </a:rPr>
+              <a:t>year, less of an overall time interval than the other cities, so we could only use the</a:t>
+            </a:r>
+            <a:endParaRPr b="0" lang="en-US" sz="1800" spc="-1" strike="noStrike">
+              <a:solidFill>
+                <a:srgbClr val="000000"/>
+              </a:solidFill>
+              <a:latin typeface="Arial"/>
+            </a:endParaRPr>
+          </a:p>
+          <a:p>
+            <a:pPr indent="0">
+              <a:lnSpc>
+                <a:spcPct val="100000"/>
+              </a:lnSpc>
+              <a:spcBef>
+                <a:spcPts val="1417"/>
+              </a:spcBef>
+              <a:buNone/>
+            </a:pPr>
+            <a:r>
+              <a:rPr b="0" lang="en-US" sz="1800" spc="-1" strike="noStrike">
+                <a:solidFill>
+                  <a:srgbClr val="000000"/>
+                </a:solidFill>
+                <a:latin typeface="Arial"/>
+              </a:rPr>
+              <a:t>data for training only.</a:t>
+            </a:r>
+            <a:endParaRPr b="0" lang="en-US" sz="1800" spc="-1" strike="noStrike">
+              <a:solidFill>
+                <a:srgbClr val="000000"/>
+              </a:solidFill>
+              <a:latin typeface="Arial"/>
+            </a:endParaRPr>
+          </a:p>
+          <a:p>
+            <a:pPr marL="432000" indent="0">
+              <a:lnSpc>
+                <a:spcPct val="100000"/>
+              </a:lnSpc>
+              <a:spcBef>
+                <a:spcPts val="1417"/>
+              </a:spcBef>
+              <a:buNone/>
+            </a:pPr>
+            <a:endParaRPr b="0" lang="en-US" sz="1800" spc="-1" strike="noStrike">
+              <a:solidFill>
+                <a:srgbClr val="000000"/>
+              </a:solidFill>
+              <a:latin typeface="Arial"/>
+            </a:endParaRPr>
+          </a:p>
+          <a:p>
+            <a:pPr marL="432000" indent="0">
+              <a:lnSpc>
+                <a:spcPct val="100000"/>
+              </a:lnSpc>
+              <a:spcBef>
+                <a:spcPts val="1417"/>
+              </a:spcBef>
+              <a:buNone/>
+              <a:tabLst>
+                <a:tab algn="l" pos="0"/>
+              </a:tabLst>
+            </a:pPr>
+            <a:endParaRPr b="0" lang="en-US" sz="1800" spc="-1" strike="noStrike">
+              <a:solidFill>
+                <a:srgbClr val="000000"/>
+              </a:solidFill>
+              <a:latin typeface="Arial"/>
+            </a:endParaRPr>
+          </a:p>
+          <a:p>
+            <a:pPr marL="432000" indent="0">
+              <a:lnSpc>
+                <a:spcPct val="100000"/>
+              </a:lnSpc>
+              <a:spcBef>
+                <a:spcPts val="1417"/>
+              </a:spcBef>
+              <a:buNone/>
+              <a:tabLst>
+                <a:tab algn="l" pos="0"/>
+              </a:tabLst>
+            </a:pPr>
+            <a:endParaRPr b="0" lang="en-US" sz="1800" spc="-1" strike="noStrike">
+              <a:solidFill>
+                <a:srgbClr val="000000"/>
+              </a:solidFill>
+              <a:latin typeface="Arial"/>
+            </a:endParaRPr>
+          </a:p>
+          <a:p>
+            <a:pPr marL="432000" indent="0">
+              <a:lnSpc>
+                <a:spcPct val="100000"/>
+              </a:lnSpc>
+              <a:spcBef>
+                <a:spcPts val="1417"/>
+              </a:spcBef>
+              <a:buNone/>
+              <a:tabLst>
+                <a:tab algn="l" pos="0"/>
+              </a:tabLst>
+            </a:pPr>
+            <a:endParaRPr b="0" lang="en-US" sz="1800" spc="-1" strike="noStrike">
+              <a:solidFill>
+                <a:srgbClr val="000000"/>
+              </a:solidFill>
+              <a:latin typeface="Arial"/>
+            </a:endParaRPr>
+          </a:p>
+          <a:p>
+            <a:pPr marL="432000" indent="0">
+              <a:lnSpc>
+                <a:spcPct val="100000"/>
+              </a:lnSpc>
+              <a:spcBef>
+                <a:spcPts val="1417"/>
+              </a:spcBef>
+              <a:buNone/>
+              <a:tabLst>
+                <a:tab algn="l" pos="0"/>
+              </a:tabLst>
+            </a:pPr>
+            <a:endParaRPr b="0" lang="en-US" sz="1800" spc="-1" strike="noStrike">
+              <a:solidFill>
+                <a:srgbClr val="000000"/>
+              </a:solidFill>
+              <a:latin typeface="Arial"/>
+            </a:endParaRPr>
+          </a:p>
+          <a:p>
+            <a:pPr marL="432000" indent="0">
+              <a:lnSpc>
+                <a:spcPct val="100000"/>
+              </a:lnSpc>
+              <a:spcBef>
+                <a:spcPts val="1417"/>
+              </a:spcBef>
+              <a:buNone/>
+              <a:tabLst>
+                <a:tab algn="l" pos="0"/>
+              </a:tabLst>
+            </a:pPr>
+            <a:endParaRPr b="0" lang="en-US" sz="1800" spc="-1" strike="noStrike">
+              <a:solidFill>
+                <a:srgbClr val="000000"/>
+              </a:solidFill>
+              <a:latin typeface="Arial"/>
+            </a:endParaRPr>
+          </a:p>
+          <a:p>
+            <a:pPr marL="432000" indent="0">
+              <a:lnSpc>
+                <a:spcPct val="100000"/>
+              </a:lnSpc>
+              <a:spcBef>
+                <a:spcPts val="1417"/>
+              </a:spcBef>
+              <a:buNone/>
+              <a:tabLst>
+                <a:tab algn="l" pos="0"/>
+              </a:tabLst>
+            </a:pPr>
+            <a:endParaRPr b="0" lang="en-US" sz="1800" spc="-1" strike="noStrike">
+              <a:solidFill>
+                <a:srgbClr val="000000"/>
+              </a:solidFill>
+              <a:latin typeface="Arial"/>
+            </a:endParaRPr>
+          </a:p>
+          <a:p>
+            <a:pPr marL="432000" indent="0">
+              <a:lnSpc>
+                <a:spcPct val="100000"/>
+              </a:lnSpc>
+              <a:spcBef>
+                <a:spcPts val="1417"/>
+              </a:spcBef>
+              <a:buNone/>
+              <a:tabLst>
+                <a:tab algn="l" pos="0"/>
+              </a:tabLst>
+            </a:pPr>
+            <a:endParaRPr b="0" lang="en-US" sz="1800" spc="-1" strike="noStrike">
+              <a:solidFill>
+                <a:srgbClr val="000000"/>
+              </a:solidFill>
+              <a:latin typeface="Arial"/>
+            </a:endParaRPr>
+          </a:p>
+          <a:p>
+            <a:pPr marL="432000" indent="0">
+              <a:lnSpc>
+                <a:spcPct val="100000"/>
+              </a:lnSpc>
+              <a:spcBef>
+                <a:spcPts val="1417"/>
+              </a:spcBef>
+              <a:buNone/>
+              <a:tabLst>
+                <a:tab algn="l" pos="0"/>
+              </a:tabLst>
+            </a:pPr>
+            <a:endParaRPr b="0" lang="en-US" sz="1800" spc="-1" strike="noStrike">
+              <a:solidFill>
+                <a:srgbClr val="000000"/>
+              </a:solidFill>
+              <a:latin typeface="Arial"/>
+            </a:endParaRPr>
+          </a:p>
+          <a:p>
+            <a:pPr marL="432000" indent="0">
+              <a:lnSpc>
+                <a:spcPct val="100000"/>
+              </a:lnSpc>
+              <a:spcBef>
+                <a:spcPts val="1417"/>
+              </a:spcBef>
+              <a:buNone/>
+              <a:tabLst>
+                <a:tab algn="l" pos="0"/>
+              </a:tabLst>
+            </a:pPr>
+            <a:r>
+              <a:rPr b="0" lang="en-US" sz="1800" spc="-1" strike="noStrike">
+                <a:solidFill>
+                  <a:srgbClr val="000000"/>
+                </a:solidFill>
+                <a:latin typeface="Arial"/>
+              </a:rPr>
+              <a:t> </a:t>
+            </a:r>
+            <a:endParaRPr b="0" lang="en-US" sz="1800" spc="-1" strike="noStrike">
+              <a:solidFill>
+                <a:srgbClr val="000000"/>
+              </a:solidFill>
+              <a:latin typeface="Arial"/>
+            </a:endParaRPr>
+          </a:p>
+          <a:p>
+            <a:pPr marL="432000" indent="0">
+              <a:lnSpc>
+                <a:spcPct val="100000"/>
+              </a:lnSpc>
+              <a:spcBef>
+                <a:spcPts val="1417"/>
+              </a:spcBef>
+              <a:buNone/>
+              <a:tabLst>
+                <a:tab algn="l" pos="0"/>
+              </a:tabLst>
+            </a:pPr>
+            <a:endParaRPr b="0" lang="en-US" sz="1800" spc="-1" strike="noStrike">
+              <a:solidFill>
+                <a:srgbClr val="000000"/>
+              </a:solidFill>
+              <a:latin typeface="Arial"/>
+            </a:endParaRPr>
+          </a:p>
+        </p:txBody>
+      </p:sp>
+      <p:pic>
+        <p:nvPicPr>
+          <p:cNvPr id="111" name="" descr=""/>
+          <p:cNvPicPr/>
+          <p:nvPr/>
+        </p:nvPicPr>
+        <p:blipFill>
+          <a:blip r:embed="rId1"/>
+          <a:stretch/>
+        </p:blipFill>
+        <p:spPr>
+          <a:xfrm>
+            <a:off x="8458200" y="57600"/>
+            <a:ext cx="3657240" cy="5200200"/>
+          </a:xfrm>
+          <a:prstGeom prst="rect">
+            <a:avLst/>
+          </a:prstGeom>
+          <a:ln w="0">
+            <a:noFill/>
+          </a:ln>
+        </p:spPr>
+      </p:pic>
+    </p:spTree>
+  </p:cSld>
+  <mc:AlternateContent>
+    <mc:Choice Requires="p14">
+      <p:transition spd="slow" p14:dur="2000"/>
+    </mc:Choice>
+    <mc:Fallback>
+      <p:transition spd="slow"/>
+    </mc:Fallback>
+  </mc:AlternateContent>
+</p:sld>
+</file>
+
+<file path=ppt/slides/slide11.xml><?xml version="1.0" encoding="utf-8"?>
+<p:sld xmlns:a="http://schemas.openxmlformats.org/drawingml/2006/main" xmlns:p="http://schemas.openxmlformats.org/presentationml/2006/main" xmlns:r="http://schemas.openxmlformats.org/officeDocument/2006/relationships" xmlns:p14="http://schemas.microsoft.com/office/powerpoint/2010/main" xmlns:p15="http://schemas.microsoft.com/office/powerpoint/2012/main" xmlns:mc="http://schemas.openxmlformats.org/markup-compatibility/2006">
+  <p:cSld>
+    <p:spTree>
+      <p:nvGrpSpPr>
+        <p:cNvPr id="1" name=""/>
+        <p:cNvGrpSpPr/>
+        <p:nvPr/>
+      </p:nvGrpSpPr>
+      <p:grpSpPr>
+        <a:xfrm>
+          <a:off x="0" y="0"/>
+          <a:ext cx="0" cy="0"/>
+          <a:chOff x="0" y="0"/>
+          <a:chExt cx="0" cy="0"/>
+        </a:xfrm>
+      </p:grpSpPr>
+      <p:sp>
+        <p:nvSpPr>
+          <p:cNvPr id="112" name="PlaceHolder 1"/>
+          <p:cNvSpPr>
+            <a:spLocks noGrp="1"/>
+          </p:cNvSpPr>
+          <p:nvPr>
+            <p:ph type="title"/>
+          </p:nvPr>
+        </p:nvSpPr>
+        <p:spPr>
+          <a:xfrm>
+            <a:off x="1440" y="0"/>
+            <a:ext cx="10513080" cy="684720"/>
+          </a:xfrm>
+          <a:prstGeom prst="rect">
+            <a:avLst/>
+          </a:prstGeom>
+          <a:noFill/>
+          <a:ln w="0">
+            <a:noFill/>
+          </a:ln>
+        </p:spPr>
+        <p:txBody>
+          <a:bodyPr lIns="90000" rIns="90000" tIns="45000" bIns="45000" anchor="ctr">
+            <a:noAutofit/>
+          </a:bodyPr>
+          <a:p>
+            <a:pPr indent="0">
+              <a:lnSpc>
+                <a:spcPct val="90000"/>
+              </a:lnSpc>
+              <a:buNone/>
+              <a:tabLst>
+                <a:tab algn="l" pos="0"/>
+              </a:tabLst>
+            </a:pPr>
+            <a:r>
+              <a:rPr b="0" lang="en-US" sz="4400" spc="-1" strike="noStrike">
+                <a:solidFill>
+                  <a:srgbClr val="000000"/>
+                </a:solidFill>
+                <a:latin typeface="Calibri Light"/>
+              </a:rPr>
+              <a:t>Act II – Recurrent Neural Networks</a:t>
+            </a:r>
+            <a:endParaRPr b="0" lang="en-US" sz="4400" spc="-1" strike="noStrike">
+              <a:solidFill>
+                <a:srgbClr val="000000"/>
+              </a:solidFill>
+              <a:latin typeface="Arial"/>
+            </a:endParaRPr>
+          </a:p>
+        </p:txBody>
+      </p:sp>
+      <p:sp>
+        <p:nvSpPr>
+          <p:cNvPr id="113" name="PlaceHolder 2"/>
+          <p:cNvSpPr>
+            <a:spLocks noGrp="1"/>
+          </p:cNvSpPr>
+          <p:nvPr>
+            <p:ph/>
+          </p:nvPr>
+        </p:nvSpPr>
+        <p:spPr>
+          <a:xfrm>
+            <a:off x="0" y="457200"/>
+            <a:ext cx="12190320" cy="6178320"/>
+          </a:xfrm>
+          <a:prstGeom prst="rect">
+            <a:avLst/>
+          </a:prstGeom>
+          <a:noFill/>
+          <a:ln w="0">
+            <a:noFill/>
+          </a:ln>
+        </p:spPr>
+        <p:txBody>
+          <a:bodyPr lIns="90000" rIns="90000" tIns="45000" bIns="45000" anchor="t">
+            <a:noAutofit/>
+          </a:bodyPr>
+          <a:p>
+            <a:pPr marL="432000" indent="0">
+              <a:lnSpc>
+                <a:spcPct val="100000"/>
+              </a:lnSpc>
+              <a:spcBef>
+                <a:spcPts val="1417"/>
+              </a:spcBef>
+              <a:buNone/>
+            </a:pPr>
+            <a:endParaRPr b="0" lang="en-US" sz="1800" spc="-1" strike="noStrike">
+              <a:solidFill>
+                <a:srgbClr val="000000"/>
+              </a:solidFill>
+              <a:latin typeface="Arial"/>
+            </a:endParaRPr>
+          </a:p>
+          <a:p>
+            <a:pPr marL="432000" indent="0">
+              <a:lnSpc>
+                <a:spcPct val="100000"/>
+              </a:lnSpc>
+              <a:spcBef>
+                <a:spcPts val="1417"/>
+              </a:spcBef>
+              <a:buNone/>
+              <a:tabLst>
+                <a:tab algn="l" pos="0"/>
+              </a:tabLst>
+            </a:pPr>
+            <a:endParaRPr b="0" lang="en-US" sz="1800" spc="-1" strike="noStrike">
+              <a:solidFill>
+                <a:srgbClr val="000000"/>
+              </a:solidFill>
+              <a:latin typeface="Arial"/>
+            </a:endParaRPr>
+          </a:p>
+          <a:p>
+            <a:pPr marL="432000" indent="0">
+              <a:lnSpc>
+                <a:spcPct val="100000"/>
+              </a:lnSpc>
+              <a:spcBef>
+                <a:spcPts val="1417"/>
+              </a:spcBef>
+              <a:buNone/>
+              <a:tabLst>
+                <a:tab algn="l" pos="0"/>
+              </a:tabLst>
+            </a:pPr>
+            <a:endParaRPr b="0" lang="en-US" sz="1800" spc="-1" strike="noStrike">
+              <a:solidFill>
+                <a:srgbClr val="000000"/>
+              </a:solidFill>
+              <a:latin typeface="Arial"/>
+            </a:endParaRPr>
+          </a:p>
+          <a:p>
+            <a:pPr marL="432000" indent="0">
+              <a:lnSpc>
+                <a:spcPct val="100000"/>
+              </a:lnSpc>
+              <a:spcBef>
+                <a:spcPts val="1417"/>
+              </a:spcBef>
+              <a:buNone/>
+              <a:tabLst>
+                <a:tab algn="l" pos="0"/>
+              </a:tabLst>
+            </a:pPr>
+            <a:endParaRPr b="0" lang="en-US" sz="1800" spc="-1" strike="noStrike">
+              <a:solidFill>
+                <a:srgbClr val="000000"/>
+              </a:solidFill>
+              <a:latin typeface="Arial"/>
+            </a:endParaRPr>
+          </a:p>
+          <a:p>
+            <a:pPr marL="432000" indent="0">
+              <a:lnSpc>
+                <a:spcPct val="100000"/>
+              </a:lnSpc>
+              <a:spcBef>
+                <a:spcPts val="1417"/>
+              </a:spcBef>
+              <a:buNone/>
+              <a:tabLst>
+                <a:tab algn="l" pos="0"/>
+              </a:tabLst>
+            </a:pPr>
+            <a:endParaRPr b="0" lang="en-US" sz="1800" spc="-1" strike="noStrike">
+              <a:solidFill>
+                <a:srgbClr val="000000"/>
+              </a:solidFill>
+              <a:latin typeface="Arial"/>
+            </a:endParaRPr>
+          </a:p>
+          <a:p>
+            <a:pPr marL="432000" indent="0">
+              <a:lnSpc>
+                <a:spcPct val="100000"/>
+              </a:lnSpc>
+              <a:spcBef>
+                <a:spcPts val="1417"/>
+              </a:spcBef>
+              <a:buNone/>
+              <a:tabLst>
+                <a:tab algn="l" pos="0"/>
+              </a:tabLst>
+            </a:pPr>
+            <a:endParaRPr b="0" lang="en-US" sz="1800" spc="-1" strike="noStrike">
+              <a:solidFill>
+                <a:srgbClr val="000000"/>
+              </a:solidFill>
+              <a:latin typeface="Arial"/>
+            </a:endParaRPr>
+          </a:p>
+          <a:p>
+            <a:pPr marL="432000" indent="0">
+              <a:lnSpc>
+                <a:spcPct val="100000"/>
+              </a:lnSpc>
+              <a:spcBef>
+                <a:spcPts val="1417"/>
+              </a:spcBef>
+              <a:buNone/>
+              <a:tabLst>
+                <a:tab algn="l" pos="0"/>
+              </a:tabLst>
+            </a:pPr>
+            <a:endParaRPr b="0" lang="en-US" sz="1800" spc="-1" strike="noStrike">
+              <a:solidFill>
+                <a:srgbClr val="000000"/>
+              </a:solidFill>
+              <a:latin typeface="Arial"/>
+            </a:endParaRPr>
+          </a:p>
+          <a:p>
+            <a:pPr marL="432000" indent="0">
+              <a:lnSpc>
+                <a:spcPct val="100000"/>
+              </a:lnSpc>
+              <a:spcBef>
+                <a:spcPts val="1417"/>
+              </a:spcBef>
+              <a:buNone/>
+              <a:tabLst>
+                <a:tab algn="l" pos="0"/>
+              </a:tabLst>
+            </a:pPr>
+            <a:endParaRPr b="0" lang="en-US" sz="1800" spc="-1" strike="noStrike">
+              <a:solidFill>
+                <a:srgbClr val="000000"/>
+              </a:solidFill>
+              <a:latin typeface="Arial"/>
+            </a:endParaRPr>
+          </a:p>
+          <a:p>
+            <a:pPr marL="432000" indent="0">
+              <a:lnSpc>
+                <a:spcPct val="100000"/>
+              </a:lnSpc>
+              <a:spcBef>
+                <a:spcPts val="1417"/>
+              </a:spcBef>
+              <a:buNone/>
+              <a:tabLst>
+                <a:tab algn="l" pos="0"/>
+              </a:tabLst>
+            </a:pPr>
+            <a:endParaRPr b="0" lang="en-US" sz="1800" spc="-1" strike="noStrike">
+              <a:solidFill>
+                <a:srgbClr val="000000"/>
+              </a:solidFill>
+              <a:latin typeface="Arial"/>
+            </a:endParaRPr>
+          </a:p>
+          <a:p>
+            <a:pPr indent="0">
+              <a:lnSpc>
+                <a:spcPct val="100000"/>
+              </a:lnSpc>
+              <a:spcBef>
+                <a:spcPts val="1417"/>
+              </a:spcBef>
+              <a:buNone/>
+              <a:tabLst>
+                <a:tab algn="l" pos="0"/>
+              </a:tabLst>
+            </a:pPr>
+            <a:r>
+              <a:rPr b="0" lang="en-US" sz="1800" spc="-1" strike="noStrike">
+                <a:solidFill>
+                  <a:srgbClr val="000000"/>
+                </a:solidFill>
+                <a:latin typeface="Arial"/>
+              </a:rPr>
+              <a:t>Because of the zone2_Boujdour causing a massive shift, we had to retrain on a rolling window and monitor for level shifts.</a:t>
+            </a:r>
+            <a:endParaRPr b="0" lang="en-US" sz="1800" spc="-1" strike="noStrike">
+              <a:solidFill>
+                <a:srgbClr val="000000"/>
+              </a:solidFill>
+              <a:latin typeface="Arial"/>
+            </a:endParaRPr>
+          </a:p>
+          <a:p>
+            <a:pPr marL="432000" indent="-324000">
+              <a:lnSpc>
+                <a:spcPct val="100000"/>
+              </a:lnSpc>
+              <a:spcBef>
+                <a:spcPts val="1417"/>
+              </a:spcBef>
+              <a:buClr>
+                <a:srgbClr val="000000"/>
+              </a:buClr>
+              <a:buSzPct val="45000"/>
+              <a:buFont typeface="Wingdings" charset="2"/>
+              <a:buChar char=""/>
+              <a:tabLst>
+                <a:tab algn="l" pos="0"/>
+              </a:tabLst>
+            </a:pPr>
+            <a:r>
+              <a:rPr b="0" lang="en-US" sz="1800" spc="-1" strike="noStrike">
+                <a:solidFill>
+                  <a:srgbClr val="000000"/>
+                </a:solidFill>
+                <a:latin typeface="Arial"/>
+              </a:rPr>
+              <a:t>At the tuned cutoff, the LSTM catches about 74% of peaks 3 hours ahead, and about 60% of its alarms are real peaks. Grid operators should decide whether roughly 4 false alarms per 6 correct alarms/peaks is acceptable for deployment of the model to production. If not, future training could include additional parameters such as weather, holiday and Ramadan calendars, and voltage and phase metadata, and test across a full year for every city.</a:t>
+            </a:r>
+            <a:endParaRPr b="0" lang="en-US" sz="1800" spc="-1" strike="noStrike">
+              <a:solidFill>
+                <a:srgbClr val="000000"/>
+              </a:solidFill>
+              <a:latin typeface="Arial"/>
+            </a:endParaRPr>
+          </a:p>
+          <a:p>
+            <a:pPr marL="432000" indent="0">
+              <a:lnSpc>
+                <a:spcPct val="100000"/>
+              </a:lnSpc>
+              <a:spcBef>
+                <a:spcPts val="1417"/>
+              </a:spcBef>
+              <a:buNone/>
+              <a:tabLst>
+                <a:tab algn="l" pos="0"/>
+              </a:tabLst>
+            </a:pPr>
+            <a:endParaRPr b="0" lang="en-US" sz="1800" spc="-1" strike="noStrike">
+              <a:solidFill>
+                <a:srgbClr val="000000"/>
+              </a:solidFill>
+              <a:latin typeface="Arial"/>
+            </a:endParaRPr>
+          </a:p>
+        </p:txBody>
+      </p:sp>
+      <p:pic>
+        <p:nvPicPr>
+          <p:cNvPr id="114" name="" descr=""/>
+          <p:cNvPicPr/>
+          <p:nvPr/>
+        </p:nvPicPr>
+        <p:blipFill>
+          <a:blip r:embed="rId1"/>
+          <a:stretch/>
+        </p:blipFill>
+        <p:spPr>
+          <a:xfrm>
+            <a:off x="455760" y="914400"/>
+            <a:ext cx="11202840" cy="3063960"/>
+          </a:xfrm>
+          <a:prstGeom prst="rect">
+            <a:avLst/>
+          </a:prstGeom>
+          <a:ln w="0">
+            <a:noFill/>
+          </a:ln>
+        </p:spPr>
+      </p:pic>
     </p:spTree>
   </p:cSld>
   <mc:AlternateContent>
@@ -6470,7 +7291,7 @@
         <p:spPr>
           <a:xfrm>
             <a:off x="838080" y="365040"/>
-            <a:ext cx="10513800" cy="1323720"/>
+            <a:ext cx="10513080" cy="1323000"/>
           </a:xfrm>
           <a:prstGeom prst="rect">
             <a:avLst/>
@@ -6525,7 +7346,7 @@
         <p:spPr>
           <a:xfrm>
             <a:off x="838080" y="1825560"/>
-            <a:ext cx="10513800" cy="4349520"/>
+            <a:ext cx="10513080" cy="4348800"/>
           </a:xfrm>
           <a:prstGeom prst="rect">
             <a:avLst/>
@@ -6614,7 +7435,7 @@
         <p:spPr>
           <a:xfrm>
             <a:off x="838080" y="365040"/>
-            <a:ext cx="10513800" cy="1323720"/>
+            <a:ext cx="10513080" cy="1323000"/>
           </a:xfrm>
           <a:prstGeom prst="rect">
             <a:avLst/>
@@ -6669,7 +7490,7 @@
         <p:spPr>
           <a:xfrm>
             <a:off x="838080" y="1825560"/>
-            <a:ext cx="10513800" cy="4349520"/>
+            <a:ext cx="10513080" cy="4348800"/>
           </a:xfrm>
           <a:prstGeom prst="rect">
             <a:avLst/>
@@ -6758,7 +7579,7 @@
         <p:spPr>
           <a:xfrm>
             <a:off x="838080" y="365040"/>
-            <a:ext cx="10513800" cy="1323720"/>
+            <a:ext cx="10513080" cy="1323000"/>
           </a:xfrm>
           <a:prstGeom prst="rect">
             <a:avLst/>
@@ -6813,7 +7634,7 @@
         <p:spPr>
           <a:xfrm>
             <a:off x="838080" y="1825560"/>
-            <a:ext cx="10513800" cy="4349520"/>
+            <a:ext cx="10513080" cy="4348800"/>
           </a:xfrm>
           <a:prstGeom prst="rect">
             <a:avLst/>
@@ -7022,7 +7843,7 @@
         <p:spPr>
           <a:xfrm>
             <a:off x="1080" y="0"/>
-            <a:ext cx="7999200" cy="913680"/>
+            <a:ext cx="7998480" cy="912960"/>
           </a:xfrm>
           <a:prstGeom prst="rect">
             <a:avLst/>
@@ -7077,7 +7898,7 @@
         <p:spPr>
           <a:xfrm>
             <a:off x="0" y="651600"/>
-            <a:ext cx="12115080" cy="6205680"/>
+            <a:ext cx="12114360" cy="6204960"/>
           </a:xfrm>
           <a:prstGeom prst="rect">
             <a:avLst/>
@@ -7356,7 +8177,7 @@
         <p:spPr>
           <a:xfrm>
             <a:off x="838080" y="365040"/>
-            <a:ext cx="10513800" cy="1323720"/>
+            <a:ext cx="10513080" cy="1323000"/>
           </a:xfrm>
           <a:prstGeom prst="rect">
             <a:avLst/>
@@ -7411,7 +8232,7 @@
         <p:spPr>
           <a:xfrm>
             <a:off x="838080" y="1825560"/>
-            <a:ext cx="10513800" cy="4349520"/>
+            <a:ext cx="10513080" cy="4348800"/>
           </a:xfrm>
           <a:prstGeom prst="rect">
             <a:avLst/>
@@ -7570,7 +8391,7 @@
         <p:spPr>
           <a:xfrm>
             <a:off x="1440" y="0"/>
-            <a:ext cx="10513800" cy="685440"/>
+            <a:ext cx="10513080" cy="684720"/>
           </a:xfrm>
           <a:prstGeom prst="rect">
             <a:avLst/>
@@ -7625,7 +8446,7 @@
         <p:spPr>
           <a:xfrm>
             <a:off x="0" y="679320"/>
-            <a:ext cx="5486040" cy="6178320"/>
+            <a:ext cx="5485320" cy="6177600"/>
           </a:xfrm>
           <a:prstGeom prst="rect">
             <a:avLst/>
@@ -7910,7 +8731,7 @@
         <p:spPr>
           <a:xfrm>
             <a:off x="6755040" y="18720"/>
-            <a:ext cx="1016640" cy="345600"/>
+            <a:ext cx="1015920" cy="344880"/>
           </a:xfrm>
           <a:prstGeom prst="rect">
             <a:avLst/>
@@ -7959,7 +8780,7 @@
         <p:spPr>
           <a:xfrm>
             <a:off x="0" y="1060920"/>
-            <a:ext cx="5047560" cy="3053520"/>
+            <a:ext cx="5046840" cy="3052800"/>
           </a:xfrm>
           <a:prstGeom prst="rect">
             <a:avLst/>
@@ -7982,7 +8803,7 @@
         <p:spPr>
           <a:xfrm>
             <a:off x="0" y="4572000"/>
-            <a:ext cx="5511240" cy="2177280"/>
+            <a:ext cx="5510520" cy="2176560"/>
           </a:xfrm>
           <a:prstGeom prst="rect">
             <a:avLst/>
@@ -8001,7 +8822,7 @@
         <p:spPr>
           <a:xfrm>
             <a:off x="5715000" y="679320"/>
-            <a:ext cx="5486040" cy="6178320"/>
+            <a:ext cx="5485320" cy="6177600"/>
           </a:xfrm>
           <a:prstGeom prst="rect">
             <a:avLst/>
@@ -8293,7 +9114,7 @@
         <p:spPr>
           <a:xfrm>
             <a:off x="5613840" y="1118160"/>
-            <a:ext cx="5130000" cy="2767680"/>
+            <a:ext cx="5129280" cy="2766960"/>
           </a:xfrm>
           <a:prstGeom prst="rect">
             <a:avLst/>
@@ -8306,22 +9127,28 @@
       <p:sp>
         <p:nvSpPr>
           <p:cNvPr id="101" name=""/>
-          <p:cNvSpPr txBox="1"/>
+          <p:cNvSpPr/>
           <p:nvPr/>
         </p:nvSpPr>
         <p:spPr>
           <a:xfrm>
             <a:off x="5257800" y="3886200"/>
-            <a:ext cx="6934320" cy="2847240"/>
-          </a:xfrm>
-          <a:prstGeom prst="rect">
-            <a:avLst/>
-          </a:prstGeom>
-          <a:noFill/>
-          <a:ln w="0">
-            <a:noFill/>
-          </a:ln>
-        </p:spPr>
+            <a:ext cx="6933600" cy="2846520"/>
+          </a:xfrm>
+          <a:prstGeom prst="rect">
+            <a:avLst/>
+          </a:prstGeom>
+          <a:noFill/>
+          <a:ln w="0">
+            <a:noFill/>
+          </a:ln>
+        </p:spPr>
+        <p:style>
+          <a:lnRef idx="0"/>
+          <a:fillRef idx="0"/>
+          <a:effectRef idx="0"/>
+          <a:fontRef idx="minor"/>
+        </p:style>
         <p:txBody>
           <a:bodyPr lIns="90000" rIns="90000" tIns="45000" bIns="45000" anchor="t">
             <a:noAutofit/>
@@ -8478,7 +9305,7 @@
         <p:spPr>
           <a:xfrm>
             <a:off x="838080" y="365040"/>
-            <a:ext cx="10513800" cy="1323720"/>
+            <a:ext cx="10513080" cy="1323000"/>
           </a:xfrm>
           <a:prstGeom prst="rect">
             <a:avLst/>
@@ -8533,7 +9360,7 @@
         <p:spPr>
           <a:xfrm>
             <a:off x="838080" y="1825560"/>
-            <a:ext cx="10513800" cy="4349520"/>
+            <a:ext cx="10513080" cy="4348800"/>
           </a:xfrm>
           <a:prstGeom prst="rect">
             <a:avLst/>
@@ -8712,7 +9539,7 @@
         <p:spPr>
           <a:xfrm>
             <a:off x="7652160" y="0"/>
-            <a:ext cx="4539240" cy="1510200"/>
+            <a:ext cx="4538520" cy="1509480"/>
           </a:xfrm>
           <a:prstGeom prst="rect">
             <a:avLst/>
@@ -8731,7 +9558,7 @@
         <p:spPr>
           <a:xfrm>
             <a:off x="6629400" y="18720"/>
-            <a:ext cx="1142280" cy="345600"/>
+            <a:ext cx="1141560" cy="344880"/>
           </a:xfrm>
           <a:prstGeom prst="rect">
             <a:avLst/>
@@ -8819,7 +9646,7 @@
         <p:spPr>
           <a:xfrm>
             <a:off x="0" y="0"/>
-            <a:ext cx="10513800" cy="685440"/>
+            <a:ext cx="10513080" cy="684720"/>
           </a:xfrm>
           <a:prstGeom prst="rect">
             <a:avLst/>
@@ -8874,7 +9701,7 @@
         <p:spPr>
           <a:xfrm>
             <a:off x="0" y="679320"/>
-            <a:ext cx="12191760" cy="6178320"/>
+            <a:ext cx="12191040" cy="6177600"/>
           </a:xfrm>
           <a:prstGeom prst="rect">
             <a:avLst/>
@@ -9203,7 +10030,7 @@
         <p:spPr>
           <a:xfrm>
             <a:off x="152280" y="628920"/>
-            <a:ext cx="12039480" cy="3714120"/>
+            <a:ext cx="12038760" cy="3713400"/>
           </a:xfrm>
           <a:prstGeom prst="rect">
             <a:avLst/>
